--- a/docs/presentations/Group9_Presentation4_Week4.pptx
+++ b/docs/presentations/Group9_Presentation4_Week4.pptx
@@ -15,9 +15,10 @@
     <p:sldId id="263" r:id="rId9"/>
     <p:sldId id="264" r:id="rId10"/>
     <p:sldId id="265" r:id="rId11"/>
+    <p:sldId id="266" r:id="rId12"/>
   </p:sldIdLst>
   <p:notesMasterIdLst>
-    <p:notesMasterId r:id="rId12"/>
+    <p:notesMasterId r:id="rId13"/>
   </p:notesMasterIdLst>
   <p:sldSz cx="12192000" cy="6858000"/>
   <p:notesSz cx="6858000" cy="12192000"/>
@@ -599,7 +600,7 @@
           <a:p>
             <a:r>
               <a:rPr lang="en-US" dirty="0"/>
-              <a:t>Same verified links as last week. If the link-budget model on sheet 05 is challenged: FSPL is the standard Friis free-space form, the sensitivity floor is datasheet Table 6-1, and the full derivation is in TELECOM_ANALYSIS.md in the repository.</a:t>
+              <a:t>The closing line is the deck's thesis: machine, then exam, then results. If asked why radio two is not already done, the honest answer is scheduling - the gantt has it in weeks 4 to 5, we are at 42 percent against a 25 percent target, and the disciplined move was to publish the acceptance criteria and metrics before touching the hardware.</a:t>
             </a:r>
             <a:endParaRPr lang="en-US" dirty="0"/>
           </a:p>
@@ -623,6 +624,94 @@
             <a:fld id="{F7021451-1387-4CA6-816F-3879F97B5CBC}" type="slidenum">
               <a:rPr lang="en-US"/>
               <a:t>10</a:t>
+            </a:fld>
+            <a:endParaRPr lang="en-US"/>
+          </a:p>
+        </p:txBody>
+      </p:sp>
+    </p:spTree>
+    <p:extLst>
+      <p:ext uri="{BB962C8B-B14F-4D97-AF65-F5344CB8AC3E}">
+        <p14:creationId xmlns:p14="http://schemas.microsoft.com/office/powerpoint/2010/main" val="1024086991"/>
+      </p:ext>
+    </p:extLst>
+  </p:cSld>
+  <p:clrMapOvr>
+    <a:masterClrMapping/>
+  </p:clrMapOvr>
+</p:notes>
+</file>
+
+<file path=ppt/notesSlides/notesSlide11.xml><?xml version="1.0" encoding="utf-8"?>
+<p:notes xmlns:a="http://schemas.openxmlformats.org/drawingml/2006/main" xmlns:r="http://schemas.openxmlformats.org/officeDocument/2006/relationships" xmlns:p="http://schemas.openxmlformats.org/presentationml/2006/main">
+  <p:cSld>
+    <p:spTree>
+      <p:nvGrpSpPr>
+        <p:cNvPr id="1" name=""/>
+        <p:cNvGrpSpPr/>
+        <p:nvPr/>
+      </p:nvGrpSpPr>
+      <p:grpSpPr>
+        <a:xfrm>
+          <a:off x="0" y="0"/>
+          <a:ext cx="0" cy="0"/>
+          <a:chOff x="0" y="0"/>
+          <a:chExt cx="0" cy="0"/>
+        </a:xfrm>
+      </p:grpSpPr>
+      <p:sp>
+        <p:nvSpPr>
+          <p:cNvPr id="2" name="Slide Image Placeholder 1"/>
+          <p:cNvSpPr>
+            <a:spLocks noGrp="1" noRot="1" noChangeAspect="1"/>
+          </p:cNvSpPr>
+          <p:nvPr>
+            <p:ph type="sldImg"/>
+          </p:nvPr>
+        </p:nvSpPr>
+        <p:spPr/>
+      </p:sp>
+      <p:sp>
+        <p:nvSpPr>
+          <p:cNvPr id="3" name="Notes Placeholder 2"/>
+          <p:cNvSpPr>
+            <a:spLocks noGrp="1"/>
+          </p:cNvSpPr>
+          <p:nvPr>
+            <p:ph type="body" idx="1"/>
+          </p:nvPr>
+        </p:nvSpPr>
+        <p:spPr/>
+        <p:txBody>
+          <a:bodyPr/>
+          <a:lstStyle/>
+          <a:p>
+            <a:r>
+              <a:rPr lang="en-US" dirty="0"/>
+              <a:t>Same verified links as last week. If the link-budget model on sheet 05 is challenged: FSPL is the standard Friis free-space form, the sensitivity floor is datasheet Table 6-1, and the full derivation is in TELECOM_ANALYSIS.md in the repository.</a:t>
+            </a:r>
+            <a:endParaRPr lang="en-US" dirty="0"/>
+          </a:p>
+        </p:txBody>
+      </p:sp>
+      <p:sp>
+        <p:nvSpPr>
+          <p:cNvPr id="4" name="Slide Number Placeholder 3"/>
+          <p:cNvSpPr>
+            <a:spLocks noGrp="1"/>
+          </p:cNvSpPr>
+          <p:nvPr>
+            <p:ph type="sldNum" sz="quarter" idx="10"/>
+          </p:nvPr>
+        </p:nvSpPr>
+        <p:spPr/>
+        <p:txBody>
+          <a:bodyPr/>
+          <a:lstStyle/>
+          <a:p>
+            <a:fld id="{F7021451-1387-4CA6-816F-3879F97B5CBC}" type="slidenum">
+              <a:rPr lang="en-US"/>
+              <a:t>11</a:t>
             </a:fld>
             <a:endParaRPr lang="en-US"/>
           </a:p>
@@ -775,7 +864,7 @@
           <a:p>
             <a:r>
               <a:rPr lang="en-US" dirty="0"/>
-              <a:t>Left box is the code running today, verbatim from the repository, including its own TODO comment. Right box is the design being implemented this week. The argument: the pattern is proven - the radio's BLE address already lives in NVS the same way. And the sequencing point matters to a reviewer: build the chooser before the ambiguity arrives, not after.</a:t>
+              <a:t>The week's one hard result: on the road, position and speed updated every ten seconds as configured - the first drive where observed cadence matched designed cadence. Tell the archaeology briefly: three earlier defects (position precision grid, 30-second GPS refresh, ghost re-broadcasts) each masked this until fixed, so this drive is the validation that the whole chain is clean. The navy card ties it forward: PDR and the age metric on sheet 09 are only measurable because the schedule is now known-good.</a:t>
             </a:r>
             <a:endParaRPr lang="en-US" dirty="0"/>
           </a:p>
@@ -863,7 +952,7 @@
           <a:p>
             <a:r>
               <a:rPr lang="en-US" dirty="0"/>
-              <a:t>The recipe exists because radio one's configuration was learned the hard way and written down each time. The channel URL is the crown jewels: it carries the encryption key, and because the channel name hashes to the frequency slot, it is also the frequency agreement. Read the four acceptance criteria aloud - declaring them before the attempt is the difference between a procedure and a hope. Criterion 2, both OLEDs reading one online, will be the first photograph.</a:t>
+              <a:t>Left box is the code running today, verbatim from the repository, including its own TODO comment. Right box is the design being implemented this week. The argument: the pattern is proven - the radio's BLE address already lives in NVS the same way. And the sequencing point matters to a reviewer: build the chooser before the ambiguity arrives, not after.</a:t>
             </a:r>
             <a:endParaRPr lang="en-US" dirty="0"/>
           </a:p>
@@ -951,7 +1040,7 @@
           <a:p>
             <a:r>
               <a:rPr lang="en-US" dirty="0"/>
-              <a:t>Walk the chart: received power falls with distance (log scale); the orange wall is the minus 131 dBm sensitivity floor from datasheet Table 6-1; the shaded band between free space and the terrain-degraded curve is where reality lives. The claim to make carefully: free space predicts absurd range, tens of kilometers - real range is set by terrain, Fresnel clearance, and the vehicle install, which is precisely what the range campaign measures. The methodological point is the navy card: publishing the prediction before measuring converts a demo into an experiment.</a:t>
+              <a:t>The recipe exists because radio one's configuration was learned the hard way and written down each time. The channel URL is the crown jewels: it carries the encryption key, and because the channel name hashes to the frequency slot, it is also the frequency agreement. Read the four acceptance criteria aloud - declaring them before the attempt is the difference between a procedure and a hope. Criterion 2, both OLEDs reading one online, will be the first photograph.</a:t>
             </a:r>
             <a:endParaRPr lang="en-US" dirty="0"/>
           </a:p>
@@ -1039,7 +1128,7 @@
           <a:p>
             <a:r>
               <a:rPr lang="en-US" dirty="0"/>
-              <a:t>The left photo is the live system being honest about the missing partner; the right photo is the same hardware running the simulator, which has fed fake partners through the real rendering since week one. So the frontend claim is unusual and strong: the plan for radio two's arrival is zero frontend changes. The queued work is the partner-selection screen (pairs with Deo's NVS design) and night readability.</a:t>
+              <a:t>Walk the chart: received power falls with distance (log scale); the orange wall is the minus 131 dBm sensitivity floor from datasheet Table 6-1; the shaded band between free space and the terrain-degraded curve is where reality lives. The claim to make carefully: free space predicts absurd range, tens of kilometers - real range is set by terrain, Fresnel clearance, and the vehicle install, which is precisely what the range campaign measures. The methodological point is the navy card: publishing the prediction before measuring converts a demo into an experiment.</a:t>
             </a:r>
             <a:endParaRPr lang="en-US" dirty="0"/>
           </a:p>
@@ -1127,7 +1216,7 @@
           <a:p>
             <a:r>
               <a:rPr lang="en-US" dirty="0"/>
-              <a:t>Four phases, strictly ordered so each isolates one variable: bench removes distance, static range removes motion, the drive adds motion, edge cases add the failure modes we already catalogued. The right panel is the per-packet log schema - six fields, chosen so sheet 05's curve and sheet 08's metrics can both be computed from the same file. Close on the ledger line: the constraints sheet from last week literally becomes the checklist.</a:t>
+              <a:t>The left photo is the live system being honest about the missing partner; the right photo is the same hardware running the simulator, which has fed fake partners through the real rendering since week one. So the frontend claim is unusual and strong: the plan for radio two's arrival is zero frontend changes. The queued work is the partner-selection screen (pairs with Deo's NVS design) and night readability.</a:t>
             </a:r>
             <a:endParaRPr lang="en-US" dirty="0"/>
           </a:p>
@@ -1215,7 +1304,7 @@
           <a:p>
             <a:r>
               <a:rPr lang="en-US" dirty="0"/>
-              <a:t>Five metrics, each with its definition and a pre-declared pass threshold. Why declare now: after the data exists, any threshold looks chosen to flatter it. PDR is computable because broadcasts are scheduled, so expected count is known. Age p95 is the driver-facing truth. Reconnect covers the known BLE drop cases. DR error audits the dead reckoning against each next real fix. ChUtil keeps us honest citizens of the shared band. Every one computes from the six-field log on sheet 07.</a:t>
+              <a:t>Four phases, strictly ordered so each isolates one variable: bench removes distance, static range removes motion, the drive adds motion, edge cases add the failure modes we already catalogued. The right panel is the per-packet log schema - six fields, chosen so sheet 05's curve and sheet 08's metrics can both be computed from the same file. Close on the ledger line: the constraints sheet from last week literally becomes the checklist.</a:t>
             </a:r>
             <a:endParaRPr lang="en-US" dirty="0"/>
           </a:p>
@@ -1303,7 +1392,7 @@
           <a:p>
             <a:r>
               <a:rPr lang="en-US" dirty="0"/>
-              <a:t>The closing line is the deck's thesis: machine, then exam, then results. If asked why radio two is not already done, the honest answer is scheduling - the gantt has it in weeks 4 to 5, we are at 42 percent against a 25 percent target, and the disciplined move was to publish the acceptance criteria and metrics before touching the hardware.</a:t>
+              <a:t>Five metrics, each with its definition and a pre-declared pass threshold. Why declare now: after the data exists, any threshold looks chosen to flatter it. PDR is computable because broadcasts are scheduled, so expected count is known. Age p95 is the driver-facing truth. Reconnect covers the known BLE drop cases. DR error audits the dead reckoning against each next real fix. ChUtil keeps us honest citizens of the shared band. Every one computes from the six-field log on sheet 07.</a:t>
             </a:r>
             <a:endParaRPr lang="en-US" dirty="0"/>
           </a:p>
@@ -1832,7 +1921,7 @@
                 <a:ea typeface="Courier New" pitchFamily="34" charset="-122"/>
                 <a:cs typeface="Courier New" pitchFamily="34" charset="-120"/>
               </a:rPr>
-              <a:t>SHEET 01/10  REV D  2026-09-16</a:t>
+              <a:t>SHEET 01/11  REV D  2026-09-16</a:t>
             </a:r>
             <a:endParaRPr lang="en-US" sz="900" dirty="0"/>
           </a:p>
@@ -2823,7 +2912,7 @@
                 <a:ea typeface="Arial" pitchFamily="34" charset="-122"/>
                 <a:cs typeface="Arial" pitchFamily="34" charset="-120"/>
               </a:rPr>
-              <a:t>Four of five system layers are proven. This week we publish, in advance, everything the fifth layer will be judged by: the provisioning procedure for radio two, the partner-selection design, the predicted link curve, the drive-test protocol, and the metrics. Next review reports results against this sheet set.</a:t>
+              <a:t>This week's drive test closed the cadence question: position and speed measured fresh every ten seconds on the road, with one-second motion in between. The rest of this review publishes, in advance, everything the fifth layer will be judged by: procedure, design, predicted curve, protocol, and metrics.</a:t>
             </a:r>
             <a:endParaRPr lang="en-US" sz="1300" dirty="0"/>
           </a:p>
@@ -3216,7 +3305,7 @@
                           <a:ea typeface="Arial" pitchFamily="34" charset="-122"/>
                           <a:cs typeface="Arial" pitchFamily="34" charset="-120"/>
                         </a:rPr>
-                        <a:t>partner selection: from rule to configuration</a:t>
+                        <a:t>drive test: the ten-second cadence, proven</a:t>
                       </a:r>
                       <a:endParaRPr lang="en-US" sz="1150" dirty="0">
                         <a:latin typeface="Arial" charset="0"/>
@@ -4647,7 +4736,7 @@
                 <a:ea typeface="Courier New" pitchFamily="34" charset="-122"/>
                 <a:cs typeface="Courier New" pitchFamily="34" charset="-120"/>
               </a:rPr>
-              <a:t>REFERENCES</a:t>
+              <a:t>STATUS AND NEXT STEPS</a:t>
             </a:r>
             <a:endParaRPr lang="en-US" sz="900" dirty="0"/>
           </a:p>
@@ -4686,7 +4775,995 @@
                 <a:ea typeface="Courier New" pitchFamily="34" charset="-122"/>
                 <a:cs typeface="Courier New" pitchFamily="34" charset="-120"/>
               </a:rPr>
-              <a:t>SHEET 10/10  REV D  2026-09-16</a:t>
+              <a:t>SHEET 10/11  REV D  2026-09-16</a:t>
+            </a:r>
+            <a:endParaRPr lang="en-US" sz="900" dirty="0"/>
+          </a:p>
+        </p:txBody>
+      </p:sp>
+      <p:sp>
+        <p:nvSpPr>
+          <p:cNvPr id="7" name="Text 5"/>
+          <p:cNvSpPr txBox="1"/>
+          <p:nvPr/>
+        </p:nvSpPr>
+        <p:spPr>
+          <a:xfrm>
+            <a:off x="457200" y="329184"/>
+            <a:ext cx="9052560" cy="566928"/>
+          </a:xfrm>
+          <a:prstGeom prst="rect">
+            <a:avLst/>
+          </a:prstGeom>
+          <a:noFill/>
+          <a:ln/>
+        </p:spPr>
+        <p:txBody>
+          <a:bodyPr wrap="square" lIns="0" tIns="0" rIns="0" bIns="0" rtlCol="0" anchor="ctr"/>
+          <a:lstStyle/>
+          <a:p>
+            <a:pPr indent="0" marL="0">
+              <a:buNone/>
+            </a:pPr>
+            <a:r>
+              <a:rPr lang="en-US" sz="2300" b="1" spc="200" kern="0" dirty="0">
+                <a:solidFill>
+                  <a:srgbClr val="16213D"/>
+                </a:solidFill>
+                <a:latin typeface="Arial" pitchFamily="34" charset="0"/>
+                <a:ea typeface="Arial" pitchFamily="34" charset="-122"/>
+                <a:cs typeface="Arial" pitchFamily="34" charset="-120"/>
+              </a:rPr>
+              <a:t>STATUS AND WHAT COMES NEXT</a:t>
+            </a:r>
+            <a:endParaRPr lang="en-US" sz="2300" dirty="0"/>
+          </a:p>
+        </p:txBody>
+      </p:sp>
+      <p:sp>
+        <p:nvSpPr>
+          <p:cNvPr id="8" name="Shape 6"/>
+          <p:cNvSpPr/>
+          <p:nvPr/>
+        </p:nvSpPr>
+        <p:spPr>
+          <a:xfrm>
+            <a:off x="457200" y="1097280"/>
+            <a:ext cx="2688336" cy="1371600"/>
+          </a:xfrm>
+          <a:prstGeom prst="rect">
+            <a:avLst/>
+          </a:prstGeom>
+          <a:solidFill>
+            <a:srgbClr val="F2F5FA"/>
+          </a:solidFill>
+          <a:ln w="9525">
+            <a:solidFill>
+              <a:srgbClr val="9AA7BE"/>
+            </a:solidFill>
+            <a:prstDash val="solid"/>
+          </a:ln>
+        </p:spPr>
+      </p:sp>
+      <p:sp>
+        <p:nvSpPr>
+          <p:cNvPr id="9" name="Text 7"/>
+          <p:cNvSpPr txBox="1"/>
+          <p:nvPr/>
+        </p:nvSpPr>
+        <p:spPr>
+          <a:xfrm>
+            <a:off x="640080" y="1207008"/>
+            <a:ext cx="2377440" cy="548640"/>
+          </a:xfrm>
+          <a:prstGeom prst="rect">
+            <a:avLst/>
+          </a:prstGeom>
+          <a:noFill/>
+          <a:ln/>
+        </p:spPr>
+        <p:txBody>
+          <a:bodyPr wrap="square" lIns="0" tIns="0" rIns="0" bIns="0" rtlCol="0" anchor="ctr"/>
+          <a:lstStyle/>
+          <a:p>
+            <a:pPr indent="0" marL="0">
+              <a:buNone/>
+            </a:pPr>
+            <a:r>
+              <a:rPr lang="en-US" sz="2700" b="1" dirty="0">
+                <a:solidFill>
+                  <a:srgbClr val="16213D"/>
+                </a:solidFill>
+                <a:latin typeface="Arial" pitchFamily="34" charset="0"/>
+                <a:ea typeface="Arial" pitchFamily="34" charset="-122"/>
+                <a:cs typeface="Arial" pitchFamily="34" charset="-120"/>
+              </a:rPr>
+              <a:t>42%</a:t>
+            </a:r>
+            <a:endParaRPr lang="en-US" sz="2700" dirty="0"/>
+          </a:p>
+        </p:txBody>
+      </p:sp>
+      <p:sp>
+        <p:nvSpPr>
+          <p:cNvPr id="10" name="Text 8"/>
+          <p:cNvSpPr txBox="1"/>
+          <p:nvPr/>
+        </p:nvSpPr>
+        <p:spPr>
+          <a:xfrm>
+            <a:off x="640080" y="1783080"/>
+            <a:ext cx="2377440" cy="594360"/>
+          </a:xfrm>
+          <a:prstGeom prst="rect">
+            <a:avLst/>
+          </a:prstGeom>
+          <a:noFill/>
+          <a:ln/>
+        </p:spPr>
+        <p:txBody>
+          <a:bodyPr wrap="square" lIns="0" tIns="0" rIns="0" bIns="0" rtlCol="0" anchor="ctr"/>
+          <a:lstStyle/>
+          <a:p>
+            <a:pPr indent="0" marL="0">
+              <a:buNone/>
+            </a:pPr>
+            <a:r>
+              <a:rPr lang="en-US" sz="1050" dirty="0">
+                <a:solidFill>
+                  <a:srgbClr val="5E6B85"/>
+                </a:solidFill>
+                <a:latin typeface="Arial" pitchFamily="34" charset="0"/>
+                <a:ea typeface="Arial" pitchFamily="34" charset="-122"/>
+                <a:cs typeface="Arial" pitchFamily="34" charset="-120"/>
+              </a:rPr>
+              <a:t>of tasks complete against a 25% week-four target</a:t>
+            </a:r>
+            <a:endParaRPr lang="en-US" sz="1050" dirty="0"/>
+          </a:p>
+        </p:txBody>
+      </p:sp>
+      <p:sp>
+        <p:nvSpPr>
+          <p:cNvPr id="11" name="Shape 9"/>
+          <p:cNvSpPr/>
+          <p:nvPr/>
+        </p:nvSpPr>
+        <p:spPr>
+          <a:xfrm>
+            <a:off x="3328416" y="1097280"/>
+            <a:ext cx="2688336" cy="1371600"/>
+          </a:xfrm>
+          <a:prstGeom prst="rect">
+            <a:avLst/>
+          </a:prstGeom>
+          <a:solidFill>
+            <a:srgbClr val="F2F5FA"/>
+          </a:solidFill>
+          <a:ln w="9525">
+            <a:solidFill>
+              <a:srgbClr val="9AA7BE"/>
+            </a:solidFill>
+            <a:prstDash val="solid"/>
+          </a:ln>
+        </p:spPr>
+      </p:sp>
+      <p:sp>
+        <p:nvSpPr>
+          <p:cNvPr id="12" name="Text 10"/>
+          <p:cNvSpPr txBox="1"/>
+          <p:nvPr/>
+        </p:nvSpPr>
+        <p:spPr>
+          <a:xfrm>
+            <a:off x="3511296" y="1207008"/>
+            <a:ext cx="2377440" cy="548640"/>
+          </a:xfrm>
+          <a:prstGeom prst="rect">
+            <a:avLst/>
+          </a:prstGeom>
+          <a:noFill/>
+          <a:ln/>
+        </p:spPr>
+        <p:txBody>
+          <a:bodyPr wrap="square" lIns="0" tIns="0" rIns="0" bIns="0" rtlCol="0" anchor="ctr"/>
+          <a:lstStyle/>
+          <a:p>
+            <a:pPr indent="0" marL="0">
+              <a:buNone/>
+            </a:pPr>
+            <a:r>
+              <a:rPr lang="en-US" sz="2700" b="1" dirty="0">
+                <a:solidFill>
+                  <a:srgbClr val="16213D"/>
+                </a:solidFill>
+                <a:latin typeface="Arial" pitchFamily="34" charset="0"/>
+                <a:ea typeface="Arial" pitchFamily="34" charset="-122"/>
+                <a:cs typeface="Arial" pitchFamily="34" charset="-120"/>
+              </a:rPr>
+              <a:t>10 s</a:t>
+            </a:r>
+            <a:endParaRPr lang="en-US" sz="2700" dirty="0"/>
+          </a:p>
+        </p:txBody>
+      </p:sp>
+      <p:sp>
+        <p:nvSpPr>
+          <p:cNvPr id="13" name="Text 11"/>
+          <p:cNvSpPr txBox="1"/>
+          <p:nvPr/>
+        </p:nvSpPr>
+        <p:spPr>
+          <a:xfrm>
+            <a:off x="3511296" y="1783080"/>
+            <a:ext cx="2377440" cy="594360"/>
+          </a:xfrm>
+          <a:prstGeom prst="rect">
+            <a:avLst/>
+          </a:prstGeom>
+          <a:noFill/>
+          <a:ln/>
+        </p:spPr>
+        <p:txBody>
+          <a:bodyPr wrap="square" lIns="0" tIns="0" rIns="0" bIns="0" rtlCol="0" anchor="ctr"/>
+          <a:lstStyle/>
+          <a:p>
+            <a:pPr indent="0" marL="0">
+              <a:buNone/>
+            </a:pPr>
+            <a:r>
+              <a:rPr lang="en-US" sz="1050" dirty="0">
+                <a:solidFill>
+                  <a:srgbClr val="5E6B85"/>
+                </a:solidFill>
+                <a:latin typeface="Arial" pitchFamily="34" charset="0"/>
+                <a:ea typeface="Arial" pitchFamily="34" charset="-122"/>
+                <a:cs typeface="Arial" pitchFamily="34" charset="-120"/>
+              </a:rPr>
+              <a:t>cadence verified on the road this week</a:t>
+            </a:r>
+            <a:endParaRPr lang="en-US" sz="1050" dirty="0"/>
+          </a:p>
+        </p:txBody>
+      </p:sp>
+      <p:sp>
+        <p:nvSpPr>
+          <p:cNvPr id="14" name="Shape 12"/>
+          <p:cNvSpPr/>
+          <p:nvPr/>
+        </p:nvSpPr>
+        <p:spPr>
+          <a:xfrm>
+            <a:off x="6199632" y="1097280"/>
+            <a:ext cx="2688336" cy="1371600"/>
+          </a:xfrm>
+          <a:prstGeom prst="rect">
+            <a:avLst/>
+          </a:prstGeom>
+          <a:solidFill>
+            <a:srgbClr val="F2F5FA"/>
+          </a:solidFill>
+          <a:ln w="9525">
+            <a:solidFill>
+              <a:srgbClr val="9AA7BE"/>
+            </a:solidFill>
+            <a:prstDash val="solid"/>
+          </a:ln>
+        </p:spPr>
+      </p:sp>
+      <p:sp>
+        <p:nvSpPr>
+          <p:cNvPr id="15" name="Text 13"/>
+          <p:cNvSpPr txBox="1"/>
+          <p:nvPr/>
+        </p:nvSpPr>
+        <p:spPr>
+          <a:xfrm>
+            <a:off x="6382512" y="1207008"/>
+            <a:ext cx="2377440" cy="548640"/>
+          </a:xfrm>
+          <a:prstGeom prst="rect">
+            <a:avLst/>
+          </a:prstGeom>
+          <a:noFill/>
+          <a:ln/>
+        </p:spPr>
+        <p:txBody>
+          <a:bodyPr wrap="square" lIns="0" tIns="0" rIns="0" bIns="0" rtlCol="0" anchor="ctr"/>
+          <a:lstStyle/>
+          <a:p>
+            <a:pPr indent="0" marL="0">
+              <a:buNone/>
+            </a:pPr>
+            <a:r>
+              <a:rPr lang="en-US" sz="2700" b="1" dirty="0">
+                <a:solidFill>
+                  <a:srgbClr val="16213D"/>
+                </a:solidFill>
+                <a:latin typeface="Arial" pitchFamily="34" charset="0"/>
+                <a:ea typeface="Arial" pitchFamily="34" charset="-122"/>
+                <a:cs typeface="Arial" pitchFamily="34" charset="-120"/>
+              </a:rPr>
+              <a:t>4 + 1</a:t>
+            </a:r>
+            <a:endParaRPr lang="en-US" sz="2700" dirty="0"/>
+          </a:p>
+        </p:txBody>
+      </p:sp>
+      <p:sp>
+        <p:nvSpPr>
+          <p:cNvPr id="16" name="Text 14"/>
+          <p:cNvSpPr txBox="1"/>
+          <p:nvPr/>
+        </p:nvSpPr>
+        <p:spPr>
+          <a:xfrm>
+            <a:off x="6382512" y="1783080"/>
+            <a:ext cx="2377440" cy="594360"/>
+          </a:xfrm>
+          <a:prstGeom prst="rect">
+            <a:avLst/>
+          </a:prstGeom>
+          <a:noFill/>
+          <a:ln/>
+        </p:spPr>
+        <p:txBody>
+          <a:bodyPr wrap="square" lIns="0" tIns="0" rIns="0" bIns="0" rtlCol="0" anchor="ctr"/>
+          <a:lstStyle/>
+          <a:p>
+            <a:pPr indent="0" marL="0">
+              <a:buNone/>
+            </a:pPr>
+            <a:r>
+              <a:rPr lang="en-US" sz="1050" dirty="0">
+                <a:solidFill>
+                  <a:srgbClr val="5E6B85"/>
+                </a:solidFill>
+                <a:latin typeface="Arial" pitchFamily="34" charset="0"/>
+                <a:ea typeface="Arial" pitchFamily="34" charset="-122"/>
+                <a:cs typeface="Arial" pitchFamily="34" charset="-120"/>
+              </a:rPr>
+              <a:t>layers proven + the layer this sheet set closes</a:t>
+            </a:r>
+            <a:endParaRPr lang="en-US" sz="1050" dirty="0"/>
+          </a:p>
+        </p:txBody>
+      </p:sp>
+      <p:sp>
+        <p:nvSpPr>
+          <p:cNvPr id="17" name="Shape 15"/>
+          <p:cNvSpPr/>
+          <p:nvPr/>
+        </p:nvSpPr>
+        <p:spPr>
+          <a:xfrm>
+            <a:off x="9070848" y="1097280"/>
+            <a:ext cx="2688336" cy="1371600"/>
+          </a:xfrm>
+          <a:prstGeom prst="rect">
+            <a:avLst/>
+          </a:prstGeom>
+          <a:solidFill>
+            <a:srgbClr val="F2F5FA"/>
+          </a:solidFill>
+          <a:ln w="9525">
+            <a:solidFill>
+              <a:srgbClr val="9AA7BE"/>
+            </a:solidFill>
+            <a:prstDash val="solid"/>
+          </a:ln>
+        </p:spPr>
+      </p:sp>
+      <p:sp>
+        <p:nvSpPr>
+          <p:cNvPr id="18" name="Text 16"/>
+          <p:cNvSpPr txBox="1"/>
+          <p:nvPr/>
+        </p:nvSpPr>
+        <p:spPr>
+          <a:xfrm>
+            <a:off x="9253728" y="1207008"/>
+            <a:ext cx="2377440" cy="548640"/>
+          </a:xfrm>
+          <a:prstGeom prst="rect">
+            <a:avLst/>
+          </a:prstGeom>
+          <a:noFill/>
+          <a:ln/>
+        </p:spPr>
+        <p:txBody>
+          <a:bodyPr wrap="square" lIns="0" tIns="0" rIns="0" bIns="0" rtlCol="0" anchor="ctr"/>
+          <a:lstStyle/>
+          <a:p>
+            <a:pPr indent="0" marL="0">
+              <a:buNone/>
+            </a:pPr>
+            <a:r>
+              <a:rPr lang="en-US" sz="2700" b="1" dirty="0">
+                <a:solidFill>
+                  <a:srgbClr val="16213D"/>
+                </a:solidFill>
+                <a:latin typeface="Arial" pitchFamily="34" charset="0"/>
+                <a:ea typeface="Arial" pitchFamily="34" charset="-122"/>
+                <a:cs typeface="Arial" pitchFamily="34" charset="-120"/>
+              </a:rPr>
+              <a:t>5</a:t>
+            </a:r>
+            <a:endParaRPr lang="en-US" sz="2700" dirty="0"/>
+          </a:p>
+        </p:txBody>
+      </p:sp>
+      <p:sp>
+        <p:nvSpPr>
+          <p:cNvPr id="19" name="Text 17"/>
+          <p:cNvSpPr txBox="1"/>
+          <p:nvPr/>
+        </p:nvSpPr>
+        <p:spPr>
+          <a:xfrm>
+            <a:off x="9253728" y="1783080"/>
+            <a:ext cx="2377440" cy="594360"/>
+          </a:xfrm>
+          <a:prstGeom prst="rect">
+            <a:avLst/>
+          </a:prstGeom>
+          <a:noFill/>
+          <a:ln/>
+        </p:spPr>
+        <p:txBody>
+          <a:bodyPr wrap="square" lIns="0" tIns="0" rIns="0" bIns="0" rtlCol="0" anchor="ctr"/>
+          <a:lstStyle/>
+          <a:p>
+            <a:pPr indent="0" marL="0">
+              <a:buNone/>
+            </a:pPr>
+            <a:r>
+              <a:rPr lang="en-US" sz="1050" dirty="0">
+                <a:solidFill>
+                  <a:srgbClr val="5E6B85"/>
+                </a:solidFill>
+                <a:latin typeface="Arial" pitchFamily="34" charset="0"/>
+                <a:ea typeface="Arial" pitchFamily="34" charset="-122"/>
+                <a:cs typeface="Arial" pitchFamily="34" charset="-120"/>
+              </a:rPr>
+              <a:t>metrics pre-declared, thresholds locked</a:t>
+            </a:r>
+            <a:endParaRPr lang="en-US" sz="1050" dirty="0"/>
+          </a:p>
+        </p:txBody>
+      </p:sp>
+      <p:sp>
+        <p:nvSpPr>
+          <p:cNvPr id="20" name="Text 18"/>
+          <p:cNvSpPr txBox="1"/>
+          <p:nvPr/>
+        </p:nvSpPr>
+        <p:spPr>
+          <a:xfrm>
+            <a:off x="457200" y="2788920"/>
+            <a:ext cx="5760720" cy="320040"/>
+          </a:xfrm>
+          <a:prstGeom prst="rect">
+            <a:avLst/>
+          </a:prstGeom>
+          <a:noFill/>
+          <a:ln/>
+        </p:spPr>
+        <p:txBody>
+          <a:bodyPr wrap="square" lIns="0" tIns="0" rIns="0" bIns="0" rtlCol="0" anchor="ctr"/>
+          <a:lstStyle/>
+          <a:p>
+            <a:pPr indent="0" marL="0">
+              <a:buNone/>
+            </a:pPr>
+            <a:r>
+              <a:rPr lang="en-US" sz="1300" b="1" spc="100" kern="0" dirty="0">
+                <a:solidFill>
+                  <a:srgbClr val="16213D"/>
+                </a:solidFill>
+                <a:latin typeface="Arial" pitchFamily="34" charset="0"/>
+                <a:ea typeface="Arial" pitchFamily="34" charset="-122"/>
+                <a:cs typeface="Arial" pitchFamily="34" charset="-120"/>
+              </a:rPr>
+              <a:t>DONE THIS WEEK, AND NEXT IN ORDER</a:t>
+            </a:r>
+            <a:endParaRPr lang="en-US" sz="1300" dirty="0"/>
+          </a:p>
+        </p:txBody>
+      </p:sp>
+      <p:sp>
+        <p:nvSpPr>
+          <p:cNvPr id="21" name="Text 19"/>
+          <p:cNvSpPr txBox="1"/>
+          <p:nvPr/>
+        </p:nvSpPr>
+        <p:spPr>
+          <a:xfrm>
+            <a:off x="457200" y="3154680"/>
+            <a:ext cx="5760720" cy="2103120"/>
+          </a:xfrm>
+          <a:prstGeom prst="rect">
+            <a:avLst/>
+          </a:prstGeom>
+          <a:noFill/>
+          <a:ln/>
+        </p:spPr>
+        <p:txBody>
+          <a:bodyPr wrap="square" lIns="0" tIns="0" rIns="0" bIns="0" rtlCol="0" anchor="ctr"/>
+          <a:lstStyle/>
+          <a:p>
+            <a:pPr marL="342900" indent="-342900">
+              <a:spcAft>
+                <a:spcPts val="600"/>
+              </a:spcAft>
+              <a:buSzPct val="100000"/>
+              <a:buChar char="▪"/>
+            </a:pPr>
+            <a:r>
+              <a:rPr lang="en-US" sz="1200" dirty="0">
+                <a:solidFill>
+                  <a:srgbClr val="222A3F"/>
+                </a:solidFill>
+                <a:latin typeface="Arial" pitchFamily="34" charset="0"/>
+                <a:ea typeface="Arial" pitchFamily="34" charset="-122"/>
+                <a:cs typeface="Arial" pitchFamily="34" charset="-120"/>
+              </a:rPr>
+              <a:t>Done: drive test verified the ten-second cadence end to end, in motion.</a:t>
+            </a:r>
+            <a:endParaRPr lang="en-US" sz="1200" dirty="0"/>
+          </a:p>
+          <a:p>
+            <a:pPr marL="342900" indent="-342900">
+              <a:spcAft>
+                <a:spcPts val="600"/>
+              </a:spcAft>
+              <a:buSzPct val="100000"/>
+              <a:buChar char="▪"/>
+            </a:pPr>
+            <a:r>
+              <a:rPr lang="en-US" sz="1200" dirty="0">
+                <a:solidFill>
+                  <a:srgbClr val="222A3F"/>
+                </a:solidFill>
+                <a:latin typeface="Arial" pitchFamily="34" charset="0"/>
+                <a:ea typeface="Arial" pitchFamily="34" charset="-122"/>
+                <a:cs typeface="Arial" pitchFamily="34" charset="-120"/>
+              </a:rPr>
+              <a:t>Next: partner selection lands in firmware (Deo), before the ambiguity arrives.</a:t>
+            </a:r>
+            <a:endParaRPr lang="en-US" sz="1200" dirty="0"/>
+          </a:p>
+          <a:p>
+            <a:pPr marL="342900" indent="-342900">
+              <a:spcAft>
+                <a:spcPts val="600"/>
+              </a:spcAft>
+              <a:buSzPct val="100000"/>
+              <a:buChar char="▪"/>
+            </a:pPr>
+            <a:r>
+              <a:rPr lang="en-US" sz="1200" dirty="0">
+                <a:solidFill>
+                  <a:srgbClr val="222A3F"/>
+                </a:solidFill>
+                <a:latin typeface="Arial" pitchFamily="34" charset="0"/>
+                <a:ea typeface="Arial" pitchFamily="34" charset="-122"/>
+                <a:cs typeface="Arial" pitchFamily="34" charset="-120"/>
+              </a:rPr>
+              <a:t>Next: radio two provisioned by the recipe; acceptance criteria checked (Victor).</a:t>
+            </a:r>
+            <a:endParaRPr lang="en-US" sz="1200" dirty="0"/>
+          </a:p>
+          <a:p>
+            <a:pPr marL="342900" indent="-342900">
+              <a:buSzPct val="100000"/>
+              <a:buChar char="▪"/>
+            </a:pPr>
+            <a:r>
+              <a:rPr lang="en-US" sz="1200" dirty="0">
+                <a:solidFill>
+                  <a:srgbClr val="222A3F"/>
+                </a:solidFill>
+                <a:latin typeface="Arial" pitchFamily="34" charset="0"/>
+                <a:ea typeface="Arial" pitchFamily="34" charset="-122"/>
+                <a:cs typeface="Arial" pitchFamily="34" charset="-120"/>
+              </a:rPr>
+              <a:t>Next: bench soak, static range walk with the logging harness (Cannon); partner-selection screen and night readability (Josiah).</a:t>
+            </a:r>
+            <a:endParaRPr lang="en-US" sz="1200" dirty="0"/>
+          </a:p>
+        </p:txBody>
+      </p:sp>
+      <p:sp>
+        <p:nvSpPr>
+          <p:cNvPr id="22" name="Text 20"/>
+          <p:cNvSpPr txBox="1"/>
+          <p:nvPr/>
+        </p:nvSpPr>
+        <p:spPr>
+          <a:xfrm>
+            <a:off x="6537960" y="2788920"/>
+            <a:ext cx="4572000" cy="320040"/>
+          </a:xfrm>
+          <a:prstGeom prst="rect">
+            <a:avLst/>
+          </a:prstGeom>
+          <a:noFill/>
+          <a:ln/>
+        </p:spPr>
+        <p:txBody>
+          <a:bodyPr wrap="square" lIns="0" tIns="0" rIns="0" bIns="0" rtlCol="0" anchor="ctr"/>
+          <a:lstStyle/>
+          <a:p>
+            <a:pPr indent="0" marL="0">
+              <a:buNone/>
+            </a:pPr>
+            <a:r>
+              <a:rPr lang="en-US" sz="1300" b="1" spc="100" kern="0" dirty="0">
+                <a:solidFill>
+                  <a:srgbClr val="16213D"/>
+                </a:solidFill>
+                <a:latin typeface="Arial" pitchFamily="34" charset="0"/>
+                <a:ea typeface="Arial" pitchFamily="34" charset="-122"/>
+                <a:cs typeface="Arial" pitchFamily="34" charset="-120"/>
+              </a:rPr>
+              <a:t>NEXT REVIEW REPORTS</a:t>
+            </a:r>
+            <a:endParaRPr lang="en-US" sz="1300" dirty="0"/>
+          </a:p>
+        </p:txBody>
+      </p:sp>
+      <p:sp>
+        <p:nvSpPr>
+          <p:cNvPr id="23" name="Text 21"/>
+          <p:cNvSpPr txBox="1"/>
+          <p:nvPr/>
+        </p:nvSpPr>
+        <p:spPr>
+          <a:xfrm>
+            <a:off x="6537960" y="3154680"/>
+            <a:ext cx="5120640" cy="2103120"/>
+          </a:xfrm>
+          <a:prstGeom prst="rect">
+            <a:avLst/>
+          </a:prstGeom>
+          <a:noFill/>
+          <a:ln/>
+        </p:spPr>
+        <p:txBody>
+          <a:bodyPr wrap="square" lIns="0" tIns="0" rIns="0" bIns="0" rtlCol="0" anchor="ctr"/>
+          <a:lstStyle/>
+          <a:p>
+            <a:pPr marL="342900" indent="-342900">
+              <a:spcAft>
+                <a:spcPts val="600"/>
+              </a:spcAft>
+              <a:buSzPct val="100000"/>
+              <a:buChar char="▪"/>
+            </a:pPr>
+            <a:r>
+              <a:rPr lang="en-US" sz="1250" dirty="0">
+                <a:solidFill>
+                  <a:srgbClr val="222A3F"/>
+                </a:solidFill>
+                <a:latin typeface="Arial" pitchFamily="34" charset="0"/>
+                <a:ea typeface="Arial" pitchFamily="34" charset="-122"/>
+                <a:cs typeface="Arial" pitchFamily="34" charset="-120"/>
+              </a:rPr>
+              <a:t>The before/after of the PTR row: “no partner heard yet” to live coordinates.</a:t>
+            </a:r>
+            <a:endParaRPr lang="en-US" sz="1250" dirty="0"/>
+          </a:p>
+          <a:p>
+            <a:pPr marL="342900" indent="-342900">
+              <a:spcAft>
+                <a:spcPts val="600"/>
+              </a:spcAft>
+              <a:buSzPct val="100000"/>
+              <a:buChar char="▪"/>
+            </a:pPr>
+            <a:r>
+              <a:rPr lang="en-US" sz="1250" dirty="0">
+                <a:solidFill>
+                  <a:srgbClr val="222A3F"/>
+                </a:solidFill>
+                <a:latin typeface="Arial" pitchFamily="34" charset="0"/>
+                <a:ea typeface="Arial" pitchFamily="34" charset="-122"/>
+                <a:cs typeface="Arial" pitchFamily="34" charset="-120"/>
+              </a:rPr>
+              <a:t>Field RSSI points overlaid on sheet 05's predicted curve.</a:t>
+            </a:r>
+            <a:endParaRPr lang="en-US" sz="1250" dirty="0"/>
+          </a:p>
+          <a:p>
+            <a:pPr marL="342900" indent="-342900">
+              <a:spcAft>
+                <a:spcPts val="600"/>
+              </a:spcAft>
+              <a:buSzPct val="100000"/>
+              <a:buChar char="▪"/>
+            </a:pPr>
+            <a:r>
+              <a:rPr lang="en-US" sz="1250" dirty="0">
+                <a:solidFill>
+                  <a:srgbClr val="222A3F"/>
+                </a:solidFill>
+                <a:latin typeface="Arial" pitchFamily="34" charset="0"/>
+                <a:ea typeface="Arial" pitchFamily="34" charset="-122"/>
+                <a:cs typeface="Arial" pitchFamily="34" charset="-120"/>
+              </a:rPr>
+              <a:t>The five metrics from sheet 08, each marked pass or fail.</a:t>
+            </a:r>
+            <a:endParaRPr lang="en-US" sz="1250" dirty="0"/>
+          </a:p>
+          <a:p>
+            <a:pPr marL="342900" indent="-342900">
+              <a:buSzPct val="100000"/>
+              <a:buChar char="▪"/>
+            </a:pPr>
+            <a:r>
+              <a:rPr lang="en-US" sz="1250" dirty="0">
+                <a:solidFill>
+                  <a:srgbClr val="222A3F"/>
+                </a:solidFill>
+                <a:latin typeface="Arial" pitchFamily="34" charset="0"/>
+                <a:ea typeface="Arial" pitchFamily="34" charset="-122"/>
+                <a:cs typeface="Arial" pitchFamily="34" charset="-120"/>
+              </a:rPr>
+              <a:t>Then the first two-vehicle drive test.</a:t>
+            </a:r>
+            <a:endParaRPr lang="en-US" sz="1250" dirty="0"/>
+          </a:p>
+        </p:txBody>
+      </p:sp>
+      <p:sp>
+        <p:nvSpPr>
+          <p:cNvPr id="24" name="Shape 22"/>
+          <p:cNvSpPr/>
+          <p:nvPr/>
+        </p:nvSpPr>
+        <p:spPr>
+          <a:xfrm>
+            <a:off x="457200" y="5440680"/>
+            <a:ext cx="11292840" cy="685800"/>
+          </a:xfrm>
+          <a:prstGeom prst="rect">
+            <a:avLst/>
+          </a:prstGeom>
+          <a:solidFill>
+            <a:srgbClr val="16213D"/>
+          </a:solidFill>
+          <a:ln/>
+        </p:spPr>
+      </p:sp>
+      <p:sp>
+        <p:nvSpPr>
+          <p:cNvPr id="25" name="Text 23"/>
+          <p:cNvSpPr txBox="1"/>
+          <p:nvPr/>
+        </p:nvSpPr>
+        <p:spPr>
+          <a:xfrm>
+            <a:off x="731520" y="5532120"/>
+            <a:ext cx="10744200" cy="502920"/>
+          </a:xfrm>
+          <a:prstGeom prst="rect">
+            <a:avLst/>
+          </a:prstGeom>
+          <a:noFill/>
+          <a:ln/>
+        </p:spPr>
+        <p:txBody>
+          <a:bodyPr wrap="square" lIns="0" tIns="0" rIns="0" bIns="0" rtlCol="0" anchor="ctr"/>
+          <a:lstStyle/>
+          <a:p>
+            <a:pPr indent="0" marL="0">
+              <a:buNone/>
+            </a:pPr>
+            <a:r>
+              <a:rPr lang="en-US" sz="1250" dirty="0">
+                <a:solidFill>
+                  <a:srgbClr val="FFFFFF"/>
+                </a:solidFill>
+                <a:latin typeface="Arial" pitchFamily="34" charset="0"/>
+                <a:ea typeface="Arial" pitchFamily="34" charset="-122"/>
+                <a:cs typeface="Arial" pitchFamily="34" charset="-120"/>
+              </a:rPr>
+              <a:t>Last week we showed a working machine. This week we published the exam it must pass. Next week it takes the exam.</a:t>
+            </a:r>
+            <a:endParaRPr lang="en-US" sz="1250" dirty="0"/>
+          </a:p>
+        </p:txBody>
+      </p:sp>
+    </p:spTree>
+  </p:cSld>
+  <p:clrMapOvr>
+    <a:masterClrMapping/>
+  </p:clrMapOvr>
+</p:sld>
+</file>
+
+<file path=ppt/slides/slide11.xml><?xml version="1.0" encoding="utf-8"?>
+<p:sld xmlns:a="http://schemas.openxmlformats.org/drawingml/2006/main" xmlns:r="http://schemas.openxmlformats.org/officeDocument/2006/relationships" xmlns:p="http://schemas.openxmlformats.org/presentationml/2006/main">
+  <p:cSld name="Slide 11">
+    <p:bg>
+      <p:bgPr>
+        <a:solidFill>
+          <a:srgbClr val="FFFFFF"/>
+        </a:solidFill>
+      </p:bgPr>
+    </p:bg>
+    <p:spTree>
+      <p:nvGrpSpPr>
+        <p:cNvPr id="1" name=""/>
+        <p:cNvGrpSpPr/>
+        <p:nvPr/>
+      </p:nvGrpSpPr>
+      <p:grpSpPr>
+        <a:xfrm>
+          <a:off x="0" y="0"/>
+          <a:ext cx="0" cy="0"/>
+          <a:chOff x="0" y="0"/>
+          <a:chExt cx="0" cy="0"/>
+        </a:xfrm>
+      </p:grpSpPr>
+      <p:sp>
+        <p:nvSpPr>
+          <p:cNvPr id="2" name="Shape 0"/>
+          <p:cNvSpPr/>
+          <p:nvPr/>
+        </p:nvSpPr>
+        <p:spPr>
+          <a:xfrm>
+            <a:off x="164592" y="146304"/>
+            <a:ext cx="11859768" cy="6565392"/>
+          </a:xfrm>
+          <a:prstGeom prst="rect">
+            <a:avLst/>
+          </a:prstGeom>
+          <a:ln w="22225">
+            <a:solidFill>
+              <a:srgbClr val="16213D"/>
+            </a:solidFill>
+            <a:prstDash val="solid"/>
+          </a:ln>
+        </p:spPr>
+      </p:sp>
+      <p:sp>
+        <p:nvSpPr>
+          <p:cNvPr id="3" name="Shape 1"/>
+          <p:cNvSpPr/>
+          <p:nvPr/>
+        </p:nvSpPr>
+        <p:spPr>
+          <a:xfrm>
+            <a:off x="164592" y="6272784"/>
+            <a:ext cx="11859768" cy="0"/>
+          </a:xfrm>
+          <a:prstGeom prst="line">
+            <a:avLst/>
+          </a:prstGeom>
+          <a:noFill/>
+          <a:ln w="12700">
+            <a:solidFill>
+              <a:srgbClr val="16213D"/>
+            </a:solidFill>
+            <a:prstDash val="solid"/>
+          </a:ln>
+        </p:spPr>
+      </p:sp>
+      <p:sp>
+        <p:nvSpPr>
+          <p:cNvPr id="4" name="Text 2"/>
+          <p:cNvSpPr txBox="1"/>
+          <p:nvPr/>
+        </p:nvSpPr>
+        <p:spPr>
+          <a:xfrm>
+            <a:off x="320040" y="6345936"/>
+            <a:ext cx="4206240" cy="292608"/>
+          </a:xfrm>
+          <a:prstGeom prst="rect">
+            <a:avLst/>
+          </a:prstGeom>
+          <a:noFill/>
+          <a:ln/>
+        </p:spPr>
+        <p:txBody>
+          <a:bodyPr wrap="square" lIns="0" tIns="0" rIns="0" bIns="0" rtlCol="0" anchor="ctr"/>
+          <a:lstStyle/>
+          <a:p>
+            <a:pPr indent="0" marL="0">
+              <a:buNone/>
+            </a:pPr>
+            <a:r>
+              <a:rPr lang="en-US" sz="900" dirty="0">
+                <a:solidFill>
+                  <a:srgbClr val="5E6B85"/>
+                </a:solidFill>
+                <a:latin typeface="Courier New" pitchFamily="34" charset="0"/>
+                <a:ea typeface="Courier New" pitchFamily="34" charset="-122"/>
+                <a:cs typeface="Courier New" pitchFamily="34" charset="-120"/>
+              </a:rPr>
+              <a:t>GROUP 9  |  OFF-GRID VEHICLE TRACKER</a:t>
+            </a:r>
+            <a:endParaRPr lang="en-US" sz="900" dirty="0"/>
+          </a:p>
+        </p:txBody>
+      </p:sp>
+      <p:sp>
+        <p:nvSpPr>
+          <p:cNvPr id="5" name="Text 3"/>
+          <p:cNvSpPr txBox="1"/>
+          <p:nvPr/>
+        </p:nvSpPr>
+        <p:spPr>
+          <a:xfrm>
+            <a:off x="4572000" y="6345936"/>
+            <a:ext cx="4206240" cy="292608"/>
+          </a:xfrm>
+          <a:prstGeom prst="rect">
+            <a:avLst/>
+          </a:prstGeom>
+          <a:noFill/>
+          <a:ln/>
+        </p:spPr>
+        <p:txBody>
+          <a:bodyPr wrap="square" lIns="0" tIns="0" rIns="0" bIns="0" rtlCol="0" anchor="ctr"/>
+          <a:lstStyle/>
+          <a:p>
+            <a:pPr algn="ctr" indent="0" marL="0">
+              <a:buNone/>
+            </a:pPr>
+            <a:r>
+              <a:rPr lang="en-US" sz="900" dirty="0">
+                <a:solidFill>
+                  <a:srgbClr val="5E6B85"/>
+                </a:solidFill>
+                <a:latin typeface="Courier New" pitchFamily="34" charset="0"/>
+                <a:ea typeface="Courier New" pitchFamily="34" charset="-122"/>
+                <a:cs typeface="Courier New" pitchFamily="34" charset="-120"/>
+              </a:rPr>
+              <a:t>REFERENCES</a:t>
+            </a:r>
+            <a:endParaRPr lang="en-US" sz="900" dirty="0"/>
+          </a:p>
+        </p:txBody>
+      </p:sp>
+      <p:sp>
+        <p:nvSpPr>
+          <p:cNvPr id="6" name="Text 4"/>
+          <p:cNvSpPr txBox="1"/>
+          <p:nvPr/>
+        </p:nvSpPr>
+        <p:spPr>
+          <a:xfrm>
+            <a:off x="8869680" y="6345936"/>
+            <a:ext cx="3017520" cy="292608"/>
+          </a:xfrm>
+          <a:prstGeom prst="rect">
+            <a:avLst/>
+          </a:prstGeom>
+          <a:noFill/>
+          <a:ln/>
+        </p:spPr>
+        <p:txBody>
+          <a:bodyPr wrap="square" lIns="0" tIns="0" rIns="0" bIns="0" rtlCol="0" anchor="ctr"/>
+          <a:lstStyle/>
+          <a:p>
+            <a:pPr algn="r" indent="0" marL="0">
+              <a:buNone/>
+            </a:pPr>
+            <a:r>
+              <a:rPr lang="en-US" sz="900" dirty="0">
+                <a:solidFill>
+                  <a:srgbClr val="5E6B85"/>
+                </a:solidFill>
+                <a:latin typeface="Courier New" pitchFamily="34" charset="0"/>
+                <a:ea typeface="Courier New" pitchFamily="34" charset="-122"/>
+                <a:cs typeface="Courier New" pitchFamily="34" charset="-120"/>
+              </a:rPr>
+              <a:t>SHEET 11/11  REV D  2026-09-16</a:t>
             </a:r>
             <a:endParaRPr lang="en-US" sz="900" dirty="0"/>
           </a:p>
@@ -6221,7 +7298,7 @@
                 <a:ea typeface="Courier New" pitchFamily="34" charset="-122"/>
                 <a:cs typeface="Courier New" pitchFamily="34" charset="-120"/>
               </a:rPr>
-              <a:t>SHEET 02/10  REV D  2026-09-16</a:t>
+              <a:t>SHEET 02/11  REV D  2026-09-16</a:t>
             </a:r>
             <a:endParaRPr lang="en-US" sz="900" dirty="0"/>
           </a:p>
@@ -7379,7 +8456,7 @@
                 <a:ea typeface="Courier New" pitchFamily="34" charset="-122"/>
                 <a:cs typeface="Courier New" pitchFamily="34" charset="-120"/>
               </a:rPr>
-              <a:t>PARTNER SELECTION</a:t>
+              <a:t>DRIVE TEST RESULT</a:t>
             </a:r>
             <a:endParaRPr lang="en-US" sz="900" dirty="0"/>
           </a:p>
@@ -7418,7 +8495,7 @@
                 <a:ea typeface="Courier New" pitchFamily="34" charset="-122"/>
                 <a:cs typeface="Courier New" pitchFamily="34" charset="-120"/>
               </a:rPr>
-              <a:t>SHEET 03/10  REV D  2026-09-16</a:t>
+              <a:t>SHEET 03/11  REV D  2026-09-16</a:t>
             </a:r>
             <a:endParaRPr lang="en-US" sz="900" dirty="0"/>
           </a:p>
@@ -7521,7 +8598,7 @@
                 <a:ea typeface="Arial" pitchFamily="34" charset="-122"/>
                 <a:cs typeface="Arial" pitchFamily="34" charset="-120"/>
               </a:rPr>
-              <a:t>PARTNER SELECTION: FROM RULE TO CONFIGURATION</a:t>
+              <a:t>RESULT: EVERY TEN SECONDS, ON THE ROAD</a:t>
             </a:r>
             <a:endParaRPr lang="en-US" sz="2300" dirty="0"/>
           </a:p>
@@ -7535,16 +8612,21 @@
         </p:nvSpPr>
         <p:spPr>
           <a:xfrm>
-            <a:off x="457200" y="1097280"/>
-            <a:ext cx="5532120" cy="1554480"/>
+            <a:off x="457200" y="1188720"/>
+            <a:ext cx="2606040" cy="1051560"/>
           </a:xfrm>
           <a:prstGeom prst="rect">
             <a:avLst/>
           </a:prstGeom>
           <a:solidFill>
-            <a:srgbClr val="1B2440"/>
+            <a:srgbClr val="F2F5FA"/>
           </a:solidFill>
-          <a:ln/>
+          <a:ln w="19050">
+            <a:solidFill>
+              <a:srgbClr val="1199BD"/>
+            </a:solidFill>
+            <a:prstDash val="solid"/>
+          </a:ln>
         </p:spPr>
       </p:sp>
       <p:sp>
@@ -7555,303 +8637,81 @@
         </p:nvSpPr>
         <p:spPr>
           <a:xfrm>
-            <a:off x="594360" y="1161288"/>
-            <a:ext cx="5257800" cy="237744"/>
-          </a:xfrm>
-          <a:prstGeom prst="rect">
-            <a:avLst/>
-          </a:prstGeom>
-          <a:noFill/>
-          <a:ln/>
-        </p:spPr>
-        <p:txBody>
-          <a:bodyPr wrap="square" lIns="0" tIns="0" rIns="0" bIns="0" rtlCol="0" anchor="ctr"/>
-          <a:lstStyle/>
-          <a:p>
-            <a:pPr indent="0" marL="0">
-              <a:buNone/>
-            </a:pPr>
-            <a:r>
-              <a:rPr lang="en-US" sz="1000" b="1" dirty="0">
-                <a:solidFill>
-                  <a:srgbClr val="1199BD"/>
+            <a:off x="548640" y="1261872"/>
+            <a:ext cx="2423160" cy="914400"/>
+          </a:xfrm>
+          <a:prstGeom prst="rect">
+            <a:avLst/>
+          </a:prstGeom>
+          <a:noFill/>
+          <a:ln/>
+        </p:spPr>
+        <p:txBody>
+          <a:bodyPr wrap="square" lIns="0" tIns="0" rIns="0" bIns="0" rtlCol="0" anchor="ctr"/>
+          <a:lstStyle/>
+          <a:p>
+            <a:pPr algn="ctr" indent="0" marL="0">
+              <a:buNone/>
+            </a:pPr>
+            <a:r>
+              <a:rPr lang="en-US" sz="1200" b="1" dirty="0">
+                <a:solidFill>
+                  <a:srgbClr val="16213D"/>
+                </a:solidFill>
+                <a:latin typeface="Arial" pitchFamily="34" charset="0"/>
+                <a:ea typeface="Arial" pitchFamily="34" charset="-122"/>
+                <a:cs typeface="Arial" pitchFamily="34" charset="-120"/>
+              </a:rPr>
+              <a:t>GPS fix</a:t>
+            </a:r>
+            <a:endParaRPr lang="en-US" sz="1200" dirty="0"/>
+          </a:p>
+          <a:p>
+            <a:pPr algn="ctr" indent="0" marL="0">
+              <a:buNone/>
+            </a:pPr>
+            <a:r>
+              <a:rPr lang="en-US" sz="1200" b="1" dirty="0">
+                <a:solidFill>
+                  <a:srgbClr val="1F9D68"/>
+                </a:solidFill>
+                <a:latin typeface="Arial" pitchFamily="34" charset="0"/>
+                <a:ea typeface="Arial" pitchFamily="34" charset="-122"/>
+                <a:cs typeface="Arial" pitchFamily="34" charset="-120"/>
+              </a:rPr>
+              <a:t>every 10 s</a:t>
+            </a:r>
+            <a:endParaRPr lang="en-US" sz="1200" dirty="0"/>
+          </a:p>
+          <a:p>
+            <a:pPr algn="ctr" indent="0" marL="0">
+              <a:buNone/>
+            </a:pPr>
+            <a:r>
+              <a:rPr lang="en-US" sz="850" dirty="0">
+                <a:solidFill>
+                  <a:srgbClr val="5E6B85"/>
                 </a:solidFill>
                 <a:latin typeface="Courier New" pitchFamily="34" charset="0"/>
                 <a:ea typeface="Courier New" pitchFamily="34" charset="-122"/>
                 <a:cs typeface="Courier New" pitchFamily="34" charset="-120"/>
               </a:rPr>
-              <a:t>node_table.cpp  today: the bring-up rule</a:t>
-            </a:r>
-            <a:endParaRPr lang="en-US" sz="1000" dirty="0"/>
-          </a:p>
-        </p:txBody>
-      </p:sp>
-      <p:sp>
-        <p:nvSpPr>
-          <p:cNvPr id="12" name="Text 10"/>
-          <p:cNvSpPr txBox="1"/>
-          <p:nvPr/>
-        </p:nvSpPr>
-        <p:spPr>
-          <a:xfrm>
-            <a:off x="594360" y="1417320"/>
-            <a:ext cx="5257800" cy="1143000"/>
-          </a:xfrm>
-          <a:prstGeom prst="rect">
-            <a:avLst/>
-          </a:prstGeom>
-          <a:noFill/>
-          <a:ln/>
-        </p:spPr>
-        <p:txBody>
-          <a:bodyPr wrap="square" lIns="0" tIns="0" rIns="0" bIns="0" rtlCol="0" anchor="t"/>
-          <a:lstStyle/>
-          <a:p>
-            <a:pPr indent="0" marL="0">
-              <a:buNone/>
-            </a:pPr>
-            <a:r>
-              <a:rPr lang="en-US" sz="1000" dirty="0">
-                <a:solidFill>
-                  <a:srgbClr val="C9D8F0"/>
-                </a:solidFill>
-                <a:latin typeface="Courier New" pitchFamily="34" charset="0"/>
-                <a:ea typeface="Courier New" pitchFamily="34" charset="-122"/>
-                <a:cs typeface="Courier New" pitchFamily="34" charset="-120"/>
-              </a:rPr>
-              <a:t>// first non-self node heard becomes the partner</a:t>
-            </a:r>
-            <a:endParaRPr lang="en-US" sz="1000" dirty="0"/>
-          </a:p>
-          <a:p>
-            <a:pPr indent="0" marL="0">
-              <a:buNone/>
-            </a:pPr>
-            <a:r>
-              <a:rPr lang="en-US" sz="1000" dirty="0">
-                <a:solidFill>
-                  <a:srgbClr val="C9D8F0"/>
-                </a:solidFill>
-                <a:latin typeface="Courier New" pitchFamily="34" charset="0"/>
-                <a:ea typeface="Courier New" pitchFamily="34" charset="-122"/>
-                <a:cs typeface="Courier New" pitchFamily="34" charset="-120"/>
-              </a:rPr>
-              <a:t>if (s_partner_num == 0) {</a:t>
-            </a:r>
-            <a:endParaRPr lang="en-US" sz="1000" dirty="0"/>
-          </a:p>
-          <a:p>
-            <a:pPr indent="0" marL="0">
-              <a:buNone/>
-            </a:pPr>
-            <a:r>
-              <a:rPr lang="en-US" sz="1000" dirty="0">
-                <a:solidFill>
-                  <a:srgbClr val="C9D8F0"/>
-                </a:solidFill>
-                <a:latin typeface="Courier New" pitchFamily="34" charset="0"/>
-                <a:ea typeface="Courier New" pitchFamily="34" charset="-122"/>
-                <a:cs typeface="Courier New" pitchFamily="34" charset="-120"/>
-              </a:rPr>
-              <a:t>    s_partner_num = from_num;</a:t>
-            </a:r>
-            <a:endParaRPr lang="en-US" sz="1000" dirty="0"/>
-          </a:p>
-          <a:p>
-            <a:pPr indent="0" marL="0">
-              <a:buNone/>
-            </a:pPr>
-            <a:r>
-              <a:rPr lang="en-US" sz="1000" dirty="0">
-                <a:solidFill>
-                  <a:srgbClr val="C9D8F0"/>
-                </a:solidFill>
-                <a:latin typeface="Courier New" pitchFamily="34" charset="0"/>
-                <a:ea typeface="Courier New" pitchFamily="34" charset="-122"/>
-                <a:cs typeface="Courier New" pitchFamily="34" charset="-120"/>
-              </a:rPr>
-              <a:t>    Serial.printf("[node] partner: 0x%08lx", from_num);</a:t>
-            </a:r>
-            <a:endParaRPr lang="en-US" sz="1000" dirty="0"/>
-          </a:p>
-          <a:p>
-            <a:pPr indent="0" marL="0">
-              <a:buNone/>
-            </a:pPr>
-            <a:r>
-              <a:rPr lang="en-US" sz="1000" dirty="0">
-                <a:solidFill>
-                  <a:srgbClr val="C9D8F0"/>
-                </a:solidFill>
-                <a:latin typeface="Courier New" pitchFamily="34" charset="0"/>
-                <a:ea typeface="Courier New" pitchFamily="34" charset="-122"/>
-                <a:cs typeface="Courier New" pitchFamily="34" charset="-120"/>
-              </a:rPr>
-              <a:t>}</a:t>
-            </a:r>
-            <a:endParaRPr lang="en-US" sz="1000" dirty="0"/>
-          </a:p>
-        </p:txBody>
-      </p:sp>
-      <p:sp>
-        <p:nvSpPr>
-          <p:cNvPr id="13" name="Shape 11"/>
+              <a:t>gps_update_interval 10</a:t>
+            </a:r>
+            <a:endParaRPr lang="en-US" sz="1200" dirty="0"/>
+          </a:p>
+        </p:txBody>
+      </p:sp>
+      <p:sp>
+        <p:nvSpPr>
+          <p:cNvPr id="12" name="Shape 10"/>
           <p:cNvSpPr/>
           <p:nvPr/>
         </p:nvSpPr>
         <p:spPr>
           <a:xfrm>
-            <a:off x="6355080" y="1097280"/>
-            <a:ext cx="5394960" cy="1554480"/>
-          </a:xfrm>
-          <a:prstGeom prst="rect">
-            <a:avLst/>
-          </a:prstGeom>
-          <a:solidFill>
-            <a:srgbClr val="1B2440"/>
-          </a:solidFill>
-          <a:ln/>
-        </p:spPr>
-      </p:sp>
-      <p:sp>
-        <p:nvSpPr>
-          <p:cNvPr id="14" name="Text 12"/>
-          <p:cNvSpPr txBox="1"/>
-          <p:nvPr/>
-        </p:nvSpPr>
-        <p:spPr>
-          <a:xfrm>
-            <a:off x="6492240" y="1161288"/>
-            <a:ext cx="5120640" cy="237744"/>
-          </a:xfrm>
-          <a:prstGeom prst="rect">
-            <a:avLst/>
-          </a:prstGeom>
-          <a:noFill/>
-          <a:ln/>
-        </p:spPr>
-        <p:txBody>
-          <a:bodyPr wrap="square" lIns="0" tIns="0" rIns="0" bIns="0" rtlCol="0" anchor="ctr"/>
-          <a:lstStyle/>
-          <a:p>
-            <a:pPr indent="0" marL="0">
-              <a:buNone/>
-            </a:pPr>
-            <a:r>
-              <a:rPr lang="en-US" sz="1000" b="1" dirty="0">
-                <a:solidFill>
-                  <a:srgbClr val="1199BD"/>
-                </a:solidFill>
-                <a:latin typeface="Courier New" pitchFamily="34" charset="0"/>
-                <a:ea typeface="Courier New" pitchFamily="34" charset="-122"/>
-                <a:cs typeface="Courier New" pitchFamily="34" charset="-120"/>
-              </a:rPr>
-              <a:t>design: partner as configuration</a:t>
-            </a:r>
-            <a:endParaRPr lang="en-US" sz="1000" dirty="0"/>
-          </a:p>
-        </p:txBody>
-      </p:sp>
-      <p:sp>
-        <p:nvSpPr>
-          <p:cNvPr id="15" name="Text 13"/>
-          <p:cNvSpPr txBox="1"/>
-          <p:nvPr/>
-        </p:nvSpPr>
-        <p:spPr>
-          <a:xfrm>
-            <a:off x="6492240" y="1417320"/>
-            <a:ext cx="5120640" cy="1143000"/>
-          </a:xfrm>
-          <a:prstGeom prst="rect">
-            <a:avLst/>
-          </a:prstGeom>
-          <a:noFill/>
-          <a:ln/>
-        </p:spPr>
-        <p:txBody>
-          <a:bodyPr wrap="square" lIns="0" tIns="0" rIns="0" bIns="0" rtlCol="0" anchor="t"/>
-          <a:lstStyle/>
-          <a:p>
-            <a:pPr indent="0" marL="0">
-              <a:buNone/>
-            </a:pPr>
-            <a:r>
-              <a:rPr lang="en-US" sz="1000" dirty="0">
-                <a:solidFill>
-                  <a:srgbClr val="C9D8F0"/>
-                </a:solidFill>
-                <a:latin typeface="Courier New" pitchFamily="34" charset="0"/>
-                <a:ea typeface="Courier New" pitchFamily="34" charset="-122"/>
-                <a:cs typeface="Courier New" pitchFamily="34" charset="-120"/>
-              </a:rPr>
-              <a:t>// NVS-persisted choice, selectable from the UI</a:t>
-            </a:r>
-            <a:endParaRPr lang="en-US" sz="1000" dirty="0"/>
-          </a:p>
-          <a:p>
-            <a:pPr indent="0" marL="0">
-              <a:buNone/>
-            </a:pPr>
-            <a:r>
-              <a:rPr lang="en-US" sz="1000" dirty="0">
-                <a:solidFill>
-                  <a:srgbClr val="C9D8F0"/>
-                </a:solidFill>
-                <a:latin typeface="Courier New" pitchFamily="34" charset="0"/>
-                <a:ea typeface="Courier New" pitchFamily="34" charset="-122"/>
-                <a:cs typeface="Courier New" pitchFamily="34" charset="-120"/>
-              </a:rPr>
-              <a:t>prefs.putUInt("partner", chosen_node);</a:t>
-            </a:r>
-            <a:endParaRPr lang="en-US" sz="1000" dirty="0"/>
-          </a:p>
-          <a:p>
-            <a:pPr indent="0" marL="0">
-              <a:buNone/>
-            </a:pPr>
-            <a:r>
-              <a:rPr lang="en-US" sz="1000" dirty="0">
-                <a:solidFill>
-                  <a:srgbClr val="C9D8F0"/>
-                </a:solidFill>
-                <a:latin typeface="Courier New" pitchFamily="34" charset="0"/>
-                <a:ea typeface="Courier New" pitchFamily="34" charset="-122"/>
-                <a:cs typeface="Courier New" pitchFamily="34" charset="-120"/>
-              </a:rPr>
-              <a:t>// node_table accepts only the chosen node;</a:t>
-            </a:r>
-            <a:endParaRPr lang="en-US" sz="1000" dirty="0"/>
-          </a:p>
-          <a:p>
-            <a:pPr indent="0" marL="0">
-              <a:buNone/>
-            </a:pPr>
-            <a:r>
-              <a:rPr lang="en-US" sz="1000" dirty="0">
-                <a:solidFill>
-                  <a:srgbClr val="C9D8F0"/>
-                </a:solidFill>
-                <a:latin typeface="Courier New" pitchFamily="34" charset="0"/>
-                <a:ea typeface="Courier New" pitchFamily="34" charset="-122"/>
-                <a:cs typeface="Courier New" pitchFamily="34" charset="-120"/>
-              </a:rPr>
-              <a:t>// KEY-hold cycles candidates when several heard</a:t>
-            </a:r>
-            <a:endParaRPr lang="en-US" sz="1000" dirty="0"/>
-          </a:p>
-        </p:txBody>
-      </p:sp>
-      <p:sp>
-        <p:nvSpPr>
-          <p:cNvPr id="16" name="Shape 14"/>
-          <p:cNvSpPr/>
-          <p:nvPr/>
-        </p:nvSpPr>
-        <p:spPr>
-          <a:xfrm>
-            <a:off x="5989320" y="1874520"/>
-            <a:ext cx="320040" cy="0"/>
+            <a:off x="3063240" y="1709928"/>
+            <a:ext cx="301752" cy="0"/>
           </a:xfrm>
           <a:prstGeom prst="line">
             <a:avLst/>
@@ -7868,14 +8728,395 @@
       </p:sp>
       <p:sp>
         <p:nvSpPr>
+          <p:cNvPr id="13" name="Shape 11"/>
+          <p:cNvSpPr/>
+          <p:nvPr/>
+        </p:nvSpPr>
+        <p:spPr>
+          <a:xfrm>
+            <a:off x="3364992" y="1188720"/>
+            <a:ext cx="2606040" cy="1051560"/>
+          </a:xfrm>
+          <a:prstGeom prst="rect">
+            <a:avLst/>
+          </a:prstGeom>
+          <a:solidFill>
+            <a:srgbClr val="F2F5FA"/>
+          </a:solidFill>
+          <a:ln w="19050">
+            <a:solidFill>
+              <a:srgbClr val="1199BD"/>
+            </a:solidFill>
+            <a:prstDash val="solid"/>
+          </a:ln>
+        </p:spPr>
+      </p:sp>
+      <p:sp>
+        <p:nvSpPr>
+          <p:cNvPr id="14" name="Text 12"/>
+          <p:cNvSpPr txBox="1"/>
+          <p:nvPr/>
+        </p:nvSpPr>
+        <p:spPr>
+          <a:xfrm>
+            <a:off x="3456432" y="1261872"/>
+            <a:ext cx="2423160" cy="914400"/>
+          </a:xfrm>
+          <a:prstGeom prst="rect">
+            <a:avLst/>
+          </a:prstGeom>
+          <a:noFill/>
+          <a:ln/>
+        </p:spPr>
+        <p:txBody>
+          <a:bodyPr wrap="square" lIns="0" tIns="0" rIns="0" bIns="0" rtlCol="0" anchor="ctr"/>
+          <a:lstStyle/>
+          <a:p>
+            <a:pPr algn="ctr" indent="0" marL="0">
+              <a:buNone/>
+            </a:pPr>
+            <a:r>
+              <a:rPr lang="en-US" sz="1200" b="1" dirty="0">
+                <a:solidFill>
+                  <a:srgbClr val="16213D"/>
+                </a:solidFill>
+                <a:latin typeface="Arial" pitchFamily="34" charset="0"/>
+                <a:ea typeface="Arial" pitchFamily="34" charset="-122"/>
+                <a:cs typeface="Arial" pitchFamily="34" charset="-120"/>
+              </a:rPr>
+              <a:t>Smart broadcast</a:t>
+            </a:r>
+            <a:endParaRPr lang="en-US" sz="1200" dirty="0"/>
+          </a:p>
+          <a:p>
+            <a:pPr algn="ctr" indent="0" marL="0">
+              <a:buNone/>
+            </a:pPr>
+            <a:r>
+              <a:rPr lang="en-US" sz="1200" b="1" dirty="0">
+                <a:solidFill>
+                  <a:srgbClr val="1F9D68"/>
+                </a:solidFill>
+                <a:latin typeface="Arial" pitchFamily="34" charset="0"/>
+                <a:ea typeface="Arial" pitchFamily="34" charset="-122"/>
+                <a:cs typeface="Arial" pitchFamily="34" charset="-120"/>
+              </a:rPr>
+              <a:t>10 s / 20 m moving</a:t>
+            </a:r>
+            <a:endParaRPr lang="en-US" sz="1200" dirty="0"/>
+          </a:p>
+          <a:p>
+            <a:pPr algn="ctr" indent="0" marL="0">
+              <a:buNone/>
+            </a:pPr>
+            <a:r>
+              <a:rPr lang="en-US" sz="850" dirty="0">
+                <a:solidFill>
+                  <a:srgbClr val="5E6B85"/>
+                </a:solidFill>
+                <a:latin typeface="Courier New" pitchFamily="34" charset="0"/>
+                <a:ea typeface="Courier New" pitchFamily="34" charset="-122"/>
+                <a:cs typeface="Courier New" pitchFamily="34" charset="-120"/>
+              </a:rPr>
+              <a:t>min interval + distance</a:t>
+            </a:r>
+            <a:endParaRPr lang="en-US" sz="1200" dirty="0"/>
+          </a:p>
+        </p:txBody>
+      </p:sp>
+      <p:sp>
+        <p:nvSpPr>
+          <p:cNvPr id="15" name="Shape 13"/>
+          <p:cNvSpPr/>
+          <p:nvPr/>
+        </p:nvSpPr>
+        <p:spPr>
+          <a:xfrm>
+            <a:off x="5971032" y="1709928"/>
+            <a:ext cx="301752" cy="0"/>
+          </a:xfrm>
+          <a:prstGeom prst="line">
+            <a:avLst/>
+          </a:prstGeom>
+          <a:noFill/>
+          <a:ln w="28575">
+            <a:solidFill>
+              <a:srgbClr val="1199BD"/>
+            </a:solidFill>
+            <a:prstDash val="solid"/>
+            <a:tailEnd type="triangle"/>
+          </a:ln>
+        </p:spPr>
+      </p:sp>
+      <p:sp>
+        <p:nvSpPr>
+          <p:cNvPr id="16" name="Shape 14"/>
+          <p:cNvSpPr/>
+          <p:nvPr/>
+        </p:nvSpPr>
+        <p:spPr>
+          <a:xfrm>
+            <a:off x="6272784" y="1188720"/>
+            <a:ext cx="2606040" cy="1051560"/>
+          </a:xfrm>
+          <a:prstGeom prst="rect">
+            <a:avLst/>
+          </a:prstGeom>
+          <a:solidFill>
+            <a:srgbClr val="F2F5FA"/>
+          </a:solidFill>
+          <a:ln w="19050">
+            <a:solidFill>
+              <a:srgbClr val="1199BD"/>
+            </a:solidFill>
+            <a:prstDash val="solid"/>
+          </a:ln>
+        </p:spPr>
+      </p:sp>
+      <p:sp>
+        <p:nvSpPr>
           <p:cNvPr id="17" name="Text 15"/>
           <p:cNvSpPr txBox="1"/>
           <p:nvPr/>
         </p:nvSpPr>
         <p:spPr>
           <a:xfrm>
-            <a:off x="457200" y="2926080"/>
-            <a:ext cx="11292840" cy="1645920"/>
+            <a:off x="6364224" y="1261872"/>
+            <a:ext cx="2423160" cy="914400"/>
+          </a:xfrm>
+          <a:prstGeom prst="rect">
+            <a:avLst/>
+          </a:prstGeom>
+          <a:noFill/>
+          <a:ln/>
+        </p:spPr>
+        <p:txBody>
+          <a:bodyPr wrap="square" lIns="0" tIns="0" rIns="0" bIns="0" rtlCol="0" anchor="ctr"/>
+          <a:lstStyle/>
+          <a:p>
+            <a:pPr algn="ctr" indent="0" marL="0">
+              <a:buNone/>
+            </a:pPr>
+            <a:r>
+              <a:rPr lang="en-US" sz="1200" b="1" dirty="0">
+                <a:solidFill>
+                  <a:srgbClr val="16213D"/>
+                </a:solidFill>
+                <a:latin typeface="Arial" pitchFamily="34" charset="0"/>
+                <a:ea typeface="Arial" pitchFamily="34" charset="-122"/>
+                <a:cs typeface="Arial" pitchFamily="34" charset="-120"/>
+              </a:rPr>
+              <a:t>BLE delivery</a:t>
+            </a:r>
+            <a:endParaRPr lang="en-US" sz="1200" dirty="0"/>
+          </a:p>
+          <a:p>
+            <a:pPr algn="ctr" indent="0" marL="0">
+              <a:buNone/>
+            </a:pPr>
+            <a:r>
+              <a:rPr lang="en-US" sz="1200" b="1" dirty="0">
+                <a:solidFill>
+                  <a:srgbClr val="1F9D68"/>
+                </a:solidFill>
+                <a:latin typeface="Arial" pitchFamily="34" charset="0"/>
+                <a:ea typeface="Arial" pitchFamily="34" charset="-122"/>
+                <a:cs typeface="Arial" pitchFamily="34" charset="-120"/>
+              </a:rPr>
+              <a:t>milliseconds</a:t>
+            </a:r>
+            <a:endParaRPr lang="en-US" sz="1200" dirty="0"/>
+          </a:p>
+          <a:p>
+            <a:pPr algn="ctr" indent="0" marL="0">
+              <a:buNone/>
+            </a:pPr>
+            <a:r>
+              <a:rPr lang="en-US" sz="850" dirty="0">
+                <a:solidFill>
+                  <a:srgbClr val="5E6B85"/>
+                </a:solidFill>
+                <a:latin typeface="Courier New" pitchFamily="34" charset="0"/>
+                <a:ea typeface="Courier New" pitchFamily="34" charset="-122"/>
+                <a:cs typeface="Courier New" pitchFamily="34" charset="-120"/>
+              </a:rPr>
+              <a:t>notify, then drain</a:t>
+            </a:r>
+            <a:endParaRPr lang="en-US" sz="1200" dirty="0"/>
+          </a:p>
+        </p:txBody>
+      </p:sp>
+      <p:sp>
+        <p:nvSpPr>
+          <p:cNvPr id="18" name="Shape 16"/>
+          <p:cNvSpPr/>
+          <p:nvPr/>
+        </p:nvSpPr>
+        <p:spPr>
+          <a:xfrm>
+            <a:off x="8878824" y="1709928"/>
+            <a:ext cx="301752" cy="0"/>
+          </a:xfrm>
+          <a:prstGeom prst="line">
+            <a:avLst/>
+          </a:prstGeom>
+          <a:noFill/>
+          <a:ln w="28575">
+            <a:solidFill>
+              <a:srgbClr val="1199BD"/>
+            </a:solidFill>
+            <a:prstDash val="solid"/>
+            <a:tailEnd type="triangle"/>
+          </a:ln>
+        </p:spPr>
+      </p:sp>
+      <p:sp>
+        <p:nvSpPr>
+          <p:cNvPr id="19" name="Shape 17"/>
+          <p:cNvSpPr/>
+          <p:nvPr/>
+        </p:nvSpPr>
+        <p:spPr>
+          <a:xfrm>
+            <a:off x="9180576" y="1188720"/>
+            <a:ext cx="2606040" cy="1051560"/>
+          </a:xfrm>
+          <a:prstGeom prst="rect">
+            <a:avLst/>
+          </a:prstGeom>
+          <a:solidFill>
+            <a:srgbClr val="F2F5FA"/>
+          </a:solidFill>
+          <a:ln w="19050">
+            <a:solidFill>
+              <a:srgbClr val="1199BD"/>
+            </a:solidFill>
+            <a:prstDash val="solid"/>
+          </a:ln>
+        </p:spPr>
+      </p:sp>
+      <p:sp>
+        <p:nvSpPr>
+          <p:cNvPr id="20" name="Text 18"/>
+          <p:cNvSpPr txBox="1"/>
+          <p:nvPr/>
+        </p:nvSpPr>
+        <p:spPr>
+          <a:xfrm>
+            <a:off x="9272016" y="1261872"/>
+            <a:ext cx="2423160" cy="914400"/>
+          </a:xfrm>
+          <a:prstGeom prst="rect">
+            <a:avLst/>
+          </a:prstGeom>
+          <a:noFill/>
+          <a:ln/>
+        </p:spPr>
+        <p:txBody>
+          <a:bodyPr wrap="square" lIns="0" tIns="0" rIns="0" bIns="0" rtlCol="0" anchor="ctr"/>
+          <a:lstStyle/>
+          <a:p>
+            <a:pPr algn="ctr" indent="0" marL="0">
+              <a:buNone/>
+            </a:pPr>
+            <a:r>
+              <a:rPr lang="en-US" sz="1200" b="1" dirty="0">
+                <a:solidFill>
+                  <a:srgbClr val="16213D"/>
+                </a:solidFill>
+                <a:latin typeface="Arial" pitchFamily="34" charset="0"/>
+                <a:ea typeface="Arial" pitchFamily="34" charset="-122"/>
+                <a:cs typeface="Arial" pitchFamily="34" charset="-120"/>
+              </a:rPr>
+              <a:t>Screen motion</a:t>
+            </a:r>
+            <a:endParaRPr lang="en-US" sz="1200" dirty="0"/>
+          </a:p>
+          <a:p>
+            <a:pPr algn="ctr" indent="0" marL="0">
+              <a:buNone/>
+            </a:pPr>
+            <a:r>
+              <a:rPr lang="en-US" sz="1200" b="1" dirty="0">
+                <a:solidFill>
+                  <a:srgbClr val="1F9D68"/>
+                </a:solidFill>
+                <a:latin typeface="Arial" pitchFamily="34" charset="0"/>
+                <a:ea typeface="Arial" pitchFamily="34" charset="-122"/>
+                <a:cs typeface="Arial" pitchFamily="34" charset="-120"/>
+              </a:rPr>
+              <a:t>every second</a:t>
+            </a:r>
+            <a:endParaRPr lang="en-US" sz="1200" dirty="0"/>
+          </a:p>
+          <a:p>
+            <a:pPr algn="ctr" indent="0" marL="0">
+              <a:buNone/>
+            </a:pPr>
+            <a:r>
+              <a:rPr lang="en-US" sz="850" dirty="0">
+                <a:solidFill>
+                  <a:srgbClr val="5E6B85"/>
+                </a:solidFill>
+                <a:latin typeface="Courier New" pitchFamily="34" charset="0"/>
+                <a:ea typeface="Courier New" pitchFamily="34" charset="-122"/>
+                <a:cs typeface="Courier New" pitchFamily="34" charset="-120"/>
+              </a:rPr>
+              <a:t>dead reckoning</a:t>
+            </a:r>
+            <a:endParaRPr lang="en-US" sz="1200" dirty="0"/>
+          </a:p>
+        </p:txBody>
+      </p:sp>
+      <p:sp>
+        <p:nvSpPr>
+          <p:cNvPr id="21" name="Text 19"/>
+          <p:cNvSpPr txBox="1"/>
+          <p:nvPr/>
+        </p:nvSpPr>
+        <p:spPr>
+          <a:xfrm>
+            <a:off x="457200" y="2423160"/>
+            <a:ext cx="11292840" cy="256032"/>
+          </a:xfrm>
+          <a:prstGeom prst="rect">
+            <a:avLst/>
+          </a:prstGeom>
+          <a:noFill/>
+          <a:ln/>
+        </p:spPr>
+        <p:txBody>
+          <a:bodyPr wrap="square" lIns="0" tIns="0" rIns="0" bIns="0" rtlCol="0" anchor="ctr"/>
+          <a:lstStyle/>
+          <a:p>
+            <a:pPr indent="0" marL="0">
+              <a:buNone/>
+            </a:pPr>
+            <a:r>
+              <a:rPr lang="en-US" sz="1000" b="1" spc="100" kern="0" dirty="0">
+                <a:solidFill>
+                  <a:srgbClr val="1F9D68"/>
+                </a:solidFill>
+                <a:latin typeface="Courier New" pitchFamily="34" charset="0"/>
+                <a:ea typeface="Courier New" pitchFamily="34" charset="-122"/>
+                <a:cs typeface="Courier New" pitchFamily="34" charset="-120"/>
+              </a:rPr>
+              <a:t>VERIFIED IN MOTION, 2026-09-16 DRIVE TEST</a:t>
+            </a:r>
+            <a:endParaRPr lang="en-US" sz="1000" dirty="0"/>
+          </a:p>
+        </p:txBody>
+      </p:sp>
+      <p:sp>
+        <p:nvSpPr>
+          <p:cNvPr id="22" name="Text 20"/>
+          <p:cNvSpPr txBox="1"/>
+          <p:nvPr/>
+        </p:nvSpPr>
+        <p:spPr>
+          <a:xfrm>
+            <a:off x="457200" y="2834640"/>
+            <a:ext cx="11292840" cy="1737360"/>
           </a:xfrm>
           <a:prstGeom prst="rect">
             <a:avLst/>
@@ -7903,7 +9144,7 @@
                 <a:ea typeface="Arial" pitchFamily="34" charset="-122"/>
                 <a:cs typeface="Arial" pitchFamily="34" charset="-120"/>
               </a:rPr>
-              <a:t>The bring-up rule was correct for one radio: with a single voice on the channel, first-heard is unambiguous.</a:t>
+              <a:t>Observed while driving: coordinates and speed refreshed roughly every ten seconds, matching the configured cadence for the first time on the road.</a:t>
             </a:r>
             <a:endParaRPr lang="en-US" sz="1300" dirty="0"/>
           </a:p>
@@ -7924,7 +9165,7 @@
                 <a:ea typeface="Arial" pitchFamily="34" charset="-122"/>
                 <a:cs typeface="Arial" pitchFamily="34" charset="-120"/>
               </a:rPr>
-              <a:t>With a mesh it becomes a race. The fix is the same pattern as the radio's own address: the choice lives in NVS flash, survives power cycles, and is set from the display, not the code.</a:t>
+              <a:t>This closes the chain of cadence fixes from weeks three and four: the coarse-grid freeze, the stale GPS refresh, and the re-broadcast ghost each hid this behavior until removed.</a:t>
             </a:r>
             <a:endParaRPr lang="en-US" sz="1300" dirty="0"/>
           </a:p>
@@ -7942,7 +9183,7 @@
                 <a:ea typeface="Arial" pitchFamily="34" charset="-122"/>
                 <a:cs typeface="Arial" pitchFamily="34" charset="-120"/>
               </a:rPr>
-              <a:t>Same firmware in every vehicle. Pairing is configuration, not code.</a:t>
+              <a:t>The cadence question is now settled for one vehicle. Radio two inherits this configuration through the channel recipe, so the partner arrives at the same ten seconds.</a:t>
             </a:r>
             <a:endParaRPr lang="en-US" sz="1300" dirty="0"/>
           </a:p>
@@ -7950,7 +9191,7 @@
       </p:sp>
       <p:sp>
         <p:nvSpPr>
-          <p:cNvPr id="18" name="Shape 16"/>
+          <p:cNvPr id="23" name="Shape 21"/>
           <p:cNvSpPr/>
           <p:nvPr/>
         </p:nvSpPr>
@@ -7963,19 +9204,14 @@
             <a:avLst/>
           </a:prstGeom>
           <a:solidFill>
-            <a:srgbClr val="F2F5FA"/>
+            <a:srgbClr val="16213D"/>
           </a:solidFill>
-          <a:ln w="9525">
-            <a:solidFill>
-              <a:srgbClr val="9AA7BE"/>
-            </a:solidFill>
-            <a:prstDash val="solid"/>
-          </a:ln>
-        </p:spPr>
-      </p:sp>
-      <p:sp>
-        <p:nvSpPr>
-          <p:cNvPr id="19" name="Text 17"/>
+          <a:ln/>
+        </p:spPr>
+      </p:sp>
+      <p:sp>
+        <p:nvSpPr>
+          <p:cNvPr id="24" name="Text 22"/>
           <p:cNvSpPr txBox="1"/>
           <p:nvPr/>
         </p:nvSpPr>
@@ -8003,13 +9239,13 @@
             <a:r>
               <a:rPr lang="en-US" sz="1100" b="1" dirty="0">
                 <a:solidFill>
-                  <a:srgbClr val="16213D"/>
+                  <a:srgbClr val="E58E1A"/>
                 </a:solidFill>
                 <a:latin typeface="Courier New" pitchFamily="34" charset="0"/>
                 <a:ea typeface="Courier New" pitchFamily="34" charset="-122"/>
                 <a:cs typeface="Courier New" pitchFamily="34" charset="-120"/>
               </a:rPr>
-              <a:t>WHY THIS ORDER OF WORK</a:t>
+              <a:t>WHY THIS MATTERS FOR THE EXAM</a:t>
             </a:r>
             <a:endParaRPr lang="en-US" sz="1250" dirty="0"/>
           </a:p>
@@ -8020,13 +9256,13 @@
             <a:r>
               <a:rPr lang="en-US" sz="1250" dirty="0">
                 <a:solidFill>
-                  <a:srgbClr val="222A3F"/>
+                  <a:srgbClr val="FFFFFF"/>
                 </a:solidFill>
                 <a:latin typeface="Arial" pitchFamily="34" charset="0"/>
                 <a:ea typeface="Arial" pitchFamily="34" charset="-122"/>
                 <a:cs typeface="Arial" pitchFamily="34" charset="-120"/>
               </a:rPr>
-              <a:t>Selection ships before the two-radio bench test on purpose: the first time two real nodes speak, the display must already know how to choose between them. Designing the chooser after the ambiguity exists would mean debugging both at once.</a:t>
+              <a:t>Two of the five declared metrics depend on this cadence: packet delivery ratio counts against the ten-second schedule, and the age target of 25 seconds assumes fixes arrive on it. This drive test pinned down the denominator before the two-radio test supplies the numerator.</a:t>
             </a:r>
             <a:endParaRPr lang="en-US" sz="1250" dirty="0"/>
           </a:p>
@@ -8181,7 +9417,7 @@
                 <a:ea typeface="Courier New" pitchFamily="34" charset="-122"/>
                 <a:cs typeface="Courier New" pitchFamily="34" charset="-120"/>
               </a:rPr>
-              <a:t>RADIO TWO PROCEDURE</a:t>
+              <a:t>PARTNER SELECTION</a:t>
             </a:r>
             <a:endParaRPr lang="en-US" sz="900" dirty="0"/>
           </a:p>
@@ -8220,7 +9456,7 @@
                 <a:ea typeface="Courier New" pitchFamily="34" charset="-122"/>
                 <a:cs typeface="Courier New" pitchFamily="34" charset="-120"/>
               </a:rPr>
-              <a:t>SHEET 04/10  REV D  2026-09-16</a:t>
+              <a:t>SHEET 04/11  REV D  2026-09-16</a:t>
             </a:r>
             <a:endParaRPr lang="en-US" sz="900" dirty="0"/>
           </a:p>
@@ -8245,7 +9481,7 @@
           </a:solidFill>
           <a:ln w="19050">
             <a:solidFill>
-              <a:srgbClr val="E58E1A"/>
+              <a:srgbClr val="1199BD"/>
             </a:solidFill>
             <a:prstDash val="solid"/>
           </a:ln>
@@ -8278,13 +9514,13 @@
             <a:r>
               <a:rPr lang="en-US" sz="1100" b="1" dirty="0">
                 <a:solidFill>
-                  <a:srgbClr val="E58E1A"/>
+                  <a:srgbClr val="1199BD"/>
                 </a:solidFill>
                 <a:latin typeface="Courier New" pitchFamily="34" charset="0"/>
                 <a:ea typeface="Courier New" pitchFamily="34" charset="-122"/>
                 <a:cs typeface="Courier New" pitchFamily="34" charset="-120"/>
               </a:rPr>
-              <a:t>OWNER: VICTOR</a:t>
+              <a:t>OWNER: DEO</a:t>
             </a:r>
             <a:endParaRPr lang="en-US" sz="1100" dirty="0"/>
           </a:p>
@@ -8323,7 +9559,7 @@
                 <a:ea typeface="Arial" pitchFamily="34" charset="-122"/>
                 <a:cs typeface="Arial" pitchFamily="34" charset="-120"/>
               </a:rPr>
-              <a:t>RADIO TWO: A FIFTEEN-MINUTE PROCEDURE</a:t>
+              <a:t>PARTNER SELECTION: FROM RULE TO CONFIGURATION</a:t>
             </a:r>
             <a:endParaRPr lang="en-US" sz="2300" dirty="0"/>
           </a:p>
@@ -8338,7 +9574,7 @@
         <p:spPr>
           <a:xfrm>
             <a:off x="457200" y="1097280"/>
-            <a:ext cx="7315200" cy="2286000"/>
+            <a:ext cx="5532120" cy="1554480"/>
           </a:xfrm>
           <a:prstGeom prst="rect">
             <a:avLst/>
@@ -8358,7 +9594,7 @@
         <p:spPr>
           <a:xfrm>
             <a:off x="594360" y="1161288"/>
-            <a:ext cx="7040880" cy="237744"/>
+            <a:ext cx="5257800" cy="237744"/>
           </a:xfrm>
           <a:prstGeom prst="rect">
             <a:avLst/>
@@ -8376,13 +9612,13 @@
             <a:r>
               <a:rPr lang="en-US" sz="1000" b="1" dirty="0">
                 <a:solidFill>
-                  <a:srgbClr val="E58E1A"/>
+                  <a:srgbClr val="1199BD"/>
                 </a:solidFill>
                 <a:latin typeface="Courier New" pitchFamily="34" charset="0"/>
                 <a:ea typeface="Courier New" pitchFamily="34" charset="-122"/>
                 <a:cs typeface="Courier New" pitchFamily="34" charset="-120"/>
               </a:rPr>
-              <a:t>hardware/README.md  the recipe, one command per line</a:t>
+              <a:t>node_table.cpp  today: the bring-up rule</a:t>
             </a:r>
             <a:endParaRPr lang="en-US" sz="1000" dirty="0"/>
           </a:p>
@@ -8397,7 +9633,7 @@
         <p:spPr>
           <a:xfrm>
             <a:off x="594360" y="1417320"/>
-            <a:ext cx="7040880" cy="1874520"/>
+            <a:ext cx="5257800" cy="1143000"/>
           </a:xfrm>
           <a:prstGeom prst="rect">
             <a:avLst/>
@@ -8421,7 +9657,7 @@
                 <a:ea typeface="Courier New" pitchFamily="34" charset="-122"/>
                 <a:cs typeface="Courier New" pitchFamily="34" charset="-120"/>
               </a:rPr>
-              <a:t>meshtastic --port COMx --seturl "https://meshtastic.org/e/#Ci4S..."</a:t>
+              <a:t>// first non-self node heard becomes the partner</a:t>
             </a:r>
             <a:endParaRPr lang="en-US" sz="1000" dirty="0"/>
           </a:p>
@@ -8438,7 +9674,7 @@
                 <a:ea typeface="Courier New" pitchFamily="34" charset="-122"/>
                 <a:cs typeface="Courier New" pitchFamily="34" charset="-120"/>
               </a:rPr>
-              <a:t>   # channel URL: carries the AES key AND the frequency agreement</a:t>
+              <a:t>if (s_partner_num == 0) {</a:t>
             </a:r>
             <a:endParaRPr lang="en-US" sz="1000" dirty="0"/>
           </a:p>
@@ -8455,7 +9691,7 @@
                 <a:ea typeface="Courier New" pitchFamily="34" charset="-122"/>
                 <a:cs typeface="Courier New" pitchFamily="34" charset="-120"/>
               </a:rPr>
-              <a:t>meshtastic --port COMx --set position.position_broadcast_secs 60</a:t>
+              <a:t>    s_partner_num = from_num;</a:t>
             </a:r>
             <a:endParaRPr lang="en-US" sz="1000" dirty="0"/>
           </a:p>
@@ -8472,7 +9708,7 @@
                 <a:ea typeface="Courier New" pitchFamily="34" charset="-122"/>
                 <a:cs typeface="Courier New" pitchFamily="34" charset="-120"/>
               </a:rPr>
-              <a:t>meshtastic --port COMx --set position.broadcast_smart_minimum_interval_secs 10</a:t>
+              <a:t>    Serial.printf("[node] partner: 0x%08lx", from_num);</a:t>
             </a:r>
             <a:endParaRPr lang="en-US" sz="1000" dirty="0"/>
           </a:p>
@@ -8489,27 +9725,91 @@
                 <a:ea typeface="Courier New" pitchFamily="34" charset="-122"/>
                 <a:cs typeface="Courier New" pitchFamily="34" charset="-120"/>
               </a:rPr>
-              <a:t>meshtastic --port COMx --set position.broadcast_smart_minimum_distance 20</a:t>
+              <a:t>}</a:t>
             </a:r>
             <a:endParaRPr lang="en-US" sz="1000" dirty="0"/>
           </a:p>
+        </p:txBody>
+      </p:sp>
+      <p:sp>
+        <p:nvSpPr>
+          <p:cNvPr id="13" name="Shape 11"/>
+          <p:cNvSpPr/>
+          <p:nvPr/>
+        </p:nvSpPr>
+        <p:spPr>
+          <a:xfrm>
+            <a:off x="6355080" y="1097280"/>
+            <a:ext cx="5394960" cy="1554480"/>
+          </a:xfrm>
+          <a:prstGeom prst="rect">
+            <a:avLst/>
+          </a:prstGeom>
+          <a:solidFill>
+            <a:srgbClr val="1B2440"/>
+          </a:solidFill>
+          <a:ln/>
+        </p:spPr>
+      </p:sp>
+      <p:sp>
+        <p:nvSpPr>
+          <p:cNvPr id="14" name="Text 12"/>
+          <p:cNvSpPr txBox="1"/>
+          <p:nvPr/>
+        </p:nvSpPr>
+        <p:spPr>
+          <a:xfrm>
+            <a:off x="6492240" y="1161288"/>
+            <a:ext cx="5120640" cy="237744"/>
+          </a:xfrm>
+          <a:prstGeom prst="rect">
+            <a:avLst/>
+          </a:prstGeom>
+          <a:noFill/>
+          <a:ln/>
+        </p:spPr>
+        <p:txBody>
+          <a:bodyPr wrap="square" lIns="0" tIns="0" rIns="0" bIns="0" rtlCol="0" anchor="ctr"/>
+          <a:lstStyle/>
           <a:p>
             <a:pPr indent="0" marL="0">
               <a:buNone/>
             </a:pPr>
             <a:r>
-              <a:rPr lang="en-US" sz="1000" dirty="0">
-                <a:solidFill>
-                  <a:srgbClr val="C9D8F0"/>
+              <a:rPr lang="en-US" sz="1000" b="1" dirty="0">
+                <a:solidFill>
+                  <a:srgbClr val="1199BD"/>
                 </a:solidFill>
                 <a:latin typeface="Courier New" pitchFamily="34" charset="0"/>
                 <a:ea typeface="Courier New" pitchFamily="34" charset="-122"/>
                 <a:cs typeface="Courier New" pitchFamily="34" charset="-120"/>
               </a:rPr>
-              <a:t>meshtastic --port COMx --set position.gps_update_interval 10</a:t>
+              <a:t>design: partner as configuration</a:t>
             </a:r>
             <a:endParaRPr lang="en-US" sz="1000" dirty="0"/>
           </a:p>
+        </p:txBody>
+      </p:sp>
+      <p:sp>
+        <p:nvSpPr>
+          <p:cNvPr id="15" name="Text 13"/>
+          <p:cNvSpPr txBox="1"/>
+          <p:nvPr/>
+        </p:nvSpPr>
+        <p:spPr>
+          <a:xfrm>
+            <a:off x="6492240" y="1417320"/>
+            <a:ext cx="5120640" cy="1143000"/>
+          </a:xfrm>
+          <a:prstGeom prst="rect">
+            <a:avLst/>
+          </a:prstGeom>
+          <a:noFill/>
+          <a:ln/>
+        </p:spPr>
+        <p:txBody>
+          <a:bodyPr wrap="square" lIns="0" tIns="0" rIns="0" bIns="0" rtlCol="0" anchor="t"/>
+          <a:lstStyle/>
           <a:p>
             <a:pPr indent="0" marL="0">
               <a:buNone/>
@@ -8523,32 +9823,189 @@
                 <a:ea typeface="Courier New" pitchFamily="34" charset="-122"/>
                 <a:cs typeface="Courier New" pitchFamily="34" charset="-120"/>
               </a:rPr>
-              <a:t>meshtastic --port COMx --get lora.region     # VERIFY every write</a:t>
+              <a:t>// NVS-persisted choice, selectable from the UI</a:t>
             </a:r>
             <a:endParaRPr lang="en-US" sz="1000" dirty="0"/>
           </a:p>
-        </p:txBody>
-      </p:sp>
-      <p:sp>
-        <p:nvSpPr>
-          <p:cNvPr id="13" name="Shape 11"/>
+          <a:p>
+            <a:pPr indent="0" marL="0">
+              <a:buNone/>
+            </a:pPr>
+            <a:r>
+              <a:rPr lang="en-US" sz="1000" dirty="0">
+                <a:solidFill>
+                  <a:srgbClr val="C9D8F0"/>
+                </a:solidFill>
+                <a:latin typeface="Courier New" pitchFamily="34" charset="0"/>
+                <a:ea typeface="Courier New" pitchFamily="34" charset="-122"/>
+                <a:cs typeface="Courier New" pitchFamily="34" charset="-120"/>
+              </a:rPr>
+              <a:t>prefs.putUInt("partner", chosen_node);</a:t>
+            </a:r>
+            <a:endParaRPr lang="en-US" sz="1000" dirty="0"/>
+          </a:p>
+          <a:p>
+            <a:pPr indent="0" marL="0">
+              <a:buNone/>
+            </a:pPr>
+            <a:r>
+              <a:rPr lang="en-US" sz="1000" dirty="0">
+                <a:solidFill>
+                  <a:srgbClr val="C9D8F0"/>
+                </a:solidFill>
+                <a:latin typeface="Courier New" pitchFamily="34" charset="0"/>
+                <a:ea typeface="Courier New" pitchFamily="34" charset="-122"/>
+                <a:cs typeface="Courier New" pitchFamily="34" charset="-120"/>
+              </a:rPr>
+              <a:t>// node_table accepts only the chosen node;</a:t>
+            </a:r>
+            <a:endParaRPr lang="en-US" sz="1000" dirty="0"/>
+          </a:p>
+          <a:p>
+            <a:pPr indent="0" marL="0">
+              <a:buNone/>
+            </a:pPr>
+            <a:r>
+              <a:rPr lang="en-US" sz="1000" dirty="0">
+                <a:solidFill>
+                  <a:srgbClr val="C9D8F0"/>
+                </a:solidFill>
+                <a:latin typeface="Courier New" pitchFamily="34" charset="0"/>
+                <a:ea typeface="Courier New" pitchFamily="34" charset="-122"/>
+                <a:cs typeface="Courier New" pitchFamily="34" charset="-120"/>
+              </a:rPr>
+              <a:t>// KEY-hold cycles candidates when several heard</a:t>
+            </a:r>
+            <a:endParaRPr lang="en-US" sz="1000" dirty="0"/>
+          </a:p>
+        </p:txBody>
+      </p:sp>
+      <p:sp>
+        <p:nvSpPr>
+          <p:cNvPr id="16" name="Shape 14"/>
           <p:cNvSpPr/>
           <p:nvPr/>
         </p:nvSpPr>
         <p:spPr>
           <a:xfrm>
-            <a:off x="8092440" y="1097280"/>
-            <a:ext cx="3657600" cy="2286000"/>
+            <a:off x="5989320" y="1874520"/>
+            <a:ext cx="320040" cy="0"/>
+          </a:xfrm>
+          <a:prstGeom prst="line">
+            <a:avLst/>
+          </a:prstGeom>
+          <a:noFill/>
+          <a:ln w="28575">
+            <a:solidFill>
+              <a:srgbClr val="1199BD"/>
+            </a:solidFill>
+            <a:prstDash val="solid"/>
+            <a:tailEnd type="triangle"/>
+          </a:ln>
+        </p:spPr>
+      </p:sp>
+      <p:sp>
+        <p:nvSpPr>
+          <p:cNvPr id="17" name="Text 15"/>
+          <p:cNvSpPr txBox="1"/>
+          <p:nvPr/>
+        </p:nvSpPr>
+        <p:spPr>
+          <a:xfrm>
+            <a:off x="457200" y="2926080"/>
+            <a:ext cx="11292840" cy="1645920"/>
+          </a:xfrm>
+          <a:prstGeom prst="rect">
+            <a:avLst/>
+          </a:prstGeom>
+          <a:noFill/>
+          <a:ln/>
+        </p:spPr>
+        <p:txBody>
+          <a:bodyPr wrap="square" lIns="0" tIns="0" rIns="0" bIns="0" rtlCol="0" anchor="ctr"/>
+          <a:lstStyle/>
+          <a:p>
+            <a:pPr marL="342900" indent="-342900">
+              <a:spcAft>
+                <a:spcPts val="600"/>
+              </a:spcAft>
+              <a:buSzPct val="100000"/>
+              <a:buChar char="▪"/>
+            </a:pPr>
+            <a:r>
+              <a:rPr lang="en-US" sz="1300" dirty="0">
+                <a:solidFill>
+                  <a:srgbClr val="222A3F"/>
+                </a:solidFill>
+                <a:latin typeface="Arial" pitchFamily="34" charset="0"/>
+                <a:ea typeface="Arial" pitchFamily="34" charset="-122"/>
+                <a:cs typeface="Arial" pitchFamily="34" charset="-120"/>
+              </a:rPr>
+              <a:t>The bring-up rule was correct for one radio: with a single voice on the channel, first-heard is unambiguous.</a:t>
+            </a:r>
+            <a:endParaRPr lang="en-US" sz="1300" dirty="0"/>
+          </a:p>
+          <a:p>
+            <a:pPr marL="342900" indent="-342900">
+              <a:spcAft>
+                <a:spcPts val="600"/>
+              </a:spcAft>
+              <a:buSzPct val="100000"/>
+              <a:buChar char="▪"/>
+            </a:pPr>
+            <a:r>
+              <a:rPr lang="en-US" sz="1300" dirty="0">
+                <a:solidFill>
+                  <a:srgbClr val="222A3F"/>
+                </a:solidFill>
+                <a:latin typeface="Arial" pitchFamily="34" charset="0"/>
+                <a:ea typeface="Arial" pitchFamily="34" charset="-122"/>
+                <a:cs typeface="Arial" pitchFamily="34" charset="-120"/>
+              </a:rPr>
+              <a:t>With a mesh it becomes a race. The fix is the same pattern as the radio's own address: the choice lives in NVS flash, survives power cycles, and is set from the display, not the code.</a:t>
+            </a:r>
+            <a:endParaRPr lang="en-US" sz="1300" dirty="0"/>
+          </a:p>
+          <a:p>
+            <a:pPr marL="342900" indent="-342900">
+              <a:buSzPct val="100000"/>
+              <a:buChar char="▪"/>
+            </a:pPr>
+            <a:r>
+              <a:rPr lang="en-US" sz="1300" dirty="0">
+                <a:solidFill>
+                  <a:srgbClr val="222A3F"/>
+                </a:solidFill>
+                <a:latin typeface="Arial" pitchFamily="34" charset="0"/>
+                <a:ea typeface="Arial" pitchFamily="34" charset="-122"/>
+                <a:cs typeface="Arial" pitchFamily="34" charset="-120"/>
+              </a:rPr>
+              <a:t>Same firmware in every vehicle. Pairing is configuration, not code.</a:t>
+            </a:r>
+            <a:endParaRPr lang="en-US" sz="1300" dirty="0"/>
+          </a:p>
+        </p:txBody>
+      </p:sp>
+      <p:sp>
+        <p:nvSpPr>
+          <p:cNvPr id="18" name="Shape 16"/>
+          <p:cNvSpPr/>
+          <p:nvPr/>
+        </p:nvSpPr>
+        <p:spPr>
+          <a:xfrm>
+            <a:off x="457200" y="4709160"/>
+            <a:ext cx="11292840" cy="1371600"/>
           </a:xfrm>
           <a:prstGeom prst="rect">
             <a:avLst/>
           </a:prstGeom>
           <a:solidFill>
-            <a:srgbClr val="FDF3E3"/>
+            <a:srgbClr val="F2F5FA"/>
           </a:solidFill>
-          <a:ln w="15875">
+          <a:ln w="9525">
             <a:solidFill>
-              <a:srgbClr val="E58E1A"/>
+              <a:srgbClr val="9AA7BE"/>
             </a:solidFill>
             <a:prstDash val="solid"/>
           </a:ln>
@@ -8556,14 +10013,14 @@
       </p:sp>
       <p:sp>
         <p:nvSpPr>
-          <p:cNvPr id="14" name="Text 12"/>
-          <p:cNvSpPr txBox="1"/>
-          <p:nvPr/>
-        </p:nvSpPr>
-        <p:spPr>
-          <a:xfrm>
-            <a:off x="8229600" y="1234440"/>
-            <a:ext cx="3383280" cy="2057400"/>
+          <p:cNvPr id="19" name="Text 17"/>
+          <p:cNvSpPr txBox="1"/>
+          <p:nvPr/>
+        </p:nvSpPr>
+        <p:spPr>
+          <a:xfrm>
+            <a:off x="731520" y="4846320"/>
+            <a:ext cx="10744200" cy="1143000"/>
           </a:xfrm>
           <a:prstGeom prst="rect">
             <a:avLst/>
@@ -8584,22 +10041,22 @@
             <a:r>
               <a:rPr lang="en-US" sz="1100" b="1" dirty="0">
                 <a:solidFill>
-                  <a:srgbClr val="B06207"/>
+                  <a:srgbClr val="16213D"/>
                 </a:solidFill>
                 <a:latin typeface="Courier New" pitchFamily="34" charset="0"/>
                 <a:ea typeface="Courier New" pitchFamily="34" charset="-122"/>
                 <a:cs typeface="Courier New" pitchFamily="34" charset="-120"/>
               </a:rPr>
-              <a:t>TWO DOCUMENTED TRAPS</a:t>
-            </a:r>
-            <a:endParaRPr lang="en-US" sz="1100" dirty="0"/>
+              <a:t>WHY THIS ORDER OF WORK</a:t>
+            </a:r>
+            <a:endParaRPr lang="en-US" sz="1250" dirty="0"/>
           </a:p>
           <a:p>
             <a:pPr indent="0" marL="0">
               <a:buNone/>
             </a:pPr>
             <a:r>
-              <a:rPr lang="en-US" sz="1100" dirty="0">
+              <a:rPr lang="en-US" sz="1250" dirty="0">
                 <a:solidFill>
                   <a:srgbClr val="222A3F"/>
                 </a:solidFill>
@@ -8607,438 +10064,7 @@
                 <a:ea typeface="Arial" pitchFamily="34" charset="-122"/>
                 <a:cs typeface="Arial" pitchFamily="34" charset="-120"/>
               </a:rPr>
-              <a:t>Reboot-triggering writes can silently revert (the port close resets the chip mid-save): read back every setting. And identical boards demand a named upload port: we have paid for that lesson once.</a:t>
-            </a:r>
-            <a:endParaRPr lang="en-US" sz="1100" dirty="0"/>
-          </a:p>
-        </p:txBody>
-      </p:sp>
-      <p:sp>
-        <p:nvSpPr>
-          <p:cNvPr id="15" name="Text 13"/>
-          <p:cNvSpPr txBox="1"/>
-          <p:nvPr/>
-        </p:nvSpPr>
-        <p:spPr>
-          <a:xfrm>
-            <a:off x="457200" y="3657600"/>
-            <a:ext cx="7315200" cy="292608"/>
-          </a:xfrm>
-          <a:prstGeom prst="rect">
-            <a:avLst/>
-          </a:prstGeom>
-          <a:noFill/>
-          <a:ln/>
-        </p:spPr>
-        <p:txBody>
-          <a:bodyPr wrap="square" lIns="0" tIns="0" rIns="0" bIns="0" rtlCol="0" anchor="ctr"/>
-          <a:lstStyle/>
-          <a:p>
-            <a:pPr indent="0" marL="0">
-              <a:buNone/>
-            </a:pPr>
-            <a:r>
-              <a:rPr lang="en-US" sz="1200" b="1" spc="100" kern="0" dirty="0">
-                <a:solidFill>
-                  <a:srgbClr val="16213D"/>
-                </a:solidFill>
-                <a:latin typeface="Arial" pitchFamily="34" charset="0"/>
-                <a:ea typeface="Arial" pitchFamily="34" charset="-122"/>
-                <a:cs typeface="Arial" pitchFamily="34" charset="-120"/>
-              </a:rPr>
-              <a:t>ACCEPTANCE CRITERIA, WRITTEN BEFORE THE ATTEMPT</a:t>
-            </a:r>
-            <a:endParaRPr lang="en-US" sz="1200" dirty="0"/>
-          </a:p>
-        </p:txBody>
-      </p:sp>
-      <p:sp>
-        <p:nvSpPr>
-          <p:cNvPr id="16" name="Shape 14"/>
-          <p:cNvSpPr/>
-          <p:nvPr/>
-        </p:nvSpPr>
-        <p:spPr>
-          <a:xfrm>
-            <a:off x="457200" y="4069080"/>
-            <a:ext cx="457200" cy="402336"/>
-          </a:xfrm>
-          <a:prstGeom prst="rect">
-            <a:avLst/>
-          </a:prstGeom>
-          <a:solidFill>
-            <a:srgbClr val="16213D"/>
-          </a:solidFill>
-          <a:ln/>
-        </p:spPr>
-      </p:sp>
-      <p:sp>
-        <p:nvSpPr>
-          <p:cNvPr id="17" name="Text 15"/>
-          <p:cNvSpPr txBox="1"/>
-          <p:nvPr/>
-        </p:nvSpPr>
-        <p:spPr>
-          <a:xfrm>
-            <a:off x="457200" y="4096512"/>
-            <a:ext cx="457200" cy="347472"/>
-          </a:xfrm>
-          <a:prstGeom prst="rect">
-            <a:avLst/>
-          </a:prstGeom>
-          <a:noFill/>
-          <a:ln/>
-        </p:spPr>
-        <p:txBody>
-          <a:bodyPr wrap="square" lIns="0" tIns="0" rIns="0" bIns="0" rtlCol="0" anchor="ctr"/>
-          <a:lstStyle/>
-          <a:p>
-            <a:pPr algn="ctr" indent="0" marL="0">
-              <a:buNone/>
-            </a:pPr>
-            <a:r>
-              <a:rPr lang="en-US" sz="1200" b="1" dirty="0">
-                <a:solidFill>
-                  <a:srgbClr val="E58E1A"/>
-                </a:solidFill>
-                <a:latin typeface="Courier New" pitchFamily="34" charset="0"/>
-                <a:ea typeface="Courier New" pitchFamily="34" charset="-122"/>
-                <a:cs typeface="Courier New" pitchFamily="34" charset="-120"/>
-              </a:rPr>
-              <a:t>1</a:t>
-            </a:r>
-            <a:endParaRPr lang="en-US" sz="1200" dirty="0"/>
-          </a:p>
-        </p:txBody>
-      </p:sp>
-      <p:sp>
-        <p:nvSpPr>
-          <p:cNvPr id="18" name="Text 16"/>
-          <p:cNvSpPr txBox="1"/>
-          <p:nvPr/>
-        </p:nvSpPr>
-        <p:spPr>
-          <a:xfrm>
-            <a:off x="1051560" y="4096512"/>
-            <a:ext cx="10515600" cy="365760"/>
-          </a:xfrm>
-          <a:prstGeom prst="rect">
-            <a:avLst/>
-          </a:prstGeom>
-          <a:noFill/>
-          <a:ln/>
-        </p:spPr>
-        <p:txBody>
-          <a:bodyPr wrap="square" lIns="0" tIns="0" rIns="0" bIns="0" rtlCol="0" anchor="ctr"/>
-          <a:lstStyle/>
-          <a:p>
-            <a:pPr indent="0" marL="0">
-              <a:buNone/>
-            </a:pPr>
-            <a:r>
-              <a:rPr lang="en-US" sz="1250" dirty="0">
-                <a:solidFill>
-                  <a:srgbClr val="222A3F"/>
-                </a:solidFill>
-                <a:latin typeface="Arial" pitchFamily="34" charset="0"/>
-                <a:ea typeface="Arial" pitchFamily="34" charset="-122"/>
-                <a:cs typeface="Arial" pitchFamily="34" charset="-120"/>
-              </a:rPr>
-              <a:t>Radio two's OLED shows the Group9 channel and US region</a:t>
-            </a:r>
-            <a:endParaRPr lang="en-US" sz="1250" dirty="0"/>
-          </a:p>
-        </p:txBody>
-      </p:sp>
-      <p:sp>
-        <p:nvSpPr>
-          <p:cNvPr id="19" name="Shape 17"/>
-          <p:cNvSpPr/>
-          <p:nvPr/>
-        </p:nvSpPr>
-        <p:spPr>
-          <a:xfrm>
-            <a:off x="457200" y="4581144"/>
-            <a:ext cx="457200" cy="402336"/>
-          </a:xfrm>
-          <a:prstGeom prst="rect">
-            <a:avLst/>
-          </a:prstGeom>
-          <a:solidFill>
-            <a:srgbClr val="16213D"/>
-          </a:solidFill>
-          <a:ln/>
-        </p:spPr>
-      </p:sp>
-      <p:sp>
-        <p:nvSpPr>
-          <p:cNvPr id="20" name="Text 18"/>
-          <p:cNvSpPr txBox="1"/>
-          <p:nvPr/>
-        </p:nvSpPr>
-        <p:spPr>
-          <a:xfrm>
-            <a:off x="457200" y="4608576"/>
-            <a:ext cx="457200" cy="347472"/>
-          </a:xfrm>
-          <a:prstGeom prst="rect">
-            <a:avLst/>
-          </a:prstGeom>
-          <a:noFill/>
-          <a:ln/>
-        </p:spPr>
-        <p:txBody>
-          <a:bodyPr wrap="square" lIns="0" tIns="0" rIns="0" bIns="0" rtlCol="0" anchor="ctr"/>
-          <a:lstStyle/>
-          <a:p>
-            <a:pPr algn="ctr" indent="0" marL="0">
-              <a:buNone/>
-            </a:pPr>
-            <a:r>
-              <a:rPr lang="en-US" sz="1200" b="1" dirty="0">
-                <a:solidFill>
-                  <a:srgbClr val="E58E1A"/>
-                </a:solidFill>
-                <a:latin typeface="Courier New" pitchFamily="34" charset="0"/>
-                <a:ea typeface="Courier New" pitchFamily="34" charset="-122"/>
-                <a:cs typeface="Courier New" pitchFamily="34" charset="-120"/>
-              </a:rPr>
-              <a:t>2</a:t>
-            </a:r>
-            <a:endParaRPr lang="en-US" sz="1200" dirty="0"/>
-          </a:p>
-        </p:txBody>
-      </p:sp>
-      <p:sp>
-        <p:nvSpPr>
-          <p:cNvPr id="21" name="Text 19"/>
-          <p:cNvSpPr txBox="1"/>
-          <p:nvPr/>
-        </p:nvSpPr>
-        <p:spPr>
-          <a:xfrm>
-            <a:off x="1051560" y="4608576"/>
-            <a:ext cx="10515600" cy="365760"/>
-          </a:xfrm>
-          <a:prstGeom prst="rect">
-            <a:avLst/>
-          </a:prstGeom>
-          <a:noFill/>
-          <a:ln/>
-        </p:spPr>
-        <p:txBody>
-          <a:bodyPr wrap="square" lIns="0" tIns="0" rIns="0" bIns="0" rtlCol="0" anchor="ctr"/>
-          <a:lstStyle/>
-          <a:p>
-            <a:pPr indent="0" marL="0">
-              <a:buNone/>
-            </a:pPr>
-            <a:r>
-              <a:rPr lang="en-US" sz="1250" dirty="0">
-                <a:solidFill>
-                  <a:srgbClr val="222A3F"/>
-                </a:solidFill>
-                <a:latin typeface="Arial" pitchFamily="34" charset="0"/>
-                <a:ea typeface="Arial" pitchFamily="34" charset="-122"/>
-                <a:cs typeface="Arial" pitchFamily="34" charset="-120"/>
-              </a:rPr>
-              <a:t>Both OLEDs read “1 online”: each radio hears the other</a:t>
-            </a:r>
-            <a:endParaRPr lang="en-US" sz="1250" dirty="0"/>
-          </a:p>
-        </p:txBody>
-      </p:sp>
-      <p:sp>
-        <p:nvSpPr>
-          <p:cNvPr id="22" name="Shape 20"/>
-          <p:cNvSpPr/>
-          <p:nvPr/>
-        </p:nvSpPr>
-        <p:spPr>
-          <a:xfrm>
-            <a:off x="457200" y="5093208"/>
-            <a:ext cx="457200" cy="402336"/>
-          </a:xfrm>
-          <a:prstGeom prst="rect">
-            <a:avLst/>
-          </a:prstGeom>
-          <a:solidFill>
-            <a:srgbClr val="16213D"/>
-          </a:solidFill>
-          <a:ln/>
-        </p:spPr>
-      </p:sp>
-      <p:sp>
-        <p:nvSpPr>
-          <p:cNvPr id="23" name="Text 21"/>
-          <p:cNvSpPr txBox="1"/>
-          <p:nvPr/>
-        </p:nvSpPr>
-        <p:spPr>
-          <a:xfrm>
-            <a:off x="457200" y="5120640"/>
-            <a:ext cx="457200" cy="347472"/>
-          </a:xfrm>
-          <a:prstGeom prst="rect">
-            <a:avLst/>
-          </a:prstGeom>
-          <a:noFill/>
-          <a:ln/>
-        </p:spPr>
-        <p:txBody>
-          <a:bodyPr wrap="square" lIns="0" tIns="0" rIns="0" bIns="0" rtlCol="0" anchor="ctr"/>
-          <a:lstStyle/>
-          <a:p>
-            <a:pPr algn="ctr" indent="0" marL="0">
-              <a:buNone/>
-            </a:pPr>
-            <a:r>
-              <a:rPr lang="en-US" sz="1200" b="1" dirty="0">
-                <a:solidFill>
-                  <a:srgbClr val="E58E1A"/>
-                </a:solidFill>
-                <a:latin typeface="Courier New" pitchFamily="34" charset="0"/>
-                <a:ea typeface="Courier New" pitchFamily="34" charset="-122"/>
-                <a:cs typeface="Courier New" pitchFamily="34" charset="-120"/>
-              </a:rPr>
-              <a:t>3</a:t>
-            </a:r>
-            <a:endParaRPr lang="en-US" sz="1200" dirty="0"/>
-          </a:p>
-        </p:txBody>
-      </p:sp>
-      <p:sp>
-        <p:nvSpPr>
-          <p:cNvPr id="24" name="Text 22"/>
-          <p:cNvSpPr txBox="1"/>
-          <p:nvPr/>
-        </p:nvSpPr>
-        <p:spPr>
-          <a:xfrm>
-            <a:off x="1051560" y="5120640"/>
-            <a:ext cx="10515600" cy="365760"/>
-          </a:xfrm>
-          <a:prstGeom prst="rect">
-            <a:avLst/>
-          </a:prstGeom>
-          <a:noFill/>
-          <a:ln/>
-        </p:spPr>
-        <p:txBody>
-          <a:bodyPr wrap="square" lIns="0" tIns="0" rIns="0" bIns="0" rtlCol="0" anchor="ctr"/>
-          <a:lstStyle/>
-          <a:p>
-            <a:pPr indent="0" marL="0">
-              <a:buNone/>
-            </a:pPr>
-            <a:r>
-              <a:rPr lang="en-US" sz="1250" dirty="0">
-                <a:solidFill>
-                  <a:srgbClr val="222A3F"/>
-                </a:solidFill>
-                <a:latin typeface="Arial" pitchFamily="34" charset="0"/>
-                <a:ea typeface="Arial" pitchFamily="34" charset="-122"/>
-                <a:cs typeface="Arial" pitchFamily="34" charset="-120"/>
-              </a:rPr>
-              <a:t>The display's PTR row fills with radio two's live position</a:t>
-            </a:r>
-            <a:endParaRPr lang="en-US" sz="1250" dirty="0"/>
-          </a:p>
-        </p:txBody>
-      </p:sp>
-      <p:sp>
-        <p:nvSpPr>
-          <p:cNvPr id="25" name="Shape 23"/>
-          <p:cNvSpPr/>
-          <p:nvPr/>
-        </p:nvSpPr>
-        <p:spPr>
-          <a:xfrm>
-            <a:off x="457200" y="5605272"/>
-            <a:ext cx="457200" cy="402336"/>
-          </a:xfrm>
-          <a:prstGeom prst="rect">
-            <a:avLst/>
-          </a:prstGeom>
-          <a:solidFill>
-            <a:srgbClr val="16213D"/>
-          </a:solidFill>
-          <a:ln/>
-        </p:spPr>
-      </p:sp>
-      <p:sp>
-        <p:nvSpPr>
-          <p:cNvPr id="26" name="Text 24"/>
-          <p:cNvSpPr txBox="1"/>
-          <p:nvPr/>
-        </p:nvSpPr>
-        <p:spPr>
-          <a:xfrm>
-            <a:off x="457200" y="5632704"/>
-            <a:ext cx="457200" cy="347472"/>
-          </a:xfrm>
-          <a:prstGeom prst="rect">
-            <a:avLst/>
-          </a:prstGeom>
-          <a:noFill/>
-          <a:ln/>
-        </p:spPr>
-        <p:txBody>
-          <a:bodyPr wrap="square" lIns="0" tIns="0" rIns="0" bIns="0" rtlCol="0" anchor="ctr"/>
-          <a:lstStyle/>
-          <a:p>
-            <a:pPr algn="ctr" indent="0" marL="0">
-              <a:buNone/>
-            </a:pPr>
-            <a:r>
-              <a:rPr lang="en-US" sz="1200" b="1" dirty="0">
-                <a:solidFill>
-                  <a:srgbClr val="E58E1A"/>
-                </a:solidFill>
-                <a:latin typeface="Courier New" pitchFamily="34" charset="0"/>
-                <a:ea typeface="Courier New" pitchFamily="34" charset="-122"/>
-                <a:cs typeface="Courier New" pitchFamily="34" charset="-120"/>
-              </a:rPr>
-              <a:t>4</a:t>
-            </a:r>
-            <a:endParaRPr lang="en-US" sz="1200" dirty="0"/>
-          </a:p>
-        </p:txBody>
-      </p:sp>
-      <p:sp>
-        <p:nvSpPr>
-          <p:cNvPr id="27" name="Text 25"/>
-          <p:cNvSpPr txBox="1"/>
-          <p:nvPr/>
-        </p:nvSpPr>
-        <p:spPr>
-          <a:xfrm>
-            <a:off x="1051560" y="5632704"/>
-            <a:ext cx="10515600" cy="365760"/>
-          </a:xfrm>
-          <a:prstGeom prst="rect">
-            <a:avLst/>
-          </a:prstGeom>
-          <a:noFill/>
-          <a:ln/>
-        </p:spPr>
-        <p:txBody>
-          <a:bodyPr wrap="square" lIns="0" tIns="0" rIns="0" bIns="0" rtlCol="0" anchor="ctr"/>
-          <a:lstStyle/>
-          <a:p>
-            <a:pPr indent="0" marL="0">
-              <a:buNone/>
-            </a:pPr>
-            <a:r>
-              <a:rPr lang="en-US" sz="1250" dirty="0">
-                <a:solidFill>
-                  <a:srgbClr val="222A3F"/>
-                </a:solidFill>
-                <a:latin typeface="Arial" pitchFamily="34" charset="0"/>
-                <a:ea typeface="Arial" pitchFamily="34" charset="-122"/>
-                <a:cs typeface="Arial" pitchFamily="34" charset="-120"/>
-              </a:rPr>
-              <a:t>ChUtil stays in single digits with both radios broadcasting</a:t>
+              <a:t>Selection ships before the two-radio bench test on purpose: the first time two real nodes speak, the display must already know how to choose between them. Designing the chooser after the ambiguity exists would mean debugging both at once.</a:t>
             </a:r>
             <a:endParaRPr lang="en-US" sz="1250" dirty="0"/>
           </a:p>
@@ -9193,7 +10219,7 @@
                 <a:ea typeface="Courier New" pitchFamily="34" charset="-122"/>
                 <a:cs typeface="Courier New" pitchFamily="34" charset="-120"/>
               </a:rPr>
-              <a:t>PREDICTED LINK CURVE</a:t>
+              <a:t>RADIO TWO PROCEDURE</a:t>
             </a:r>
             <a:endParaRPr lang="en-US" sz="900" dirty="0"/>
           </a:p>
@@ -9232,7 +10258,7 @@
                 <a:ea typeface="Courier New" pitchFamily="34" charset="-122"/>
                 <a:cs typeface="Courier New" pitchFamily="34" charset="-120"/>
               </a:rPr>
-              <a:t>SHEET 05/10  REV D  2026-09-16</a:t>
+              <a:t>SHEET 05/11  REV D  2026-09-16</a:t>
             </a:r>
             <a:endParaRPr lang="en-US" sz="900" dirty="0"/>
           </a:p>
@@ -9335,53 +10361,232 @@
                 <a:ea typeface="Arial" pitchFamily="34" charset="-122"/>
                 <a:cs typeface="Arial" pitchFamily="34" charset="-120"/>
               </a:rPr>
-              <a:t>THE PREDICTION THE RANGE TEST WILL JUDGE</a:t>
+              <a:t>RADIO TWO: A FIFTEEN-MINUTE PROCEDURE</a:t>
             </a:r>
             <a:endParaRPr lang="en-US" sz="2300" dirty="0"/>
           </a:p>
         </p:txBody>
       </p:sp>
-      <p:pic>
-        <p:nvPicPr>
-          <p:cNvPr id="10" name="Image 0" descr="C:/Users/deogr/AppData/Local/Temp/claude/C--Users-deogr-Documents-Fall-Project-Off-Grid-Vehicle-dection-project/e8b2e8fa-1513-4aa8-a8f6-ce4fcd20e664/scratchpad/deck3/g_linkbudget.png">    </p:cNvPr>
-          <p:cNvPicPr>
-            <a:picLocks noChangeAspect="1"/>
-          </p:cNvPicPr>
-          <p:nvPr/>
-        </p:nvPicPr>
-        <p:blipFill>
-          <a:blip r:embed="rId1"/>
-          <a:stretch>
-            <a:fillRect/>
-          </a:stretch>
-        </p:blipFill>
-        <p:spPr>
-          <a:xfrm>
-            <a:off x="457200" y="1051560"/>
-            <a:ext cx="6035040" cy="3959352"/>
-          </a:xfrm>
-          <a:prstGeom prst="rect">
-            <a:avLst/>
-          </a:prstGeom>
-        </p:spPr>
-      </p:pic>
-      <p:sp>
-        <p:nvSpPr>
-          <p:cNvPr id="11" name="Shape 8"/>
+      <p:sp>
+        <p:nvSpPr>
+          <p:cNvPr id="10" name="Shape 8"/>
           <p:cNvSpPr/>
           <p:nvPr/>
         </p:nvSpPr>
         <p:spPr>
           <a:xfrm>
-            <a:off x="457200" y="1051560"/>
-            <a:ext cx="6035040" cy="3959352"/>
-          </a:xfrm>
-          <a:prstGeom prst="rect">
-            <a:avLst/>
-          </a:prstGeom>
-          <a:ln w="12700">
+            <a:off x="457200" y="1097280"/>
+            <a:ext cx="7315200" cy="2286000"/>
+          </a:xfrm>
+          <a:prstGeom prst="rect">
+            <a:avLst/>
+          </a:prstGeom>
+          <a:solidFill>
+            <a:srgbClr val="1B2440"/>
+          </a:solidFill>
+          <a:ln/>
+        </p:spPr>
+      </p:sp>
+      <p:sp>
+        <p:nvSpPr>
+          <p:cNvPr id="11" name="Text 9"/>
+          <p:cNvSpPr txBox="1"/>
+          <p:nvPr/>
+        </p:nvSpPr>
+        <p:spPr>
+          <a:xfrm>
+            <a:off x="594360" y="1161288"/>
+            <a:ext cx="7040880" cy="237744"/>
+          </a:xfrm>
+          <a:prstGeom prst="rect">
+            <a:avLst/>
+          </a:prstGeom>
+          <a:noFill/>
+          <a:ln/>
+        </p:spPr>
+        <p:txBody>
+          <a:bodyPr wrap="square" lIns="0" tIns="0" rIns="0" bIns="0" rtlCol="0" anchor="ctr"/>
+          <a:lstStyle/>
+          <a:p>
+            <a:pPr indent="0" marL="0">
+              <a:buNone/>
+            </a:pPr>
+            <a:r>
+              <a:rPr lang="en-US" sz="1000" b="1" dirty="0">
+                <a:solidFill>
+                  <a:srgbClr val="E58E1A"/>
+                </a:solidFill>
+                <a:latin typeface="Courier New" pitchFamily="34" charset="0"/>
+                <a:ea typeface="Courier New" pitchFamily="34" charset="-122"/>
+                <a:cs typeface="Courier New" pitchFamily="34" charset="-120"/>
+              </a:rPr>
+              <a:t>hardware/README.md  the recipe, one command per line</a:t>
+            </a:r>
+            <a:endParaRPr lang="en-US" sz="1000" dirty="0"/>
+          </a:p>
+        </p:txBody>
+      </p:sp>
+      <p:sp>
+        <p:nvSpPr>
+          <p:cNvPr id="12" name="Text 10"/>
+          <p:cNvSpPr txBox="1"/>
+          <p:nvPr/>
+        </p:nvSpPr>
+        <p:spPr>
+          <a:xfrm>
+            <a:off x="594360" y="1417320"/>
+            <a:ext cx="7040880" cy="1874520"/>
+          </a:xfrm>
+          <a:prstGeom prst="rect">
+            <a:avLst/>
+          </a:prstGeom>
+          <a:noFill/>
+          <a:ln/>
+        </p:spPr>
+        <p:txBody>
+          <a:bodyPr wrap="square" lIns="0" tIns="0" rIns="0" bIns="0" rtlCol="0" anchor="t"/>
+          <a:lstStyle/>
+          <a:p>
+            <a:pPr indent="0" marL="0">
+              <a:buNone/>
+            </a:pPr>
+            <a:r>
+              <a:rPr lang="en-US" sz="1000" dirty="0">
+                <a:solidFill>
+                  <a:srgbClr val="C9D8F0"/>
+                </a:solidFill>
+                <a:latin typeface="Courier New" pitchFamily="34" charset="0"/>
+                <a:ea typeface="Courier New" pitchFamily="34" charset="-122"/>
+                <a:cs typeface="Courier New" pitchFamily="34" charset="-120"/>
+              </a:rPr>
+              <a:t>meshtastic --port COMx --seturl "https://meshtastic.org/e/#Ci4S..."</a:t>
+            </a:r>
+            <a:endParaRPr lang="en-US" sz="1000" dirty="0"/>
+          </a:p>
+          <a:p>
+            <a:pPr indent="0" marL="0">
+              <a:buNone/>
+            </a:pPr>
+            <a:r>
+              <a:rPr lang="en-US" sz="1000" dirty="0">
+                <a:solidFill>
+                  <a:srgbClr val="C9D8F0"/>
+                </a:solidFill>
+                <a:latin typeface="Courier New" pitchFamily="34" charset="0"/>
+                <a:ea typeface="Courier New" pitchFamily="34" charset="-122"/>
+                <a:cs typeface="Courier New" pitchFamily="34" charset="-120"/>
+              </a:rPr>
+              <a:t>   # channel URL: carries the AES key AND the frequency agreement</a:t>
+            </a:r>
+            <a:endParaRPr lang="en-US" sz="1000" dirty="0"/>
+          </a:p>
+          <a:p>
+            <a:pPr indent="0" marL="0">
+              <a:buNone/>
+            </a:pPr>
+            <a:r>
+              <a:rPr lang="en-US" sz="1000" dirty="0">
+                <a:solidFill>
+                  <a:srgbClr val="C9D8F0"/>
+                </a:solidFill>
+                <a:latin typeface="Courier New" pitchFamily="34" charset="0"/>
+                <a:ea typeface="Courier New" pitchFamily="34" charset="-122"/>
+                <a:cs typeface="Courier New" pitchFamily="34" charset="-120"/>
+              </a:rPr>
+              <a:t>meshtastic --port COMx --set position.position_broadcast_secs 60</a:t>
+            </a:r>
+            <a:endParaRPr lang="en-US" sz="1000" dirty="0"/>
+          </a:p>
+          <a:p>
+            <a:pPr indent="0" marL="0">
+              <a:buNone/>
+            </a:pPr>
+            <a:r>
+              <a:rPr lang="en-US" sz="1000" dirty="0">
+                <a:solidFill>
+                  <a:srgbClr val="C9D8F0"/>
+                </a:solidFill>
+                <a:latin typeface="Courier New" pitchFamily="34" charset="0"/>
+                <a:ea typeface="Courier New" pitchFamily="34" charset="-122"/>
+                <a:cs typeface="Courier New" pitchFamily="34" charset="-120"/>
+              </a:rPr>
+              <a:t>meshtastic --port COMx --set position.broadcast_smart_minimum_interval_secs 10</a:t>
+            </a:r>
+            <a:endParaRPr lang="en-US" sz="1000" dirty="0"/>
+          </a:p>
+          <a:p>
+            <a:pPr indent="0" marL="0">
+              <a:buNone/>
+            </a:pPr>
+            <a:r>
+              <a:rPr lang="en-US" sz="1000" dirty="0">
+                <a:solidFill>
+                  <a:srgbClr val="C9D8F0"/>
+                </a:solidFill>
+                <a:latin typeface="Courier New" pitchFamily="34" charset="0"/>
+                <a:ea typeface="Courier New" pitchFamily="34" charset="-122"/>
+                <a:cs typeface="Courier New" pitchFamily="34" charset="-120"/>
+              </a:rPr>
+              <a:t>meshtastic --port COMx --set position.broadcast_smart_minimum_distance 20</a:t>
+            </a:r>
+            <a:endParaRPr lang="en-US" sz="1000" dirty="0"/>
+          </a:p>
+          <a:p>
+            <a:pPr indent="0" marL="0">
+              <a:buNone/>
+            </a:pPr>
+            <a:r>
+              <a:rPr lang="en-US" sz="1000" dirty="0">
+                <a:solidFill>
+                  <a:srgbClr val="C9D8F0"/>
+                </a:solidFill>
+                <a:latin typeface="Courier New" pitchFamily="34" charset="0"/>
+                <a:ea typeface="Courier New" pitchFamily="34" charset="-122"/>
+                <a:cs typeface="Courier New" pitchFamily="34" charset="-120"/>
+              </a:rPr>
+              <a:t>meshtastic --port COMx --set position.gps_update_interval 10</a:t>
+            </a:r>
+            <a:endParaRPr lang="en-US" sz="1000" dirty="0"/>
+          </a:p>
+          <a:p>
+            <a:pPr indent="0" marL="0">
+              <a:buNone/>
+            </a:pPr>
+            <a:r>
+              <a:rPr lang="en-US" sz="1000" dirty="0">
+                <a:solidFill>
+                  <a:srgbClr val="C9D8F0"/>
+                </a:solidFill>
+                <a:latin typeface="Courier New" pitchFamily="34" charset="0"/>
+                <a:ea typeface="Courier New" pitchFamily="34" charset="-122"/>
+                <a:cs typeface="Courier New" pitchFamily="34" charset="-120"/>
+              </a:rPr>
+              <a:t>meshtastic --port COMx --get lora.region     # VERIFY every write</a:t>
+            </a:r>
+            <a:endParaRPr lang="en-US" sz="1000" dirty="0"/>
+          </a:p>
+        </p:txBody>
+      </p:sp>
+      <p:sp>
+        <p:nvSpPr>
+          <p:cNvPr id="13" name="Shape 11"/>
+          <p:cNvSpPr/>
+          <p:nvPr/>
+        </p:nvSpPr>
+        <p:spPr>
+          <a:xfrm>
+            <a:off x="8092440" y="1097280"/>
+            <a:ext cx="3657600" cy="2286000"/>
+          </a:xfrm>
+          <a:prstGeom prst="rect">
+            <a:avLst/>
+          </a:prstGeom>
+          <a:solidFill>
+            <a:srgbClr val="FDF3E3"/>
+          </a:solidFill>
+          <a:ln w="15875">
             <a:solidFill>
-              <a:srgbClr val="9AA7BE"/>
+              <a:srgbClr val="E58E1A"/>
             </a:solidFill>
             <a:prstDash val="solid"/>
           </a:ln>
@@ -9389,116 +10594,14 @@
       </p:sp>
       <p:sp>
         <p:nvSpPr>
-          <p:cNvPr id="12" name="Text 9"/>
-          <p:cNvSpPr txBox="1"/>
-          <p:nvPr/>
-        </p:nvSpPr>
-        <p:spPr>
-          <a:xfrm>
-            <a:off x="6720840" y="1188720"/>
-            <a:ext cx="4983480" cy="3108960"/>
-          </a:xfrm>
-          <a:prstGeom prst="rect">
-            <a:avLst/>
-          </a:prstGeom>
-          <a:noFill/>
-          <a:ln/>
-        </p:spPr>
-        <p:txBody>
-          <a:bodyPr wrap="square" lIns="0" tIns="0" rIns="0" bIns="0" rtlCol="0" anchor="ctr"/>
-          <a:lstStyle/>
-          <a:p>
-            <a:pPr marL="342900" indent="-342900">
-              <a:spcAft>
-                <a:spcPts val="600"/>
-              </a:spcAft>
-              <a:buSzPct val="100000"/>
-              <a:buChar char="▪"/>
-            </a:pPr>
-            <a:r>
-              <a:rPr lang="en-US" sz="1250" dirty="0">
-                <a:solidFill>
-                  <a:srgbClr val="222A3F"/>
-                </a:solidFill>
-                <a:latin typeface="Arial" pitchFamily="34" charset="0"/>
-                <a:ea typeface="Arial" pitchFamily="34" charset="-122"/>
-                <a:cs typeface="Arial" pitchFamily="34" charset="-120"/>
-              </a:rPr>
-              <a:t>Transmit +22 dBm, 3 dBi at each end, free-space loss at 915 MHz: the solid curve. Terrain and clutter cost more: the dashed band.</a:t>
-            </a:r>
-            <a:endParaRPr lang="en-US" sz="1250" dirty="0"/>
-          </a:p>
-          <a:p>
-            <a:pPr marL="342900" indent="-342900">
-              <a:spcAft>
-                <a:spcPts val="600"/>
-              </a:spcAft>
-              <a:buSzPct val="100000"/>
-              <a:buChar char="▪"/>
-            </a:pPr>
-            <a:r>
-              <a:rPr lang="en-US" sz="1250" dirty="0">
-                <a:solidFill>
-                  <a:srgbClr val="222A3F"/>
-                </a:solidFill>
-                <a:latin typeface="Arial" pitchFamily="34" charset="0"/>
-                <a:ea typeface="Arial" pitchFamily="34" charset="-122"/>
-                <a:cs typeface="Arial" pitchFamily="34" charset="-120"/>
-              </a:rPr>
-              <a:t>The orange line is the wall: -131 dBm, the SF11 sensitivity from the datasheet. Where the band crosses the wall is the range prediction.</a:t>
-            </a:r>
-            <a:endParaRPr lang="en-US" sz="1250" dirty="0"/>
-          </a:p>
-          <a:p>
-            <a:pPr marL="342900" indent="-342900">
-              <a:buSzPct val="100000"/>
-              <a:buChar char="▪"/>
-            </a:pPr>
-            <a:r>
-              <a:rPr lang="en-US" sz="1250" dirty="0">
-                <a:solidFill>
-                  <a:srgbClr val="222A3F"/>
-                </a:solidFill>
-                <a:latin typeface="Arial" pitchFamily="34" charset="0"/>
-                <a:ea typeface="Arial" pitchFamily="34" charset="-122"/>
-                <a:cs typeface="Arial" pitchFamily="34" charset="-120"/>
-              </a:rPr>
-              <a:t>Free space says tens of kilometers; terrain will decide the real number. The range campaign plots measured RSSI points onto this exact chart.</a:t>
-            </a:r>
-            <a:endParaRPr lang="en-US" sz="1250" dirty="0"/>
-          </a:p>
-        </p:txBody>
-      </p:sp>
-      <p:sp>
-        <p:nvSpPr>
-          <p:cNvPr id="13" name="Shape 10"/>
-          <p:cNvSpPr/>
-          <p:nvPr/>
-        </p:nvSpPr>
-        <p:spPr>
-          <a:xfrm>
-            <a:off x="6720840" y="4434840"/>
-            <a:ext cx="4983480" cy="1554480"/>
-          </a:xfrm>
-          <a:prstGeom prst="rect">
-            <a:avLst/>
-          </a:prstGeom>
-          <a:solidFill>
-            <a:srgbClr val="16213D"/>
-          </a:solidFill>
-          <a:ln/>
-        </p:spPr>
-      </p:sp>
-      <p:sp>
-        <p:nvSpPr>
-          <p:cNvPr id="14" name="Text 11"/>
-          <p:cNvSpPr txBox="1"/>
-          <p:nvPr/>
-        </p:nvSpPr>
-        <p:spPr>
-          <a:xfrm>
-            <a:off x="6903720" y="4572000"/>
-            <a:ext cx="4617720" cy="1325880"/>
+          <p:cNvPr id="14" name="Text 12"/>
+          <p:cNvSpPr txBox="1"/>
+          <p:nvPr/>
+        </p:nvSpPr>
+        <p:spPr>
+          <a:xfrm>
+            <a:off x="8229600" y="1234440"/>
+            <a:ext cx="3383280" cy="2057400"/>
           </a:xfrm>
           <a:prstGeom prst="rect">
             <a:avLst/>
@@ -9519,30 +10622,69 @@
             <a:r>
               <a:rPr lang="en-US" sz="1100" b="1" dirty="0">
                 <a:solidFill>
-                  <a:srgbClr val="E58E1A"/>
+                  <a:srgbClr val="B06207"/>
                 </a:solidFill>
                 <a:latin typeface="Courier New" pitchFamily="34" charset="0"/>
                 <a:ea typeface="Courier New" pitchFamily="34" charset="-122"/>
                 <a:cs typeface="Courier New" pitchFamily="34" charset="-120"/>
               </a:rPr>
-              <a:t>WHY PUBLISH THE CURVE FIRST</a:t>
-            </a:r>
-            <a:endParaRPr lang="en-US" sz="1200" dirty="0"/>
+              <a:t>TWO DOCUMENTED TRAPS</a:t>
+            </a:r>
+            <a:endParaRPr lang="en-US" sz="1100" dirty="0"/>
           </a:p>
           <a:p>
             <a:pPr indent="0" marL="0">
               <a:buNone/>
             </a:pPr>
             <a:r>
-              <a:rPr lang="en-US" sz="1200" dirty="0">
-                <a:solidFill>
-                  <a:srgbClr val="FFFFFF"/>
+              <a:rPr lang="en-US" sz="1100" dirty="0">
+                <a:solidFill>
+                  <a:srgbClr val="222A3F"/>
                 </a:solidFill>
                 <a:latin typeface="Arial" pitchFamily="34" charset="0"/>
                 <a:ea typeface="Arial" pitchFamily="34" charset="-122"/>
                 <a:cs typeface="Arial" pitchFamily="34" charset="-120"/>
               </a:rPr>
-              <a:t>A measurement without a prior prediction is a demo. A measurement against a published curve is an experiment. Next review overlays the field points on this figure, wherever they land.</a:t>
+              <a:t>Reboot-triggering writes can silently revert (the port close resets the chip mid-save): read back every setting. And identical boards demand a named upload port: we have paid for that lesson once.</a:t>
+            </a:r>
+            <a:endParaRPr lang="en-US" sz="1100" dirty="0"/>
+          </a:p>
+        </p:txBody>
+      </p:sp>
+      <p:sp>
+        <p:nvSpPr>
+          <p:cNvPr id="15" name="Text 13"/>
+          <p:cNvSpPr txBox="1"/>
+          <p:nvPr/>
+        </p:nvSpPr>
+        <p:spPr>
+          <a:xfrm>
+            <a:off x="457200" y="3657600"/>
+            <a:ext cx="7315200" cy="292608"/>
+          </a:xfrm>
+          <a:prstGeom prst="rect">
+            <a:avLst/>
+          </a:prstGeom>
+          <a:noFill/>
+          <a:ln/>
+        </p:spPr>
+        <p:txBody>
+          <a:bodyPr wrap="square" lIns="0" tIns="0" rIns="0" bIns="0" rtlCol="0" anchor="ctr"/>
+          <a:lstStyle/>
+          <a:p>
+            <a:pPr indent="0" marL="0">
+              <a:buNone/>
+            </a:pPr>
+            <a:r>
+              <a:rPr lang="en-US" sz="1200" b="1" spc="100" kern="0" dirty="0">
+                <a:solidFill>
+                  <a:srgbClr val="16213D"/>
+                </a:solidFill>
+                <a:latin typeface="Arial" pitchFamily="34" charset="0"/>
+                <a:ea typeface="Arial" pitchFamily="34" charset="-122"/>
+                <a:cs typeface="Arial" pitchFamily="34" charset="-120"/>
+              </a:rPr>
+              <a:t>ACCEPTANCE CRITERIA, WRITTEN BEFORE THE ATTEMPT</a:t>
             </a:r>
             <a:endParaRPr lang="en-US" sz="1200" dirty="0"/>
           </a:p>
@@ -9550,40 +10692,393 @@
       </p:sp>
       <p:sp>
         <p:nvSpPr>
-          <p:cNvPr id="15" name="Text 12"/>
-          <p:cNvSpPr txBox="1"/>
-          <p:nvPr/>
-        </p:nvSpPr>
-        <p:spPr>
-          <a:xfrm>
-            <a:off x="457200" y="5138928"/>
-            <a:ext cx="6035040" cy="457200"/>
-          </a:xfrm>
-          <a:prstGeom prst="rect">
-            <a:avLst/>
-          </a:prstGeom>
-          <a:noFill/>
-          <a:ln/>
-        </p:spPr>
-        <p:txBody>
-          <a:bodyPr wrap="square" lIns="0" tIns="0" rIns="0" bIns="0" rtlCol="0" anchor="ctr"/>
-          <a:lstStyle/>
-          <a:p>
-            <a:pPr indent="0" marL="0">
-              <a:buNone/>
-            </a:pPr>
-            <a:r>
-              <a:rPr lang="en-US" sz="850" dirty="0">
-                <a:solidFill>
-                  <a:srgbClr val="5E6B85"/>
+          <p:cNvPr id="16" name="Shape 14"/>
+          <p:cNvSpPr/>
+          <p:nvPr/>
+        </p:nvSpPr>
+        <p:spPr>
+          <a:xfrm>
+            <a:off x="457200" y="4069080"/>
+            <a:ext cx="457200" cy="402336"/>
+          </a:xfrm>
+          <a:prstGeom prst="rect">
+            <a:avLst/>
+          </a:prstGeom>
+          <a:solidFill>
+            <a:srgbClr val="16213D"/>
+          </a:solidFill>
+          <a:ln/>
+        </p:spPr>
+      </p:sp>
+      <p:sp>
+        <p:nvSpPr>
+          <p:cNvPr id="17" name="Text 15"/>
+          <p:cNvSpPr txBox="1"/>
+          <p:nvPr/>
+        </p:nvSpPr>
+        <p:spPr>
+          <a:xfrm>
+            <a:off x="457200" y="4096512"/>
+            <a:ext cx="457200" cy="347472"/>
+          </a:xfrm>
+          <a:prstGeom prst="rect">
+            <a:avLst/>
+          </a:prstGeom>
+          <a:noFill/>
+          <a:ln/>
+        </p:spPr>
+        <p:txBody>
+          <a:bodyPr wrap="square" lIns="0" tIns="0" rIns="0" bIns="0" rtlCol="0" anchor="ctr"/>
+          <a:lstStyle/>
+          <a:p>
+            <a:pPr algn="ctr" indent="0" marL="0">
+              <a:buNone/>
+            </a:pPr>
+            <a:r>
+              <a:rPr lang="en-US" sz="1200" b="1" dirty="0">
+                <a:solidFill>
+                  <a:srgbClr val="E58E1A"/>
                 </a:solidFill>
                 <a:latin typeface="Courier New" pitchFamily="34" charset="0"/>
                 <a:ea typeface="Courier New" pitchFamily="34" charset="-122"/>
                 <a:cs typeface="Courier New" pitchFamily="34" charset="-120"/>
               </a:rPr>
-              <a:t>MODEL: FSPL = 32.45 + 20log(f) + 20log(d) · RSSI = 22 + 3 + 3 - FSPL - terrain   [DS Table 6-1 · AN1200.22 · TELECOM_ANALYSIS.md]</a:t>
-            </a:r>
-            <a:endParaRPr lang="en-US" sz="850" dirty="0"/>
+              <a:t>1</a:t>
+            </a:r>
+            <a:endParaRPr lang="en-US" sz="1200" dirty="0"/>
+          </a:p>
+        </p:txBody>
+      </p:sp>
+      <p:sp>
+        <p:nvSpPr>
+          <p:cNvPr id="18" name="Text 16"/>
+          <p:cNvSpPr txBox="1"/>
+          <p:nvPr/>
+        </p:nvSpPr>
+        <p:spPr>
+          <a:xfrm>
+            <a:off x="1051560" y="4096512"/>
+            <a:ext cx="10515600" cy="365760"/>
+          </a:xfrm>
+          <a:prstGeom prst="rect">
+            <a:avLst/>
+          </a:prstGeom>
+          <a:noFill/>
+          <a:ln/>
+        </p:spPr>
+        <p:txBody>
+          <a:bodyPr wrap="square" lIns="0" tIns="0" rIns="0" bIns="0" rtlCol="0" anchor="ctr"/>
+          <a:lstStyle/>
+          <a:p>
+            <a:pPr indent="0" marL="0">
+              <a:buNone/>
+            </a:pPr>
+            <a:r>
+              <a:rPr lang="en-US" sz="1250" dirty="0">
+                <a:solidFill>
+                  <a:srgbClr val="222A3F"/>
+                </a:solidFill>
+                <a:latin typeface="Arial" pitchFamily="34" charset="0"/>
+                <a:ea typeface="Arial" pitchFamily="34" charset="-122"/>
+                <a:cs typeface="Arial" pitchFamily="34" charset="-120"/>
+              </a:rPr>
+              <a:t>Radio two's OLED shows the Group9 channel and US region</a:t>
+            </a:r>
+            <a:endParaRPr lang="en-US" sz="1250" dirty="0"/>
+          </a:p>
+        </p:txBody>
+      </p:sp>
+      <p:sp>
+        <p:nvSpPr>
+          <p:cNvPr id="19" name="Shape 17"/>
+          <p:cNvSpPr/>
+          <p:nvPr/>
+        </p:nvSpPr>
+        <p:spPr>
+          <a:xfrm>
+            <a:off x="457200" y="4581144"/>
+            <a:ext cx="457200" cy="402336"/>
+          </a:xfrm>
+          <a:prstGeom prst="rect">
+            <a:avLst/>
+          </a:prstGeom>
+          <a:solidFill>
+            <a:srgbClr val="16213D"/>
+          </a:solidFill>
+          <a:ln/>
+        </p:spPr>
+      </p:sp>
+      <p:sp>
+        <p:nvSpPr>
+          <p:cNvPr id="20" name="Text 18"/>
+          <p:cNvSpPr txBox="1"/>
+          <p:nvPr/>
+        </p:nvSpPr>
+        <p:spPr>
+          <a:xfrm>
+            <a:off x="457200" y="4608576"/>
+            <a:ext cx="457200" cy="347472"/>
+          </a:xfrm>
+          <a:prstGeom prst="rect">
+            <a:avLst/>
+          </a:prstGeom>
+          <a:noFill/>
+          <a:ln/>
+        </p:spPr>
+        <p:txBody>
+          <a:bodyPr wrap="square" lIns="0" tIns="0" rIns="0" bIns="0" rtlCol="0" anchor="ctr"/>
+          <a:lstStyle/>
+          <a:p>
+            <a:pPr algn="ctr" indent="0" marL="0">
+              <a:buNone/>
+            </a:pPr>
+            <a:r>
+              <a:rPr lang="en-US" sz="1200" b="1" dirty="0">
+                <a:solidFill>
+                  <a:srgbClr val="E58E1A"/>
+                </a:solidFill>
+                <a:latin typeface="Courier New" pitchFamily="34" charset="0"/>
+                <a:ea typeface="Courier New" pitchFamily="34" charset="-122"/>
+                <a:cs typeface="Courier New" pitchFamily="34" charset="-120"/>
+              </a:rPr>
+              <a:t>2</a:t>
+            </a:r>
+            <a:endParaRPr lang="en-US" sz="1200" dirty="0"/>
+          </a:p>
+        </p:txBody>
+      </p:sp>
+      <p:sp>
+        <p:nvSpPr>
+          <p:cNvPr id="21" name="Text 19"/>
+          <p:cNvSpPr txBox="1"/>
+          <p:nvPr/>
+        </p:nvSpPr>
+        <p:spPr>
+          <a:xfrm>
+            <a:off x="1051560" y="4608576"/>
+            <a:ext cx="10515600" cy="365760"/>
+          </a:xfrm>
+          <a:prstGeom prst="rect">
+            <a:avLst/>
+          </a:prstGeom>
+          <a:noFill/>
+          <a:ln/>
+        </p:spPr>
+        <p:txBody>
+          <a:bodyPr wrap="square" lIns="0" tIns="0" rIns="0" bIns="0" rtlCol="0" anchor="ctr"/>
+          <a:lstStyle/>
+          <a:p>
+            <a:pPr indent="0" marL="0">
+              <a:buNone/>
+            </a:pPr>
+            <a:r>
+              <a:rPr lang="en-US" sz="1250" dirty="0">
+                <a:solidFill>
+                  <a:srgbClr val="222A3F"/>
+                </a:solidFill>
+                <a:latin typeface="Arial" pitchFamily="34" charset="0"/>
+                <a:ea typeface="Arial" pitchFamily="34" charset="-122"/>
+                <a:cs typeface="Arial" pitchFamily="34" charset="-120"/>
+              </a:rPr>
+              <a:t>Both OLEDs read “1 online”: each radio hears the other</a:t>
+            </a:r>
+            <a:endParaRPr lang="en-US" sz="1250" dirty="0"/>
+          </a:p>
+        </p:txBody>
+      </p:sp>
+      <p:sp>
+        <p:nvSpPr>
+          <p:cNvPr id="22" name="Shape 20"/>
+          <p:cNvSpPr/>
+          <p:nvPr/>
+        </p:nvSpPr>
+        <p:spPr>
+          <a:xfrm>
+            <a:off x="457200" y="5093208"/>
+            <a:ext cx="457200" cy="402336"/>
+          </a:xfrm>
+          <a:prstGeom prst="rect">
+            <a:avLst/>
+          </a:prstGeom>
+          <a:solidFill>
+            <a:srgbClr val="16213D"/>
+          </a:solidFill>
+          <a:ln/>
+        </p:spPr>
+      </p:sp>
+      <p:sp>
+        <p:nvSpPr>
+          <p:cNvPr id="23" name="Text 21"/>
+          <p:cNvSpPr txBox="1"/>
+          <p:nvPr/>
+        </p:nvSpPr>
+        <p:spPr>
+          <a:xfrm>
+            <a:off x="457200" y="5120640"/>
+            <a:ext cx="457200" cy="347472"/>
+          </a:xfrm>
+          <a:prstGeom prst="rect">
+            <a:avLst/>
+          </a:prstGeom>
+          <a:noFill/>
+          <a:ln/>
+        </p:spPr>
+        <p:txBody>
+          <a:bodyPr wrap="square" lIns="0" tIns="0" rIns="0" bIns="0" rtlCol="0" anchor="ctr"/>
+          <a:lstStyle/>
+          <a:p>
+            <a:pPr algn="ctr" indent="0" marL="0">
+              <a:buNone/>
+            </a:pPr>
+            <a:r>
+              <a:rPr lang="en-US" sz="1200" b="1" dirty="0">
+                <a:solidFill>
+                  <a:srgbClr val="E58E1A"/>
+                </a:solidFill>
+                <a:latin typeface="Courier New" pitchFamily="34" charset="0"/>
+                <a:ea typeface="Courier New" pitchFamily="34" charset="-122"/>
+                <a:cs typeface="Courier New" pitchFamily="34" charset="-120"/>
+              </a:rPr>
+              <a:t>3</a:t>
+            </a:r>
+            <a:endParaRPr lang="en-US" sz="1200" dirty="0"/>
+          </a:p>
+        </p:txBody>
+      </p:sp>
+      <p:sp>
+        <p:nvSpPr>
+          <p:cNvPr id="24" name="Text 22"/>
+          <p:cNvSpPr txBox="1"/>
+          <p:nvPr/>
+        </p:nvSpPr>
+        <p:spPr>
+          <a:xfrm>
+            <a:off x="1051560" y="5120640"/>
+            <a:ext cx="10515600" cy="365760"/>
+          </a:xfrm>
+          <a:prstGeom prst="rect">
+            <a:avLst/>
+          </a:prstGeom>
+          <a:noFill/>
+          <a:ln/>
+        </p:spPr>
+        <p:txBody>
+          <a:bodyPr wrap="square" lIns="0" tIns="0" rIns="0" bIns="0" rtlCol="0" anchor="ctr"/>
+          <a:lstStyle/>
+          <a:p>
+            <a:pPr indent="0" marL="0">
+              <a:buNone/>
+            </a:pPr>
+            <a:r>
+              <a:rPr lang="en-US" sz="1250" dirty="0">
+                <a:solidFill>
+                  <a:srgbClr val="222A3F"/>
+                </a:solidFill>
+                <a:latin typeface="Arial" pitchFamily="34" charset="0"/>
+                <a:ea typeface="Arial" pitchFamily="34" charset="-122"/>
+                <a:cs typeface="Arial" pitchFamily="34" charset="-120"/>
+              </a:rPr>
+              <a:t>The display's PTR row fills with radio two's live position</a:t>
+            </a:r>
+            <a:endParaRPr lang="en-US" sz="1250" dirty="0"/>
+          </a:p>
+        </p:txBody>
+      </p:sp>
+      <p:sp>
+        <p:nvSpPr>
+          <p:cNvPr id="25" name="Shape 23"/>
+          <p:cNvSpPr/>
+          <p:nvPr/>
+        </p:nvSpPr>
+        <p:spPr>
+          <a:xfrm>
+            <a:off x="457200" y="5605272"/>
+            <a:ext cx="457200" cy="402336"/>
+          </a:xfrm>
+          <a:prstGeom prst="rect">
+            <a:avLst/>
+          </a:prstGeom>
+          <a:solidFill>
+            <a:srgbClr val="16213D"/>
+          </a:solidFill>
+          <a:ln/>
+        </p:spPr>
+      </p:sp>
+      <p:sp>
+        <p:nvSpPr>
+          <p:cNvPr id="26" name="Text 24"/>
+          <p:cNvSpPr txBox="1"/>
+          <p:nvPr/>
+        </p:nvSpPr>
+        <p:spPr>
+          <a:xfrm>
+            <a:off x="457200" y="5632704"/>
+            <a:ext cx="457200" cy="347472"/>
+          </a:xfrm>
+          <a:prstGeom prst="rect">
+            <a:avLst/>
+          </a:prstGeom>
+          <a:noFill/>
+          <a:ln/>
+        </p:spPr>
+        <p:txBody>
+          <a:bodyPr wrap="square" lIns="0" tIns="0" rIns="0" bIns="0" rtlCol="0" anchor="ctr"/>
+          <a:lstStyle/>
+          <a:p>
+            <a:pPr algn="ctr" indent="0" marL="0">
+              <a:buNone/>
+            </a:pPr>
+            <a:r>
+              <a:rPr lang="en-US" sz="1200" b="1" dirty="0">
+                <a:solidFill>
+                  <a:srgbClr val="E58E1A"/>
+                </a:solidFill>
+                <a:latin typeface="Courier New" pitchFamily="34" charset="0"/>
+                <a:ea typeface="Courier New" pitchFamily="34" charset="-122"/>
+                <a:cs typeface="Courier New" pitchFamily="34" charset="-120"/>
+              </a:rPr>
+              <a:t>4</a:t>
+            </a:r>
+            <a:endParaRPr lang="en-US" sz="1200" dirty="0"/>
+          </a:p>
+        </p:txBody>
+      </p:sp>
+      <p:sp>
+        <p:nvSpPr>
+          <p:cNvPr id="27" name="Text 25"/>
+          <p:cNvSpPr txBox="1"/>
+          <p:nvPr/>
+        </p:nvSpPr>
+        <p:spPr>
+          <a:xfrm>
+            <a:off x="1051560" y="5632704"/>
+            <a:ext cx="10515600" cy="365760"/>
+          </a:xfrm>
+          <a:prstGeom prst="rect">
+            <a:avLst/>
+          </a:prstGeom>
+          <a:noFill/>
+          <a:ln/>
+        </p:spPr>
+        <p:txBody>
+          <a:bodyPr wrap="square" lIns="0" tIns="0" rIns="0" bIns="0" rtlCol="0" anchor="ctr"/>
+          <a:lstStyle/>
+          <a:p>
+            <a:pPr indent="0" marL="0">
+              <a:buNone/>
+            </a:pPr>
+            <a:r>
+              <a:rPr lang="en-US" sz="1250" dirty="0">
+                <a:solidFill>
+                  <a:srgbClr val="222A3F"/>
+                </a:solidFill>
+                <a:latin typeface="Arial" pitchFamily="34" charset="0"/>
+                <a:ea typeface="Arial" pitchFamily="34" charset="-122"/>
+                <a:cs typeface="Arial" pitchFamily="34" charset="-120"/>
+              </a:rPr>
+              <a:t>ChUtil stays in single digits with both radios broadcasting</a:t>
+            </a:r>
+            <a:endParaRPr lang="en-US" sz="1250" dirty="0"/>
           </a:p>
         </p:txBody>
       </p:sp>
@@ -9736,7 +11231,7 @@
                 <a:ea typeface="Courier New" pitchFamily="34" charset="-122"/>
                 <a:cs typeface="Courier New" pitchFamily="34" charset="-120"/>
               </a:rPr>
-              <a:t>FRONTEND, PARTNER-READY</a:t>
+              <a:t>PREDICTED LINK CURVE</a:t>
             </a:r>
             <a:endParaRPr lang="en-US" sz="900" dirty="0"/>
           </a:p>
@@ -9775,7 +11270,7 @@
                 <a:ea typeface="Courier New" pitchFamily="34" charset="-122"/>
                 <a:cs typeface="Courier New" pitchFamily="34" charset="-120"/>
               </a:rPr>
-              <a:t>SHEET 06/10  REV D  2026-09-16</a:t>
+              <a:t>SHEET 06/11  REV D  2026-09-16</a:t>
             </a:r>
             <a:endParaRPr lang="en-US" sz="900" dirty="0"/>
           </a:p>
@@ -9800,7 +11295,7 @@
           </a:solidFill>
           <a:ln w="19050">
             <a:solidFill>
-              <a:srgbClr val="6D4BDB"/>
+              <a:srgbClr val="E58E1A"/>
             </a:solidFill>
             <a:prstDash val="solid"/>
           </a:ln>
@@ -9833,13 +11328,13 @@
             <a:r>
               <a:rPr lang="en-US" sz="1100" b="1" dirty="0">
                 <a:solidFill>
-                  <a:srgbClr val="6D4BDB"/>
+                  <a:srgbClr val="E58E1A"/>
                 </a:solidFill>
                 <a:latin typeface="Courier New" pitchFamily="34" charset="0"/>
                 <a:ea typeface="Courier New" pitchFamily="34" charset="-122"/>
                 <a:cs typeface="Courier New" pitchFamily="34" charset="-120"/>
               </a:rPr>
-              <a:t>OWNER: JOSIAH</a:t>
+              <a:t>OWNER: VICTOR</a:t>
             </a:r>
             <a:endParaRPr lang="en-US" sz="1100" dirty="0"/>
           </a:p>
@@ -9878,7 +11373,7 @@
                 <a:ea typeface="Arial" pitchFamily="34" charset="-122"/>
                 <a:cs typeface="Arial" pitchFamily="34" charset="-120"/>
               </a:rPr>
-              <a:t>THE SCREEN IS ALREADY PARTNER-SHAPED</a:t>
+              <a:t>THE PREDICTION THE RANGE TEST WILL JUDGE</a:t>
             </a:r>
             <a:endParaRPr lang="en-US" sz="2300" dirty="0"/>
           </a:p>
@@ -9886,7 +11381,7 @@
       </p:sp>
       <p:pic>
         <p:nvPicPr>
-          <p:cNvPr id="10" name="Image 0" descr="C:/Users/deogr/AppData/Local/Temp/claude/C--Users-deogr-Documents-Fall-Project-Off-Grid-Vehicle-dection-project/e8b2e8fa-1513-4aa8-a8f6-ce4fcd20e664/scratchpad/deck3/p_search.jpg">    </p:cNvPr>
+          <p:cNvPr id="10" name="Image 0" descr="C:/Users/deogr/AppData/Local/Temp/claude/C--Users-deogr-Documents-Fall-Project-Off-Grid-Vehicle-dection-project/e8b2e8fa-1513-4aa8-a8f6-ce4fcd20e664/scratchpad/deck3/g_linkbudget.png">    </p:cNvPr>
           <p:cNvPicPr>
             <a:picLocks noChangeAspect="1"/>
           </p:cNvPicPr>
@@ -9900,8 +11395,8 @@
         </p:blipFill>
         <p:spPr>
           <a:xfrm>
-            <a:off x="457200" y="1143000"/>
-            <a:ext cx="2651760" cy="2084832"/>
+            <a:off x="457200" y="1051560"/>
+            <a:ext cx="6035040" cy="3959352"/>
           </a:xfrm>
           <a:prstGeom prst="rect">
             <a:avLst/>
@@ -9916,8 +11411,8 @@
         </p:nvSpPr>
         <p:spPr>
           <a:xfrm>
-            <a:off x="457200" y="1143000"/>
-            <a:ext cx="2651760" cy="2084832"/>
+            <a:off x="457200" y="1051560"/>
+            <a:ext cx="6035040" cy="3959352"/>
           </a:xfrm>
           <a:prstGeom prst="rect">
             <a:avLst/>
@@ -9938,132 +11433,8 @@
         </p:nvSpPr>
         <p:spPr>
           <a:xfrm>
-            <a:off x="457200" y="3255264"/>
-            <a:ext cx="2651760" cy="274320"/>
-          </a:xfrm>
-          <a:prstGeom prst="rect">
-            <a:avLst/>
-          </a:prstGeom>
-          <a:noFill/>
-          <a:ln/>
-        </p:spPr>
-        <p:txBody>
-          <a:bodyPr wrap="square" lIns="0" tIns="0" rIns="0" bIns="0" rtlCol="0" anchor="ctr"/>
-          <a:lstStyle/>
-          <a:p>
-            <a:pPr algn="ctr" indent="0" marL="0">
-              <a:buNone/>
-            </a:pPr>
-            <a:r>
-              <a:rPr lang="en-US" sz="950" dirty="0">
-                <a:solidFill>
-                  <a:srgbClr val="5E6B85"/>
-                </a:solidFill>
-                <a:latin typeface="Courier New" pitchFamily="34" charset="0"/>
-                <a:ea typeface="Courier New" pitchFamily="34" charset="-122"/>
-                <a:cs typeface="Courier New" pitchFamily="34" charset="-120"/>
-              </a:rPr>
-              <a:t>Today: honest about the gap</a:t>
-            </a:r>
-            <a:endParaRPr lang="en-US" sz="950" dirty="0"/>
-          </a:p>
-        </p:txBody>
-      </p:sp>
-      <p:pic>
-        <p:nvPicPr>
-          <p:cNvPr id="13" name="Image 1" descr="C:/Users/deogr/AppData/Local/Temp/claude/C--Users-deogr-Documents-Fall-Project-Off-Grid-Vehicle-dection-project/e8b2e8fa-1513-4aa8-a8f6-ce4fcd20e664/scratchpad/deck3/p_compass.jpg">    </p:cNvPr>
-          <p:cNvPicPr>
-            <a:picLocks noChangeAspect="1"/>
-          </p:cNvPicPr>
-          <p:nvPr/>
-        </p:nvPicPr>
-        <p:blipFill>
-          <a:blip r:embed="rId2"/>
-          <a:stretch>
-            <a:fillRect/>
-          </a:stretch>
-        </p:blipFill>
-        <p:spPr>
-          <a:xfrm>
-            <a:off x="3383280" y="1143000"/>
-            <a:ext cx="2651760" cy="2185416"/>
-          </a:xfrm>
-          <a:prstGeom prst="rect">
-            <a:avLst/>
-          </a:prstGeom>
-        </p:spPr>
-      </p:pic>
-      <p:sp>
-        <p:nvSpPr>
-          <p:cNvPr id="14" name="Shape 10"/>
-          <p:cNvSpPr/>
-          <p:nvPr/>
-        </p:nvSpPr>
-        <p:spPr>
-          <a:xfrm>
-            <a:off x="3383280" y="1143000"/>
-            <a:ext cx="2651760" cy="2185416"/>
-          </a:xfrm>
-          <a:prstGeom prst="rect">
-            <a:avLst/>
-          </a:prstGeom>
-          <a:ln w="12700">
-            <a:solidFill>
-              <a:srgbClr val="9AA7BE"/>
-            </a:solidFill>
-            <a:prstDash val="solid"/>
-          </a:ln>
-        </p:spPr>
-      </p:sp>
-      <p:sp>
-        <p:nvSpPr>
-          <p:cNvPr id="15" name="Text 11"/>
-          <p:cNvSpPr txBox="1"/>
-          <p:nvPr/>
-        </p:nvSpPr>
-        <p:spPr>
-          <a:xfrm>
-            <a:off x="3383280" y="3355848"/>
-            <a:ext cx="2651760" cy="274320"/>
-          </a:xfrm>
-          <a:prstGeom prst="rect">
-            <a:avLst/>
-          </a:prstGeom>
-          <a:noFill/>
-          <a:ln/>
-        </p:spPr>
-        <p:txBody>
-          <a:bodyPr wrap="square" lIns="0" tIns="0" rIns="0" bIns="0" rtlCol="0" anchor="ctr"/>
-          <a:lstStyle/>
-          <a:p>
-            <a:pPr algn="ctr" indent="0" marL="0">
-              <a:buNone/>
-            </a:pPr>
-            <a:r>
-              <a:rPr lang="en-US" sz="950" dirty="0">
-                <a:solidFill>
-                  <a:srgbClr val="5E6B85"/>
-                </a:solidFill>
-                <a:latin typeface="Courier New" pitchFamily="34" charset="0"/>
-                <a:ea typeface="Courier New" pitchFamily="34" charset="-122"/>
-                <a:cs typeface="Courier New" pitchFamily="34" charset="-120"/>
-              </a:rPr>
-              <a:t>Sim preview: what fills in</a:t>
-            </a:r>
-            <a:endParaRPr lang="en-US" sz="950" dirty="0"/>
-          </a:p>
-        </p:txBody>
-      </p:sp>
-      <p:sp>
-        <p:nvSpPr>
-          <p:cNvPr id="16" name="Text 12"/>
-          <p:cNvSpPr txBox="1"/>
-          <p:nvPr/>
-        </p:nvSpPr>
-        <p:spPr>
-          <a:xfrm>
-            <a:off x="6400800" y="1188720"/>
-            <a:ext cx="5303520" cy="2834640"/>
+            <a:off x="6720840" y="1188720"/>
+            <a:ext cx="4983480" cy="3108960"/>
           </a:xfrm>
           <a:prstGeom prst="rect">
             <a:avLst/>
@@ -10091,7 +11462,7 @@
                 <a:ea typeface="Arial" pitchFamily="34" charset="-122"/>
                 <a:cs typeface="Arial" pitchFamily="34" charset="-120"/>
               </a:rPr>
-              <a:t>Every partner element exists and runs today, exercised for weeks by the simulator and by our own radio's packets: the arrow, the distance, the ages, the banners.</a:t>
+              <a:t>Transmit +22 dBm, 3 dBi at each end, free-space loss at 915 MHz: the solid curve. Terrain and clutter cost more: the dashed band.</a:t>
             </a:r>
             <a:endParaRPr lang="en-US" sz="1250" dirty="0"/>
           </a:p>
@@ -10112,7 +11483,7 @@
                 <a:ea typeface="Arial" pitchFamily="34" charset="-122"/>
                 <a:cs typeface="Arial" pitchFamily="34" charset="-120"/>
               </a:rPr>
-              <a:t>When radio two speaks, node_table stores a second fix and the same rendering draws it. The planned frontend change for that day is zero lines.</a:t>
+              <a:t>The orange line is the wall: -131 dBm, the SF11 sensitivity from the datasheet. Where the band crosses the wall is the range prediction.</a:t>
             </a:r>
             <a:endParaRPr lang="en-US" sz="1250" dirty="0"/>
           </a:p>
@@ -10130,7 +11501,7 @@
                 <a:ea typeface="Arial" pitchFamily="34" charset="-122"/>
                 <a:cs typeface="Arial" pitchFamily="34" charset="-120"/>
               </a:rPr>
-              <a:t>Queued this week instead: partner-selection screen (choose among heard nodes) and night readability with the edge light.</a:t>
+              <a:t>Free space says tens of kilometers; terrain will decide the real number. The range campaign plots measured RSSI points onto this exact chart.</a:t>
             </a:r>
             <a:endParaRPr lang="en-US" sz="1250" dirty="0"/>
           </a:p>
@@ -10138,39 +11509,34 @@
       </p:sp>
       <p:sp>
         <p:nvSpPr>
-          <p:cNvPr id="17" name="Shape 13"/>
+          <p:cNvPr id="13" name="Shape 10"/>
           <p:cNvSpPr/>
           <p:nvPr/>
         </p:nvSpPr>
         <p:spPr>
           <a:xfrm>
-            <a:off x="457200" y="4206240"/>
-            <a:ext cx="11292840" cy="868680"/>
+            <a:off x="6720840" y="4434840"/>
+            <a:ext cx="4983480" cy="1554480"/>
           </a:xfrm>
           <a:prstGeom prst="rect">
             <a:avLst/>
           </a:prstGeom>
           <a:solidFill>
-            <a:srgbClr val="F2F5FA"/>
+            <a:srgbClr val="16213D"/>
           </a:solidFill>
-          <a:ln w="9525">
-            <a:solidFill>
-              <a:srgbClr val="9AA7BE"/>
-            </a:solidFill>
-            <a:prstDash val="solid"/>
-          </a:ln>
-        </p:spPr>
-      </p:sp>
-      <p:sp>
-        <p:nvSpPr>
-          <p:cNvPr id="18" name="Text 14"/>
-          <p:cNvSpPr txBox="1"/>
-          <p:nvPr/>
-        </p:nvSpPr>
-        <p:spPr>
-          <a:xfrm>
-            <a:off x="731520" y="4315968"/>
-            <a:ext cx="10744200" cy="658368"/>
+          <a:ln/>
+        </p:spPr>
+      </p:sp>
+      <p:sp>
+        <p:nvSpPr>
+          <p:cNvPr id="14" name="Text 11"/>
+          <p:cNvSpPr txBox="1"/>
+          <p:nvPr/>
+        </p:nvSpPr>
+        <p:spPr>
+          <a:xfrm>
+            <a:off x="6903720" y="4572000"/>
+            <a:ext cx="4617720" cy="1325880"/>
           </a:xfrm>
           <a:prstGeom prst="rect">
             <a:avLst/>
@@ -10183,53 +11549,53 @@
           <a:lstStyle/>
           <a:p>
             <a:pPr indent="0" marL="0">
-              <a:buNone/>
-            </a:pPr>
-            <a:r>
-              <a:rPr lang="en-US" sz="1250" dirty="0">
-                <a:solidFill>
-                  <a:srgbClr val="222A3F"/>
+              <a:spcAft>
+                <a:spcPts val="500"/>
+              </a:spcAft>
+              <a:buNone/>
+            </a:pPr>
+            <a:r>
+              <a:rPr lang="en-US" sz="1100" b="1" dirty="0">
+                <a:solidFill>
+                  <a:srgbClr val="E58E1A"/>
+                </a:solidFill>
+                <a:latin typeface="Courier New" pitchFamily="34" charset="0"/>
+                <a:ea typeface="Courier New" pitchFamily="34" charset="-122"/>
+                <a:cs typeface="Courier New" pitchFamily="34" charset="-120"/>
+              </a:rPr>
+              <a:t>WHY PUBLISH THE CURVE FIRST</a:t>
+            </a:r>
+            <a:endParaRPr lang="en-US" sz="1200" dirty="0"/>
+          </a:p>
+          <a:p>
+            <a:pPr indent="0" marL="0">
+              <a:buNone/>
+            </a:pPr>
+            <a:r>
+              <a:rPr lang="en-US" sz="1200" dirty="0">
+                <a:solidFill>
+                  <a:srgbClr val="FFFFFF"/>
                 </a:solidFill>
                 <a:latin typeface="Arial" pitchFamily="34" charset="0"/>
                 <a:ea typeface="Arial" pitchFamily="34" charset="-122"/>
                 <a:cs typeface="Arial" pitchFamily="34" charset="-120"/>
               </a:rPr>
-              <a:t>Definition of ready: the UI needs nothing from radio two's arrival except the data itself. That was the point of building on simulated partners from week one.</a:t>
-            </a:r>
-            <a:endParaRPr lang="en-US" sz="1250" dirty="0"/>
-          </a:p>
-        </p:txBody>
-      </p:sp>
-      <p:sp>
-        <p:nvSpPr>
-          <p:cNvPr id="19" name="Shape 15"/>
-          <p:cNvSpPr/>
-          <p:nvPr/>
-        </p:nvSpPr>
-        <p:spPr>
-          <a:xfrm>
-            <a:off x="457200" y="5349240"/>
-            <a:ext cx="11292840" cy="731520"/>
-          </a:xfrm>
-          <a:prstGeom prst="rect">
-            <a:avLst/>
-          </a:prstGeom>
-          <a:solidFill>
-            <a:srgbClr val="16213D"/>
-          </a:solidFill>
-          <a:ln/>
-        </p:spPr>
-      </p:sp>
-      <p:sp>
-        <p:nvSpPr>
-          <p:cNvPr id="20" name="Text 16"/>
-          <p:cNvSpPr txBox="1"/>
-          <p:nvPr/>
-        </p:nvSpPr>
-        <p:spPr>
-          <a:xfrm>
-            <a:off x="731520" y="5440680"/>
-            <a:ext cx="10744200" cy="548640"/>
+              <a:t>A measurement without a prior prediction is a demo. A measurement against a published curve is an experiment. Next review overlays the field points on this figure, wherever they land.</a:t>
+            </a:r>
+            <a:endParaRPr lang="en-US" sz="1200" dirty="0"/>
+          </a:p>
+        </p:txBody>
+      </p:sp>
+      <p:sp>
+        <p:nvSpPr>
+          <p:cNvPr id="15" name="Text 12"/>
+          <p:cNvSpPr txBox="1"/>
+          <p:nvPr/>
+        </p:nvSpPr>
+        <p:spPr>
+          <a:xfrm>
+            <a:off x="457200" y="5138928"/>
+            <a:ext cx="6035040" cy="457200"/>
           </a:xfrm>
           <a:prstGeom prst="rect">
             <a:avLst/>
@@ -10245,17 +11611,17 @@
               <a:buNone/>
             </a:pPr>
             <a:r>
-              <a:rPr lang="en-US" sz="1250" dirty="0">
-                <a:solidFill>
-                  <a:srgbClr val="FFFFFF"/>
-                </a:solidFill>
-                <a:latin typeface="Arial" pitchFamily="34" charset="0"/>
-                <a:ea typeface="Arial" pitchFamily="34" charset="-122"/>
-                <a:cs typeface="Arial" pitchFamily="34" charset="-120"/>
-              </a:rPr>
-              <a:t>The compass photo above is the simulator driving the real display: the partner pipeline, rehearsed nightly for three weeks.</a:t>
-            </a:r>
-            <a:endParaRPr lang="en-US" sz="1250" dirty="0"/>
+              <a:rPr lang="en-US" sz="850" dirty="0">
+                <a:solidFill>
+                  <a:srgbClr val="5E6B85"/>
+                </a:solidFill>
+                <a:latin typeface="Courier New" pitchFamily="34" charset="0"/>
+                <a:ea typeface="Courier New" pitchFamily="34" charset="-122"/>
+                <a:cs typeface="Courier New" pitchFamily="34" charset="-120"/>
+              </a:rPr>
+              <a:t>MODEL: FSPL = 32.45 + 20log(f) + 20log(d) · RSSI = 22 + 3 + 3 - FSPL - terrain   [DS Table 6-1 · AN1200.22 · TELECOM_ANALYSIS.md]</a:t>
+            </a:r>
+            <a:endParaRPr lang="en-US" sz="850" dirty="0"/>
           </a:p>
         </p:txBody>
       </p:sp>
@@ -10408,7 +11774,7 @@
                 <a:ea typeface="Courier New" pitchFamily="34" charset="-122"/>
                 <a:cs typeface="Courier New" pitchFamily="34" charset="-120"/>
               </a:rPr>
-              <a:t>DRIVE-TEST PROTOCOL</a:t>
+              <a:t>FRONTEND, PARTNER-READY</a:t>
             </a:r>
             <a:endParaRPr lang="en-US" sz="900" dirty="0"/>
           </a:p>
@@ -10447,7 +11813,7 @@
                 <a:ea typeface="Courier New" pitchFamily="34" charset="-122"/>
                 <a:cs typeface="Courier New" pitchFamily="34" charset="-120"/>
               </a:rPr>
-              <a:t>SHEET 07/10  REV D  2026-09-16</a:t>
+              <a:t>SHEET 07/11  REV D  2026-09-16</a:t>
             </a:r>
             <a:endParaRPr lang="en-US" sz="900" dirty="0"/>
           </a:p>
@@ -10472,7 +11838,7 @@
           </a:solidFill>
           <a:ln w="19050">
             <a:solidFill>
-              <a:srgbClr val="D9488C"/>
+              <a:srgbClr val="6D4BDB"/>
             </a:solidFill>
             <a:prstDash val="solid"/>
           </a:ln>
@@ -10505,13 +11871,13 @@
             <a:r>
               <a:rPr lang="en-US" sz="1100" b="1" dirty="0">
                 <a:solidFill>
-                  <a:srgbClr val="D9488C"/>
+                  <a:srgbClr val="6D4BDB"/>
                 </a:solidFill>
                 <a:latin typeface="Courier New" pitchFamily="34" charset="0"/>
                 <a:ea typeface="Courier New" pitchFamily="34" charset="-122"/>
                 <a:cs typeface="Courier New" pitchFamily="34" charset="-120"/>
               </a:rPr>
-              <a:t>OWNER: CANNON</a:t>
+              <a:t>OWNER: JOSIAH</a:t>
             </a:r>
             <a:endParaRPr lang="en-US" sz="1100" dirty="0"/>
           </a:p>
@@ -10550,32 +11916,53 @@
                 <a:ea typeface="Arial" pitchFamily="34" charset="-122"/>
                 <a:cs typeface="Arial" pitchFamily="34" charset="-120"/>
               </a:rPr>
-              <a:t>DRIVE-TEST PROTOCOL, VERSION ONE</a:t>
+              <a:t>THE SCREEN IS ALREADY PARTNER-SHAPED</a:t>
             </a:r>
             <a:endParaRPr lang="en-US" sz="2300" dirty="0"/>
           </a:p>
         </p:txBody>
       </p:sp>
-      <p:sp>
-        <p:nvSpPr>
-          <p:cNvPr id="10" name="Shape 8"/>
+      <p:pic>
+        <p:nvPicPr>
+          <p:cNvPr id="10" name="Image 0" descr="C:/Users/deogr/AppData/Local/Temp/claude/C--Users-deogr-Documents-Fall-Project-Off-Grid-Vehicle-dection-project/e8b2e8fa-1513-4aa8-a8f6-ce4fcd20e664/scratchpad/deck3/p_search.jpg">    </p:cNvPr>
+          <p:cNvPicPr>
+            <a:picLocks noChangeAspect="1"/>
+          </p:cNvPicPr>
+          <p:nvPr/>
+        </p:nvPicPr>
+        <p:blipFill>
+          <a:blip r:embed="rId1"/>
+          <a:stretch>
+            <a:fillRect/>
+          </a:stretch>
+        </p:blipFill>
+        <p:spPr>
+          <a:xfrm>
+            <a:off x="457200" y="1143000"/>
+            <a:ext cx="2651760" cy="2084832"/>
+          </a:xfrm>
+          <a:prstGeom prst="rect">
+            <a:avLst/>
+          </a:prstGeom>
+        </p:spPr>
+      </p:pic>
+      <p:sp>
+        <p:nvSpPr>
+          <p:cNvPr id="11" name="Shape 8"/>
           <p:cNvSpPr/>
           <p:nvPr/>
         </p:nvSpPr>
         <p:spPr>
           <a:xfrm>
             <a:off x="457200" y="1143000"/>
-            <a:ext cx="7863840" cy="804672"/>
-          </a:xfrm>
-          <a:prstGeom prst="rect">
-            <a:avLst/>
-          </a:prstGeom>
-          <a:solidFill>
-            <a:srgbClr val="F2F5FA"/>
-          </a:solidFill>
-          <a:ln w="15875">
+            <a:ext cx="2651760" cy="2084832"/>
+          </a:xfrm>
+          <a:prstGeom prst="rect">
+            <a:avLst/>
+          </a:prstGeom>
+          <a:ln w="12700">
             <a:solidFill>
-              <a:srgbClr val="D9488C"/>
+              <a:srgbClr val="9AA7BE"/>
             </a:solidFill>
             <a:prstDash val="solid"/>
           </a:ln>
@@ -10583,69 +11970,158 @@
       </p:sp>
       <p:sp>
         <p:nvSpPr>
-          <p:cNvPr id="11" name="Text 9"/>
-          <p:cNvSpPr txBox="1"/>
-          <p:nvPr/>
-        </p:nvSpPr>
-        <p:spPr>
-          <a:xfrm>
-            <a:off x="621792" y="1197864"/>
-            <a:ext cx="1920240" cy="274320"/>
-          </a:xfrm>
-          <a:prstGeom prst="rect">
-            <a:avLst/>
-          </a:prstGeom>
-          <a:noFill/>
-          <a:ln/>
-        </p:spPr>
-        <p:txBody>
-          <a:bodyPr wrap="square" lIns="0" tIns="0" rIns="0" bIns="0" rtlCol="0" anchor="ctr"/>
-          <a:lstStyle/>
-          <a:p>
-            <a:pPr indent="0" marL="0">
-              <a:buNone/>
-            </a:pPr>
-            <a:r>
-              <a:rPr lang="en-US" sz="1100" b="1" dirty="0">
-                <a:solidFill>
-                  <a:srgbClr val="D9488C"/>
+          <p:cNvPr id="12" name="Text 9"/>
+          <p:cNvSpPr txBox="1"/>
+          <p:nvPr/>
+        </p:nvSpPr>
+        <p:spPr>
+          <a:xfrm>
+            <a:off x="457200" y="3255264"/>
+            <a:ext cx="2651760" cy="274320"/>
+          </a:xfrm>
+          <a:prstGeom prst="rect">
+            <a:avLst/>
+          </a:prstGeom>
+          <a:noFill/>
+          <a:ln/>
+        </p:spPr>
+        <p:txBody>
+          <a:bodyPr wrap="square" lIns="0" tIns="0" rIns="0" bIns="0" rtlCol="0" anchor="ctr"/>
+          <a:lstStyle/>
+          <a:p>
+            <a:pPr algn="ctr" indent="0" marL="0">
+              <a:buNone/>
+            </a:pPr>
+            <a:r>
+              <a:rPr lang="en-US" sz="950" dirty="0">
+                <a:solidFill>
+                  <a:srgbClr val="5E6B85"/>
                 </a:solidFill>
                 <a:latin typeface="Courier New" pitchFamily="34" charset="0"/>
                 <a:ea typeface="Courier New" pitchFamily="34" charset="-122"/>
                 <a:cs typeface="Courier New" pitchFamily="34" charset="-120"/>
               </a:rPr>
-              <a:t>P0  BENCH</a:t>
-            </a:r>
-            <a:endParaRPr lang="en-US" sz="1100" dirty="0"/>
-          </a:p>
-        </p:txBody>
-      </p:sp>
-      <p:sp>
-        <p:nvSpPr>
-          <p:cNvPr id="12" name="Text 10"/>
-          <p:cNvSpPr txBox="1"/>
-          <p:nvPr/>
-        </p:nvSpPr>
-        <p:spPr>
-          <a:xfrm>
-            <a:off x="621792" y="1472184"/>
-            <a:ext cx="7543800" cy="457200"/>
-          </a:xfrm>
-          <a:prstGeom prst="rect">
-            <a:avLst/>
-          </a:prstGeom>
-          <a:noFill/>
-          <a:ln/>
-        </p:spPr>
-        <p:txBody>
-          <a:bodyPr wrap="square" lIns="0" tIns="0" rIns="0" bIns="0" rtlCol="0" anchor="ctr"/>
-          <a:lstStyle/>
-          <a:p>
-            <a:pPr indent="0" marL="0">
-              <a:buNone/>
-            </a:pPr>
-            <a:r>
-              <a:rPr lang="en-US" sz="1100" dirty="0">
+              <a:t>Today: honest about the gap</a:t>
+            </a:r>
+            <a:endParaRPr lang="en-US" sz="950" dirty="0"/>
+          </a:p>
+        </p:txBody>
+      </p:sp>
+      <p:pic>
+        <p:nvPicPr>
+          <p:cNvPr id="13" name="Image 1" descr="C:/Users/deogr/AppData/Local/Temp/claude/C--Users-deogr-Documents-Fall-Project-Off-Grid-Vehicle-dection-project/e8b2e8fa-1513-4aa8-a8f6-ce4fcd20e664/scratchpad/deck3/p_compass.jpg">    </p:cNvPr>
+          <p:cNvPicPr>
+            <a:picLocks noChangeAspect="1"/>
+          </p:cNvPicPr>
+          <p:nvPr/>
+        </p:nvPicPr>
+        <p:blipFill>
+          <a:blip r:embed="rId2"/>
+          <a:stretch>
+            <a:fillRect/>
+          </a:stretch>
+        </p:blipFill>
+        <p:spPr>
+          <a:xfrm>
+            <a:off x="3383280" y="1143000"/>
+            <a:ext cx="2651760" cy="2185416"/>
+          </a:xfrm>
+          <a:prstGeom prst="rect">
+            <a:avLst/>
+          </a:prstGeom>
+        </p:spPr>
+      </p:pic>
+      <p:sp>
+        <p:nvSpPr>
+          <p:cNvPr id="14" name="Shape 10"/>
+          <p:cNvSpPr/>
+          <p:nvPr/>
+        </p:nvSpPr>
+        <p:spPr>
+          <a:xfrm>
+            <a:off x="3383280" y="1143000"/>
+            <a:ext cx="2651760" cy="2185416"/>
+          </a:xfrm>
+          <a:prstGeom prst="rect">
+            <a:avLst/>
+          </a:prstGeom>
+          <a:ln w="12700">
+            <a:solidFill>
+              <a:srgbClr val="9AA7BE"/>
+            </a:solidFill>
+            <a:prstDash val="solid"/>
+          </a:ln>
+        </p:spPr>
+      </p:sp>
+      <p:sp>
+        <p:nvSpPr>
+          <p:cNvPr id="15" name="Text 11"/>
+          <p:cNvSpPr txBox="1"/>
+          <p:nvPr/>
+        </p:nvSpPr>
+        <p:spPr>
+          <a:xfrm>
+            <a:off x="3383280" y="3355848"/>
+            <a:ext cx="2651760" cy="274320"/>
+          </a:xfrm>
+          <a:prstGeom prst="rect">
+            <a:avLst/>
+          </a:prstGeom>
+          <a:noFill/>
+          <a:ln/>
+        </p:spPr>
+        <p:txBody>
+          <a:bodyPr wrap="square" lIns="0" tIns="0" rIns="0" bIns="0" rtlCol="0" anchor="ctr"/>
+          <a:lstStyle/>
+          <a:p>
+            <a:pPr algn="ctr" indent="0" marL="0">
+              <a:buNone/>
+            </a:pPr>
+            <a:r>
+              <a:rPr lang="en-US" sz="950" dirty="0">
+                <a:solidFill>
+                  <a:srgbClr val="5E6B85"/>
+                </a:solidFill>
+                <a:latin typeface="Courier New" pitchFamily="34" charset="0"/>
+                <a:ea typeface="Courier New" pitchFamily="34" charset="-122"/>
+                <a:cs typeface="Courier New" pitchFamily="34" charset="-120"/>
+              </a:rPr>
+              <a:t>Sim preview: what fills in</a:t>
+            </a:r>
+            <a:endParaRPr lang="en-US" sz="950" dirty="0"/>
+          </a:p>
+        </p:txBody>
+      </p:sp>
+      <p:sp>
+        <p:nvSpPr>
+          <p:cNvPr id="16" name="Text 12"/>
+          <p:cNvSpPr txBox="1"/>
+          <p:nvPr/>
+        </p:nvSpPr>
+        <p:spPr>
+          <a:xfrm>
+            <a:off x="6400800" y="1188720"/>
+            <a:ext cx="5303520" cy="2834640"/>
+          </a:xfrm>
+          <a:prstGeom prst="rect">
+            <a:avLst/>
+          </a:prstGeom>
+          <a:noFill/>
+          <a:ln/>
+        </p:spPr>
+        <p:txBody>
+          <a:bodyPr wrap="square" lIns="0" tIns="0" rIns="0" bIns="0" rtlCol="0" anchor="ctr"/>
+          <a:lstStyle/>
+          <a:p>
+            <a:pPr marL="342900" indent="-342900">
+              <a:spcAft>
+                <a:spcPts val="600"/>
+              </a:spcAft>
+              <a:buSzPct val="100000"/>
+              <a:buChar char="▪"/>
+            </a:pPr>
+            <a:r>
+              <a:rPr lang="en-US" sz="1250" dirty="0">
                 <a:solidFill>
                   <a:srgbClr val="222A3F"/>
                 </a:solidFill>
@@ -10653,126 +12129,20 @@
                 <a:ea typeface="Arial" pitchFamily="34" charset="-122"/>
                 <a:cs typeface="Arial" pitchFamily="34" charset="-120"/>
               </a:rPr>
-              <a:t>both radios on one desk: acceptance criteria 1 to 4 from sheet 04, thirty minutes of soak, zero drops expected</a:t>
-            </a:r>
-            <a:endParaRPr lang="en-US" sz="1100" dirty="0"/>
-          </a:p>
-        </p:txBody>
-      </p:sp>
-      <p:sp>
-        <p:nvSpPr>
-          <p:cNvPr id="13" name="Shape 11"/>
-          <p:cNvSpPr/>
-          <p:nvPr/>
-        </p:nvSpPr>
-        <p:spPr>
-          <a:xfrm>
-            <a:off x="914400" y="1947672"/>
-            <a:ext cx="0" cy="128016"/>
-          </a:xfrm>
-          <a:prstGeom prst="line">
-            <a:avLst/>
-          </a:prstGeom>
-          <a:noFill/>
-          <a:ln w="28575">
-            <a:solidFill>
-              <a:srgbClr val="D9488C"/>
-            </a:solidFill>
-            <a:prstDash val="solid"/>
-            <a:tailEnd type="triangle"/>
-          </a:ln>
-        </p:spPr>
-      </p:sp>
-      <p:sp>
-        <p:nvSpPr>
-          <p:cNvPr id="14" name="Shape 12"/>
-          <p:cNvSpPr/>
-          <p:nvPr/>
-        </p:nvSpPr>
-        <p:spPr>
-          <a:xfrm>
-            <a:off x="457200" y="2075688"/>
-            <a:ext cx="7863840" cy="804672"/>
-          </a:xfrm>
-          <a:prstGeom prst="rect">
-            <a:avLst/>
-          </a:prstGeom>
-          <a:solidFill>
-            <a:srgbClr val="F2F5FA"/>
-          </a:solidFill>
-          <a:ln w="15875">
-            <a:solidFill>
-              <a:srgbClr val="D9488C"/>
-            </a:solidFill>
-            <a:prstDash val="solid"/>
-          </a:ln>
-        </p:spPr>
-      </p:sp>
-      <p:sp>
-        <p:nvSpPr>
-          <p:cNvPr id="15" name="Text 13"/>
-          <p:cNvSpPr txBox="1"/>
-          <p:nvPr/>
-        </p:nvSpPr>
-        <p:spPr>
-          <a:xfrm>
-            <a:off x="621792" y="2130552"/>
-            <a:ext cx="1920240" cy="274320"/>
-          </a:xfrm>
-          <a:prstGeom prst="rect">
-            <a:avLst/>
-          </a:prstGeom>
-          <a:noFill/>
-          <a:ln/>
-        </p:spPr>
-        <p:txBody>
-          <a:bodyPr wrap="square" lIns="0" tIns="0" rIns="0" bIns="0" rtlCol="0" anchor="ctr"/>
-          <a:lstStyle/>
-          <a:p>
-            <a:pPr indent="0" marL="0">
-              <a:buNone/>
-            </a:pPr>
-            <a:r>
-              <a:rPr lang="en-US" sz="1100" b="1" dirty="0">
-                <a:solidFill>
-                  <a:srgbClr val="D9488C"/>
-                </a:solidFill>
-                <a:latin typeface="Courier New" pitchFamily="34" charset="0"/>
-                <a:ea typeface="Courier New" pitchFamily="34" charset="-122"/>
-                <a:cs typeface="Courier New" pitchFamily="34" charset="-120"/>
-              </a:rPr>
-              <a:t>P1  STATIC RANGE</a:t>
-            </a:r>
-            <a:endParaRPr lang="en-US" sz="1100" dirty="0"/>
-          </a:p>
-        </p:txBody>
-      </p:sp>
-      <p:sp>
-        <p:nvSpPr>
-          <p:cNvPr id="16" name="Text 14"/>
-          <p:cNvSpPr txBox="1"/>
-          <p:nvPr/>
-        </p:nvSpPr>
-        <p:spPr>
-          <a:xfrm>
-            <a:off x="621792" y="2404872"/>
-            <a:ext cx="7543800" cy="457200"/>
-          </a:xfrm>
-          <a:prstGeom prst="rect">
-            <a:avLst/>
-          </a:prstGeom>
-          <a:noFill/>
-          <a:ln/>
-        </p:spPr>
-        <p:txBody>
-          <a:bodyPr wrap="square" lIns="0" tIns="0" rIns="0" bIns="0" rtlCol="0" anchor="ctr"/>
-          <a:lstStyle/>
-          <a:p>
-            <a:pPr indent="0" marL="0">
-              <a:buNone/>
-            </a:pPr>
-            <a:r>
-              <a:rPr lang="en-US" sz="1100" dirty="0">
+              <a:t>Every partner element exists and runs today, exercised for weeks by the simulator and by our own radio's packets: the arrow, the distance, the ages, the banners.</a:t>
+            </a:r>
+            <a:endParaRPr lang="en-US" sz="1250" dirty="0"/>
+          </a:p>
+          <a:p>
+            <a:pPr marL="342900" indent="-342900">
+              <a:spcAft>
+                <a:spcPts val="600"/>
+              </a:spcAft>
+              <a:buSzPct val="100000"/>
+              <a:buChar char="▪"/>
+            </a:pPr>
+            <a:r>
+              <a:rPr lang="en-US" sz="1250" dirty="0">
                 <a:solidFill>
                   <a:srgbClr val="222A3F"/>
                 </a:solidFill>
@@ -10780,126 +12150,17 @@
                 <a:ea typeface="Arial" pitchFamily="34" charset="-122"/>
                 <a:cs typeface="Arial" pitchFamily="34" charset="-120"/>
               </a:rPr>
-              <a:t>one radio fixed, one carried: log RSSI and SNR at marked distances until packets stop; plot onto sheet 05</a:t>
-            </a:r>
-            <a:endParaRPr lang="en-US" sz="1100" dirty="0"/>
-          </a:p>
-        </p:txBody>
-      </p:sp>
-      <p:sp>
-        <p:nvSpPr>
-          <p:cNvPr id="17" name="Shape 15"/>
-          <p:cNvSpPr/>
-          <p:nvPr/>
-        </p:nvSpPr>
-        <p:spPr>
-          <a:xfrm>
-            <a:off x="914400" y="2880360"/>
-            <a:ext cx="0" cy="128016"/>
-          </a:xfrm>
-          <a:prstGeom prst="line">
-            <a:avLst/>
-          </a:prstGeom>
-          <a:noFill/>
-          <a:ln w="28575">
-            <a:solidFill>
-              <a:srgbClr val="D9488C"/>
-            </a:solidFill>
-            <a:prstDash val="solid"/>
-            <a:tailEnd type="triangle"/>
-          </a:ln>
-        </p:spPr>
-      </p:sp>
-      <p:sp>
-        <p:nvSpPr>
-          <p:cNvPr id="18" name="Shape 16"/>
-          <p:cNvSpPr/>
-          <p:nvPr/>
-        </p:nvSpPr>
-        <p:spPr>
-          <a:xfrm>
-            <a:off x="457200" y="3008376"/>
-            <a:ext cx="7863840" cy="804672"/>
-          </a:xfrm>
-          <a:prstGeom prst="rect">
-            <a:avLst/>
-          </a:prstGeom>
-          <a:solidFill>
-            <a:srgbClr val="F2F5FA"/>
-          </a:solidFill>
-          <a:ln w="15875">
-            <a:solidFill>
-              <a:srgbClr val="D9488C"/>
-            </a:solidFill>
-            <a:prstDash val="solid"/>
-          </a:ln>
-        </p:spPr>
-      </p:sp>
-      <p:sp>
-        <p:nvSpPr>
-          <p:cNvPr id="19" name="Text 17"/>
-          <p:cNvSpPr txBox="1"/>
-          <p:nvPr/>
-        </p:nvSpPr>
-        <p:spPr>
-          <a:xfrm>
-            <a:off x="621792" y="3063240"/>
-            <a:ext cx="1920240" cy="274320"/>
-          </a:xfrm>
-          <a:prstGeom prst="rect">
-            <a:avLst/>
-          </a:prstGeom>
-          <a:noFill/>
-          <a:ln/>
-        </p:spPr>
-        <p:txBody>
-          <a:bodyPr wrap="square" lIns="0" tIns="0" rIns="0" bIns="0" rtlCol="0" anchor="ctr"/>
-          <a:lstStyle/>
-          <a:p>
-            <a:pPr indent="0" marL="0">
-              <a:buNone/>
-            </a:pPr>
-            <a:r>
-              <a:rPr lang="en-US" sz="1100" b="1" dirty="0">
-                <a:solidFill>
-                  <a:srgbClr val="D9488C"/>
-                </a:solidFill>
-                <a:latin typeface="Courier New" pitchFamily="34" charset="0"/>
-                <a:ea typeface="Courier New" pitchFamily="34" charset="-122"/>
-                <a:cs typeface="Courier New" pitchFamily="34" charset="-120"/>
-              </a:rPr>
-              <a:t>P2  TWO-VEHICLE DRIVE</a:t>
-            </a:r>
-            <a:endParaRPr lang="en-US" sz="1100" dirty="0"/>
-          </a:p>
-        </p:txBody>
-      </p:sp>
-      <p:sp>
-        <p:nvSpPr>
-          <p:cNvPr id="20" name="Text 18"/>
-          <p:cNvSpPr txBox="1"/>
-          <p:nvPr/>
-        </p:nvSpPr>
-        <p:spPr>
-          <a:xfrm>
-            <a:off x="621792" y="3337560"/>
-            <a:ext cx="7543800" cy="457200"/>
-          </a:xfrm>
-          <a:prstGeom prst="rect">
-            <a:avLst/>
-          </a:prstGeom>
-          <a:noFill/>
-          <a:ln/>
-        </p:spPr>
-        <p:txBody>
-          <a:bodyPr wrap="square" lIns="0" tIns="0" rIns="0" bIns="0" rtlCol="0" anchor="ctr"/>
-          <a:lstStyle/>
-          <a:p>
-            <a:pPr indent="0" marL="0">
-              <a:buNone/>
-            </a:pPr>
-            <a:r>
-              <a:rPr lang="en-US" sz="1100" dirty="0">
+              <a:t>When radio two speaks, node_table stores a second fix and the same rendering draws it. The planned frontend change for that day is zero lines.</a:t>
+            </a:r>
+            <a:endParaRPr lang="en-US" sz="1250" dirty="0"/>
+          </a:p>
+          <a:p>
+            <a:pPr marL="342900" indent="-342900">
+              <a:buSzPct val="100000"/>
+              <a:buChar char="▪"/>
+            </a:pPr>
+            <a:r>
+              <a:rPr lang="en-US" sz="1250" dirty="0">
                 <a:solidFill>
                   <a:srgbClr val="222A3F"/>
                 </a:solidFill>
@@ -10907,353 +12168,22 @@
                 <a:ea typeface="Arial" pitchFamily="34" charset="-122"/>
                 <a:cs typeface="Arial" pitchFamily="34" charset="-120"/>
               </a:rPr>
-              <a:t>city loop then open road: PTR row live, ages under 15 s while moving, arrow tracks the real partner</a:t>
-            </a:r>
-            <a:endParaRPr lang="en-US" sz="1100" dirty="0"/>
-          </a:p>
-        </p:txBody>
-      </p:sp>
-      <p:sp>
-        <p:nvSpPr>
-          <p:cNvPr id="21" name="Shape 19"/>
+              <a:t>Queued this week instead: partner-selection screen (choose among heard nodes) and night readability with the edge light.</a:t>
+            </a:r>
+            <a:endParaRPr lang="en-US" sz="1250" dirty="0"/>
+          </a:p>
+        </p:txBody>
+      </p:sp>
+      <p:sp>
+        <p:nvSpPr>
+          <p:cNvPr id="17" name="Shape 13"/>
           <p:cNvSpPr/>
           <p:nvPr/>
         </p:nvSpPr>
         <p:spPr>
           <a:xfrm>
-            <a:off x="914400" y="3813048"/>
-            <a:ext cx="0" cy="128016"/>
-          </a:xfrm>
-          <a:prstGeom prst="line">
-            <a:avLst/>
-          </a:prstGeom>
-          <a:noFill/>
-          <a:ln w="28575">
-            <a:solidFill>
-              <a:srgbClr val="D9488C"/>
-            </a:solidFill>
-            <a:prstDash val="solid"/>
-            <a:tailEnd type="triangle"/>
-          </a:ln>
-        </p:spPr>
-      </p:sp>
-      <p:sp>
-        <p:nvSpPr>
-          <p:cNvPr id="22" name="Shape 20"/>
-          <p:cNvSpPr/>
-          <p:nvPr/>
-        </p:nvSpPr>
-        <p:spPr>
-          <a:xfrm>
-            <a:off x="457200" y="3941064"/>
-            <a:ext cx="7863840" cy="804672"/>
-          </a:xfrm>
-          <a:prstGeom prst="rect">
-            <a:avLst/>
-          </a:prstGeom>
-          <a:solidFill>
-            <a:srgbClr val="F2F5FA"/>
-          </a:solidFill>
-          <a:ln w="15875">
-            <a:solidFill>
-              <a:srgbClr val="D9488C"/>
-            </a:solidFill>
-            <a:prstDash val="solid"/>
-          </a:ln>
-        </p:spPr>
-      </p:sp>
-      <p:sp>
-        <p:nvSpPr>
-          <p:cNvPr id="23" name="Text 21"/>
-          <p:cNvSpPr txBox="1"/>
-          <p:nvPr/>
-        </p:nvSpPr>
-        <p:spPr>
-          <a:xfrm>
-            <a:off x="621792" y="3995928"/>
-            <a:ext cx="1920240" cy="274320"/>
-          </a:xfrm>
-          <a:prstGeom prst="rect">
-            <a:avLst/>
-          </a:prstGeom>
-          <a:noFill/>
-          <a:ln/>
-        </p:spPr>
-        <p:txBody>
-          <a:bodyPr wrap="square" lIns="0" tIns="0" rIns="0" bIns="0" rtlCol="0" anchor="ctr"/>
-          <a:lstStyle/>
-          <a:p>
-            <a:pPr indent="0" marL="0">
-              <a:buNone/>
-            </a:pPr>
-            <a:r>
-              <a:rPr lang="en-US" sz="1100" b="1" dirty="0">
-                <a:solidFill>
-                  <a:srgbClr val="D9488C"/>
-                </a:solidFill>
-                <a:latin typeface="Courier New" pitchFamily="34" charset="0"/>
-                <a:ea typeface="Courier New" pitchFamily="34" charset="-122"/>
-                <a:cs typeface="Courier New" pitchFamily="34" charset="-120"/>
-              </a:rPr>
-              <a:t>P3  EDGE CASES</a:t>
-            </a:r>
-            <a:endParaRPr lang="en-US" sz="1100" dirty="0"/>
-          </a:p>
-        </p:txBody>
-      </p:sp>
-      <p:sp>
-        <p:nvSpPr>
-          <p:cNvPr id="24" name="Text 22"/>
-          <p:cNvSpPr txBox="1"/>
-          <p:nvPr/>
-        </p:nvSpPr>
-        <p:spPr>
-          <a:xfrm>
-            <a:off x="621792" y="4270248"/>
-            <a:ext cx="7543800" cy="457200"/>
-          </a:xfrm>
-          <a:prstGeom prst="rect">
-            <a:avLst/>
-          </a:prstGeom>
-          <a:noFill/>
-          <a:ln/>
-        </p:spPr>
-        <p:txBody>
-          <a:bodyPr wrap="square" lIns="0" tIns="0" rIns="0" bIns="0" rtlCol="0" anchor="ctr"/>
-          <a:lstStyle/>
-          <a:p>
-            <a:pPr indent="0" marL="0">
-              <a:buNone/>
-            </a:pPr>
-            <a:r>
-              <a:rPr lang="en-US" sz="1100" dirty="0">
-                <a:solidFill>
-                  <a:srgbClr val="222A3F"/>
-                </a:solidFill>
-                <a:latin typeface="Arial" pitchFamily="34" charset="0"/>
-                <a:ea typeface="Arial" pitchFamily="34" charset="-122"/>
-                <a:cs typeface="Arial" pitchFamily="34" charset="-120"/>
-              </a:rPr>
-              <a:t>canyon streets, garage exit, one vehicle parked with no sky: ghosts must age honestly, links must self-heal</a:t>
-            </a:r>
-            <a:endParaRPr lang="en-US" sz="1100" dirty="0"/>
-          </a:p>
-        </p:txBody>
-      </p:sp>
-      <p:sp>
-        <p:nvSpPr>
-          <p:cNvPr id="25" name="Shape 23"/>
-          <p:cNvSpPr/>
-          <p:nvPr/>
-        </p:nvSpPr>
-        <p:spPr>
-          <a:xfrm>
-            <a:off x="8549640" y="1143000"/>
-            <a:ext cx="3200400" cy="3657600"/>
-          </a:xfrm>
-          <a:prstGeom prst="rect">
-            <a:avLst/>
-          </a:prstGeom>
-          <a:solidFill>
-            <a:srgbClr val="FFFFFF"/>
-          </a:solidFill>
-          <a:ln w="15875">
-            <a:solidFill>
-              <a:srgbClr val="16213D"/>
-            </a:solidFill>
-            <a:prstDash val="solid"/>
-          </a:ln>
-        </p:spPr>
-      </p:sp>
-      <p:sp>
-        <p:nvSpPr>
-          <p:cNvPr id="26" name="Text 24"/>
-          <p:cNvSpPr txBox="1"/>
-          <p:nvPr/>
-        </p:nvSpPr>
-        <p:spPr>
-          <a:xfrm>
-            <a:off x="8732520" y="1298448"/>
-            <a:ext cx="2834640" cy="3383280"/>
-          </a:xfrm>
-          <a:prstGeom prst="rect">
-            <a:avLst/>
-          </a:prstGeom>
-          <a:noFill/>
-          <a:ln/>
-        </p:spPr>
-        <p:txBody>
-          <a:bodyPr wrap="square" lIns="0" tIns="0" rIns="0" bIns="0" rtlCol="0" anchor="ctr"/>
-          <a:lstStyle/>
-          <a:p>
-            <a:pPr indent="0" marL="0">
-              <a:spcAft>
-                <a:spcPts val="600"/>
-              </a:spcAft>
-              <a:buNone/>
-            </a:pPr>
-            <a:r>
-              <a:rPr lang="en-US" sz="1100" b="1" dirty="0">
-                <a:solidFill>
-                  <a:srgbClr val="16213D"/>
-                </a:solidFill>
-                <a:latin typeface="Courier New" pitchFamily="34" charset="0"/>
-                <a:ea typeface="Courier New" pitchFamily="34" charset="-122"/>
-                <a:cs typeface="Courier New" pitchFamily="34" charset="-120"/>
-              </a:rPr>
-              <a:t>LOGGED PER PACKET</a:t>
-            </a:r>
-            <a:endParaRPr lang="en-US" sz="1100" dirty="0"/>
-          </a:p>
-          <a:p>
-            <a:pPr indent="0" marL="0">
-              <a:spcAft>
-                <a:spcPts val="600"/>
-              </a:spcAft>
-              <a:buNone/>
-            </a:pPr>
-            <a:r>
-              <a:rPr lang="en-US" sz="1100" dirty="0">
-                <a:solidFill>
-                  <a:srgbClr val="222A3F"/>
-                </a:solidFill>
-                <a:latin typeface="Courier New" pitchFamily="34" charset="0"/>
-                <a:ea typeface="Courier New" pitchFamily="34" charset="-122"/>
-                <a:cs typeface="Courier New" pitchFamily="34" charset="-120"/>
-              </a:rPr>
-              <a:t>timestamp</a:t>
-            </a:r>
-            <a:endParaRPr lang="en-US" sz="1100" dirty="0"/>
-          </a:p>
-          <a:p>
-            <a:pPr indent="0" marL="0">
-              <a:spcAft>
-                <a:spcPts val="600"/>
-              </a:spcAft>
-              <a:buNone/>
-            </a:pPr>
-            <a:r>
-              <a:rPr lang="en-US" sz="1100" dirty="0">
-                <a:solidFill>
-                  <a:srgbClr val="222A3F"/>
-                </a:solidFill>
-                <a:latin typeface="Courier New" pitchFamily="34" charset="0"/>
-                <a:ea typeface="Courier New" pitchFamily="34" charset="-122"/>
-                <a:cs typeface="Courier New" pitchFamily="34" charset="-120"/>
-              </a:rPr>
-              <a:t>node id</a:t>
-            </a:r>
-            <a:endParaRPr lang="en-US" sz="1100" dirty="0"/>
-          </a:p>
-          <a:p>
-            <a:pPr indent="0" marL="0">
-              <a:spcAft>
-                <a:spcPts val="600"/>
-              </a:spcAft>
-              <a:buNone/>
-            </a:pPr>
-            <a:r>
-              <a:rPr lang="en-US" sz="1100" dirty="0">
-                <a:solidFill>
-                  <a:srgbClr val="222A3F"/>
-                </a:solidFill>
-                <a:latin typeface="Courier New" pitchFamily="34" charset="0"/>
-                <a:ea typeface="Courier New" pitchFamily="34" charset="-122"/>
-                <a:cs typeface="Courier New" pitchFamily="34" charset="-120"/>
-              </a:rPr>
-              <a:t>RSSI  [dBm]</a:t>
-            </a:r>
-            <a:endParaRPr lang="en-US" sz="1100" dirty="0"/>
-          </a:p>
-          <a:p>
-            <a:pPr indent="0" marL="0">
-              <a:spcAft>
-                <a:spcPts val="600"/>
-              </a:spcAft>
-              <a:buNone/>
-            </a:pPr>
-            <a:r>
-              <a:rPr lang="en-US" sz="1100" dirty="0">
-                <a:solidFill>
-                  <a:srgbClr val="222A3F"/>
-                </a:solidFill>
-                <a:latin typeface="Courier New" pitchFamily="34" charset="0"/>
-                <a:ea typeface="Courier New" pitchFamily="34" charset="-122"/>
-                <a:cs typeface="Courier New" pitchFamily="34" charset="-120"/>
-              </a:rPr>
-              <a:t>SNR   [dB]</a:t>
-            </a:r>
-            <a:endParaRPr lang="en-US" sz="1100" dirty="0"/>
-          </a:p>
-          <a:p>
-            <a:pPr indent="0" marL="0">
-              <a:spcAft>
-                <a:spcPts val="600"/>
-              </a:spcAft>
-              <a:buNone/>
-            </a:pPr>
-            <a:r>
-              <a:rPr lang="en-US" sz="1100" dirty="0">
-                <a:solidFill>
-                  <a:srgbClr val="222A3F"/>
-                </a:solidFill>
-                <a:latin typeface="Courier New" pitchFamily="34" charset="0"/>
-                <a:ea typeface="Courier New" pitchFamily="34" charset="-122"/>
-                <a:cs typeface="Courier New" pitchFamily="34" charset="-120"/>
-              </a:rPr>
-              <a:t>distance at receipt</a:t>
-            </a:r>
-            <a:endParaRPr lang="en-US" sz="1100" dirty="0"/>
-          </a:p>
-          <a:p>
-            <a:pPr indent="0" marL="0">
-              <a:spcAft>
-                <a:spcPts val="600"/>
-              </a:spcAft>
-              <a:buNone/>
-            </a:pPr>
-            <a:r>
-              <a:rPr lang="en-US" sz="1100" dirty="0">
-                <a:solidFill>
-                  <a:srgbClr val="222A3F"/>
-                </a:solidFill>
-                <a:latin typeface="Courier New" pitchFamily="34" charset="0"/>
-                <a:ea typeface="Courier New" pitchFamily="34" charset="-122"/>
-                <a:cs typeface="Courier New" pitchFamily="34" charset="-120"/>
-              </a:rPr>
-              <a:t>age when displayed</a:t>
-            </a:r>
-            <a:endParaRPr lang="en-US" sz="1100" dirty="0"/>
-          </a:p>
-          <a:p>
-            <a:pPr indent="0" marL="0">
-              <a:buNone/>
-            </a:pPr>
-            <a:r>
-              <a:rPr lang="en-US" sz="1050" dirty="0">
-                <a:solidFill>
-                  <a:srgbClr val="5E6B85"/>
-                </a:solidFill>
-                <a:latin typeface="Arial" pitchFamily="34" charset="0"/>
-                <a:ea typeface="Arial" pitchFamily="34" charset="-122"/>
-                <a:cs typeface="Arial" pitchFamily="34" charset="-120"/>
-              </a:rPr>
-              <a:t>Harness: serial capture on the display side; one dated log per test in testing/.</a:t>
-            </a:r>
-            <a:endParaRPr lang="en-US" sz="1100" dirty="0"/>
-          </a:p>
-        </p:txBody>
-      </p:sp>
-      <p:sp>
-        <p:nvSpPr>
-          <p:cNvPr id="27" name="Shape 25"/>
-          <p:cNvSpPr/>
-          <p:nvPr/>
-        </p:nvSpPr>
-        <p:spPr>
-          <a:xfrm>
-            <a:off x="457200" y="5120640"/>
-            <a:ext cx="11292840" cy="960120"/>
+            <a:off x="457200" y="4206240"/>
+            <a:ext cx="11292840" cy="868680"/>
           </a:xfrm>
           <a:prstGeom prst="rect">
             <a:avLst/>
@@ -11271,14 +12201,14 @@
       </p:sp>
       <p:sp>
         <p:nvSpPr>
-          <p:cNvPr id="28" name="Text 26"/>
-          <p:cNvSpPr txBox="1"/>
-          <p:nvPr/>
-        </p:nvSpPr>
-        <p:spPr>
-          <a:xfrm>
-            <a:off x="731520" y="5230368"/>
-            <a:ext cx="10744200" cy="731520"/>
+          <p:cNvPr id="18" name="Text 14"/>
+          <p:cNvSpPr txBox="1"/>
+          <p:nvPr/>
+        </p:nvSpPr>
+        <p:spPr>
+          <a:xfrm>
+            <a:off x="731520" y="4315968"/>
+            <a:ext cx="10744200" cy="658368"/>
           </a:xfrm>
           <a:prstGeom prst="rect">
             <a:avLst/>
@@ -11302,7 +12232,66 @@
                 <a:ea typeface="Arial" pitchFamily="34" charset="-122"/>
                 <a:cs typeface="Arial" pitchFamily="34" charset="-120"/>
               </a:rPr>
-              <a:t>Every phase inherits its checks from the constraints ledger: the sky-view rule, the ignition-on rule, the one-client rule, the adapter rule. The ledger was the test plan all along.</a:t>
+              <a:t>Definition of ready: the UI needs nothing from radio two's arrival except the data itself. That was the point of building on simulated partners from week one.</a:t>
+            </a:r>
+            <a:endParaRPr lang="en-US" sz="1250" dirty="0"/>
+          </a:p>
+        </p:txBody>
+      </p:sp>
+      <p:sp>
+        <p:nvSpPr>
+          <p:cNvPr id="19" name="Shape 15"/>
+          <p:cNvSpPr/>
+          <p:nvPr/>
+        </p:nvSpPr>
+        <p:spPr>
+          <a:xfrm>
+            <a:off x="457200" y="5349240"/>
+            <a:ext cx="11292840" cy="731520"/>
+          </a:xfrm>
+          <a:prstGeom prst="rect">
+            <a:avLst/>
+          </a:prstGeom>
+          <a:solidFill>
+            <a:srgbClr val="16213D"/>
+          </a:solidFill>
+          <a:ln/>
+        </p:spPr>
+      </p:sp>
+      <p:sp>
+        <p:nvSpPr>
+          <p:cNvPr id="20" name="Text 16"/>
+          <p:cNvSpPr txBox="1"/>
+          <p:nvPr/>
+        </p:nvSpPr>
+        <p:spPr>
+          <a:xfrm>
+            <a:off x="731520" y="5440680"/>
+            <a:ext cx="10744200" cy="548640"/>
+          </a:xfrm>
+          <a:prstGeom prst="rect">
+            <a:avLst/>
+          </a:prstGeom>
+          <a:noFill/>
+          <a:ln/>
+        </p:spPr>
+        <p:txBody>
+          <a:bodyPr wrap="square" lIns="0" tIns="0" rIns="0" bIns="0" rtlCol="0" anchor="ctr"/>
+          <a:lstStyle/>
+          <a:p>
+            <a:pPr indent="0" marL="0">
+              <a:buNone/>
+            </a:pPr>
+            <a:r>
+              <a:rPr lang="en-US" sz="1250" dirty="0">
+                <a:solidFill>
+                  <a:srgbClr val="FFFFFF"/>
+                </a:solidFill>
+                <a:latin typeface="Arial" pitchFamily="34" charset="0"/>
+                <a:ea typeface="Arial" pitchFamily="34" charset="-122"/>
+                <a:cs typeface="Arial" pitchFamily="34" charset="-120"/>
+              </a:rPr>
+              <a:t>The compass photo above is the simulator driving the real display: the partner pipeline, rehearsed nightly for three weeks.</a:t>
             </a:r>
             <a:endParaRPr lang="en-US" sz="1250" dirty="0"/>
           </a:p>
@@ -11457,7 +12446,7 @@
                 <a:ea typeface="Courier New" pitchFamily="34" charset="-122"/>
                 <a:cs typeface="Courier New" pitchFamily="34" charset="-120"/>
               </a:rPr>
-              <a:t>METRICS DECLARED</a:t>
+              <a:t>DRIVE-TEST PROTOCOL</a:t>
             </a:r>
             <a:endParaRPr lang="en-US" sz="900" dirty="0"/>
           </a:p>
@@ -11496,7 +12485,7 @@
                 <a:ea typeface="Courier New" pitchFamily="34" charset="-122"/>
                 <a:cs typeface="Courier New" pitchFamily="34" charset="-120"/>
               </a:rPr>
-              <a:t>SHEET 08/10  REV D  2026-09-16</a:t>
+              <a:t>SHEET 08/11  REV D  2026-09-16</a:t>
             </a:r>
             <a:endParaRPr lang="en-US" sz="900" dirty="0"/>
           </a:p>
@@ -11599,7 +12588,7 @@
                 <a:ea typeface="Arial" pitchFamily="34" charset="-122"/>
                 <a:cs typeface="Arial" pitchFamily="34" charset="-120"/>
               </a:rPr>
-              <a:t>THE NUMBERS THAT WILL JUDGE THE SYSTEM</a:t>
+              <a:t>DRIVE-TEST PROTOCOL, VERSION ONE</a:t>
             </a:r>
             <a:endParaRPr lang="en-US" sz="2300" dirty="0"/>
           </a:p>
@@ -11614,144 +12603,7 @@
         <p:spPr>
           <a:xfrm>
             <a:off x="457200" y="1143000"/>
-            <a:ext cx="2103120" cy="804672"/>
-          </a:xfrm>
-          <a:prstGeom prst="rect">
-            <a:avLst/>
-          </a:prstGeom>
-          <a:solidFill>
-            <a:srgbClr val="16213D"/>
-          </a:solidFill>
-          <a:ln/>
-        </p:spPr>
-      </p:sp>
-      <p:sp>
-        <p:nvSpPr>
-          <p:cNvPr id="11" name="Text 9"/>
-          <p:cNvSpPr txBox="1"/>
-          <p:nvPr/>
-        </p:nvSpPr>
-        <p:spPr>
-          <a:xfrm>
-            <a:off x="457200" y="1216152"/>
-            <a:ext cx="2103120" cy="365760"/>
-          </a:xfrm>
-          <a:prstGeom prst="rect">
-            <a:avLst/>
-          </a:prstGeom>
-          <a:noFill/>
-          <a:ln/>
-        </p:spPr>
-        <p:txBody>
-          <a:bodyPr wrap="square" lIns="0" tIns="0" rIns="0" bIns="0" rtlCol="0" anchor="ctr"/>
-          <a:lstStyle/>
-          <a:p>
-            <a:pPr algn="ctr" indent="0" marL="0">
-              <a:buNone/>
-            </a:pPr>
-            <a:r>
-              <a:rPr lang="en-US" sz="1300" b="1" dirty="0">
-                <a:solidFill>
-                  <a:srgbClr val="E58E1A"/>
-                </a:solidFill>
-                <a:latin typeface="Courier New" pitchFamily="34" charset="0"/>
-                <a:ea typeface="Courier New" pitchFamily="34" charset="-122"/>
-                <a:cs typeface="Courier New" pitchFamily="34" charset="-120"/>
-              </a:rPr>
-              <a:t>PDR</a:t>
-            </a:r>
-            <a:endParaRPr lang="en-US" sz="1300" dirty="0"/>
-          </a:p>
-        </p:txBody>
-      </p:sp>
-      <p:sp>
-        <p:nvSpPr>
-          <p:cNvPr id="12" name="Text 10"/>
-          <p:cNvSpPr txBox="1"/>
-          <p:nvPr/>
-        </p:nvSpPr>
-        <p:spPr>
-          <a:xfrm>
-            <a:off x="457200" y="1581912"/>
-            <a:ext cx="2103120" cy="274320"/>
-          </a:xfrm>
-          <a:prstGeom prst="rect">
-            <a:avLst/>
-          </a:prstGeom>
-          <a:noFill/>
-          <a:ln/>
-        </p:spPr>
-        <p:txBody>
-          <a:bodyPr wrap="square" lIns="0" tIns="0" rIns="0" bIns="0" rtlCol="0" anchor="ctr"/>
-          <a:lstStyle/>
-          <a:p>
-            <a:pPr algn="ctr" indent="0" marL="0">
-              <a:buNone/>
-            </a:pPr>
-            <a:r>
-              <a:rPr lang="en-US" sz="900" dirty="0">
-                <a:solidFill>
-                  <a:srgbClr val="C9D8F0"/>
-                </a:solidFill>
-                <a:latin typeface="Arial" pitchFamily="34" charset="0"/>
-                <a:ea typeface="Arial" pitchFamily="34" charset="-122"/>
-                <a:cs typeface="Arial" pitchFamily="34" charset="-120"/>
-              </a:rPr>
-              <a:t>packet delivery ratio</a:t>
-            </a:r>
-            <a:endParaRPr lang="en-US" sz="900" dirty="0"/>
-          </a:p>
-        </p:txBody>
-      </p:sp>
-      <p:sp>
-        <p:nvSpPr>
-          <p:cNvPr id="13" name="Text 11"/>
-          <p:cNvSpPr txBox="1"/>
-          <p:nvPr/>
-        </p:nvSpPr>
-        <p:spPr>
-          <a:xfrm>
-            <a:off x="2743200" y="1197864"/>
-            <a:ext cx="5577840" cy="694944"/>
-          </a:xfrm>
-          <a:prstGeom prst="rect">
-            <a:avLst/>
-          </a:prstGeom>
-          <a:noFill/>
-          <a:ln/>
-        </p:spPr>
-        <p:txBody>
-          <a:bodyPr wrap="square" lIns="0" tIns="0" rIns="0" bIns="0" rtlCol="0" anchor="ctr"/>
-          <a:lstStyle/>
-          <a:p>
-            <a:pPr indent="0" marL="0">
-              <a:buNone/>
-            </a:pPr>
-            <a:r>
-              <a:rPr lang="en-US" sz="1200" dirty="0">
-                <a:solidFill>
-                  <a:srgbClr val="222A3F"/>
-                </a:solidFill>
-                <a:latin typeface="Arial" pitchFamily="34" charset="0"/>
-                <a:ea typeface="Arial" pitchFamily="34" charset="-122"/>
-                <a:cs typeface="Arial" pitchFamily="34" charset="-120"/>
-              </a:rPr>
-              <a:t>received / expected broadcasts per interval</a:t>
-            </a:r>
-            <a:endParaRPr lang="en-US" sz="1200" dirty="0"/>
-          </a:p>
-        </p:txBody>
-      </p:sp>
-      <p:sp>
-        <p:nvSpPr>
-          <p:cNvPr id="14" name="Shape 12"/>
-          <p:cNvSpPr/>
-          <p:nvPr/>
-        </p:nvSpPr>
-        <p:spPr>
-          <a:xfrm>
-            <a:off x="8503920" y="1143000"/>
-            <a:ext cx="3246120" cy="804672"/>
+            <a:ext cx="7863840" cy="804672"/>
           </a:xfrm>
           <a:prstGeom prst="rect">
             <a:avLst/>
@@ -11761,7 +12613,7 @@
           </a:solidFill>
           <a:ln w="15875">
             <a:solidFill>
-              <a:srgbClr val="1F9D68"/>
+              <a:srgbClr val="D9488C"/>
             </a:solidFill>
             <a:prstDash val="solid"/>
           </a:ln>
@@ -11769,14 +12621,14 @@
       </p:sp>
       <p:sp>
         <p:nvSpPr>
-          <p:cNvPr id="15" name="Text 13"/>
-          <p:cNvSpPr txBox="1"/>
-          <p:nvPr/>
-        </p:nvSpPr>
-        <p:spPr>
-          <a:xfrm>
-            <a:off x="8641080" y="1197864"/>
-            <a:ext cx="3017520" cy="694944"/>
+          <p:cNvPr id="11" name="Text 9"/>
+          <p:cNvSpPr txBox="1"/>
+          <p:nvPr/>
+        </p:nvSpPr>
+        <p:spPr>
+          <a:xfrm>
+            <a:off x="621792" y="1197864"/>
+            <a:ext cx="1920240" cy="274320"/>
           </a:xfrm>
           <a:prstGeom prst="rect">
             <a:avLst/>
@@ -11792,167 +12644,93 @@
               <a:buNone/>
             </a:pPr>
             <a:r>
-              <a:rPr lang="en-US" sz="1150" b="1" dirty="0">
-                <a:solidFill>
-                  <a:srgbClr val="1F9D68"/>
+              <a:rPr lang="en-US" sz="1100" b="1" dirty="0">
+                <a:solidFill>
+                  <a:srgbClr val="D9488C"/>
                 </a:solidFill>
                 <a:latin typeface="Courier New" pitchFamily="34" charset="0"/>
                 <a:ea typeface="Courier New" pitchFamily="34" charset="-122"/>
                 <a:cs typeface="Courier New" pitchFamily="34" charset="-120"/>
               </a:rPr>
-              <a:t>&gt; 90% inside working range</a:t>
-            </a:r>
-            <a:endParaRPr lang="en-US" sz="1150" dirty="0"/>
-          </a:p>
-        </p:txBody>
-      </p:sp>
-      <p:sp>
-        <p:nvSpPr>
-          <p:cNvPr id="16" name="Shape 14"/>
-          <p:cNvSpPr/>
-          <p:nvPr/>
-        </p:nvSpPr>
-        <p:spPr>
-          <a:xfrm>
-            <a:off x="457200" y="2075688"/>
-            <a:ext cx="2103120" cy="804672"/>
-          </a:xfrm>
-          <a:prstGeom prst="rect">
-            <a:avLst/>
-          </a:prstGeom>
-          <a:solidFill>
-            <a:srgbClr val="16213D"/>
-          </a:solidFill>
-          <a:ln/>
-        </p:spPr>
-      </p:sp>
-      <p:sp>
-        <p:nvSpPr>
-          <p:cNvPr id="17" name="Text 15"/>
-          <p:cNvSpPr txBox="1"/>
-          <p:nvPr/>
-        </p:nvSpPr>
-        <p:spPr>
-          <a:xfrm>
-            <a:off x="457200" y="2148840"/>
-            <a:ext cx="2103120" cy="365760"/>
-          </a:xfrm>
-          <a:prstGeom prst="rect">
-            <a:avLst/>
-          </a:prstGeom>
-          <a:noFill/>
-          <a:ln/>
-        </p:spPr>
-        <p:txBody>
-          <a:bodyPr wrap="square" lIns="0" tIns="0" rIns="0" bIns="0" rtlCol="0" anchor="ctr"/>
-          <a:lstStyle/>
-          <a:p>
-            <a:pPr algn="ctr" indent="0" marL="0">
-              <a:buNone/>
-            </a:pPr>
-            <a:r>
-              <a:rPr lang="en-US" sz="1300" b="1" dirty="0">
-                <a:solidFill>
-                  <a:srgbClr val="E58E1A"/>
-                </a:solidFill>
-                <a:latin typeface="Courier New" pitchFamily="34" charset="0"/>
-                <a:ea typeface="Courier New" pitchFamily="34" charset="-122"/>
-                <a:cs typeface="Courier New" pitchFamily="34" charset="-120"/>
-              </a:rPr>
-              <a:t>AGE p95</a:t>
-            </a:r>
-            <a:endParaRPr lang="en-US" sz="1300" dirty="0"/>
-          </a:p>
-        </p:txBody>
-      </p:sp>
-      <p:sp>
-        <p:nvSpPr>
-          <p:cNvPr id="18" name="Text 16"/>
-          <p:cNvSpPr txBox="1"/>
-          <p:nvPr/>
-        </p:nvSpPr>
-        <p:spPr>
-          <a:xfrm>
-            <a:off x="457200" y="2514600"/>
-            <a:ext cx="2103120" cy="274320"/>
-          </a:xfrm>
-          <a:prstGeom prst="rect">
-            <a:avLst/>
-          </a:prstGeom>
-          <a:noFill/>
-          <a:ln/>
-        </p:spPr>
-        <p:txBody>
-          <a:bodyPr wrap="square" lIns="0" tIns="0" rIns="0" bIns="0" rtlCol="0" anchor="ctr"/>
-          <a:lstStyle/>
-          <a:p>
-            <a:pPr algn="ctr" indent="0" marL="0">
-              <a:buNone/>
-            </a:pPr>
-            <a:r>
-              <a:rPr lang="en-US" sz="900" dirty="0">
-                <a:solidFill>
-                  <a:srgbClr val="C9D8F0"/>
+              <a:t>P0  BENCH</a:t>
+            </a:r>
+            <a:endParaRPr lang="en-US" sz="1100" dirty="0"/>
+          </a:p>
+        </p:txBody>
+      </p:sp>
+      <p:sp>
+        <p:nvSpPr>
+          <p:cNvPr id="12" name="Text 10"/>
+          <p:cNvSpPr txBox="1"/>
+          <p:nvPr/>
+        </p:nvSpPr>
+        <p:spPr>
+          <a:xfrm>
+            <a:off x="621792" y="1472184"/>
+            <a:ext cx="7543800" cy="457200"/>
+          </a:xfrm>
+          <a:prstGeom prst="rect">
+            <a:avLst/>
+          </a:prstGeom>
+          <a:noFill/>
+          <a:ln/>
+        </p:spPr>
+        <p:txBody>
+          <a:bodyPr wrap="square" lIns="0" tIns="0" rIns="0" bIns="0" rtlCol="0" anchor="ctr"/>
+          <a:lstStyle/>
+          <a:p>
+            <a:pPr indent="0" marL="0">
+              <a:buNone/>
+            </a:pPr>
+            <a:r>
+              <a:rPr lang="en-US" sz="1100" dirty="0">
+                <a:solidFill>
+                  <a:srgbClr val="222A3F"/>
                 </a:solidFill>
                 <a:latin typeface="Arial" pitchFamily="34" charset="0"/>
                 <a:ea typeface="Arial" pitchFamily="34" charset="-122"/>
                 <a:cs typeface="Arial" pitchFamily="34" charset="-120"/>
               </a:rPr>
-              <a:t>freshness</a:t>
-            </a:r>
-            <a:endParaRPr lang="en-US" sz="900" dirty="0"/>
-          </a:p>
-        </p:txBody>
-      </p:sp>
-      <p:sp>
-        <p:nvSpPr>
-          <p:cNvPr id="19" name="Text 17"/>
-          <p:cNvSpPr txBox="1"/>
-          <p:nvPr/>
-        </p:nvSpPr>
-        <p:spPr>
-          <a:xfrm>
-            <a:off x="2743200" y="2130552"/>
-            <a:ext cx="5577840" cy="694944"/>
-          </a:xfrm>
-          <a:prstGeom prst="rect">
-            <a:avLst/>
-          </a:prstGeom>
-          <a:noFill/>
-          <a:ln/>
-        </p:spPr>
-        <p:txBody>
-          <a:bodyPr wrap="square" lIns="0" tIns="0" rIns="0" bIns="0" rtlCol="0" anchor="ctr"/>
-          <a:lstStyle/>
-          <a:p>
-            <a:pPr indent="0" marL="0">
-              <a:buNone/>
-            </a:pPr>
-            <a:r>
-              <a:rPr lang="en-US" sz="1200" dirty="0">
-                <a:solidFill>
-                  <a:srgbClr val="222A3F"/>
-                </a:solidFill>
-                <a:latin typeface="Arial" pitchFamily="34" charset="0"/>
-                <a:ea typeface="Arial" pitchFamily="34" charset="-122"/>
-                <a:cs typeface="Arial" pitchFamily="34" charset="-120"/>
-              </a:rPr>
-              <a:t>95th percentile of displayed partner age</a:t>
-            </a:r>
-            <a:endParaRPr lang="en-US" sz="1200" dirty="0"/>
-          </a:p>
-        </p:txBody>
-      </p:sp>
-      <p:sp>
-        <p:nvSpPr>
-          <p:cNvPr id="20" name="Shape 18"/>
+              <a:t>both radios on one desk: acceptance criteria 1 to 4 from sheet 04, thirty minutes of soak, zero drops expected</a:t>
+            </a:r>
+            <a:endParaRPr lang="en-US" sz="1100" dirty="0"/>
+          </a:p>
+        </p:txBody>
+      </p:sp>
+      <p:sp>
+        <p:nvSpPr>
+          <p:cNvPr id="13" name="Shape 11"/>
           <p:cNvSpPr/>
           <p:nvPr/>
         </p:nvSpPr>
         <p:spPr>
           <a:xfrm>
-            <a:off x="8503920" y="2075688"/>
-            <a:ext cx="3246120" cy="804672"/>
+            <a:off x="914400" y="1947672"/>
+            <a:ext cx="0" cy="128016"/>
+          </a:xfrm>
+          <a:prstGeom prst="line">
+            <a:avLst/>
+          </a:prstGeom>
+          <a:noFill/>
+          <a:ln w="28575">
+            <a:solidFill>
+              <a:srgbClr val="D9488C"/>
+            </a:solidFill>
+            <a:prstDash val="solid"/>
+            <a:tailEnd type="triangle"/>
+          </a:ln>
+        </p:spPr>
+      </p:sp>
+      <p:sp>
+        <p:nvSpPr>
+          <p:cNvPr id="14" name="Shape 12"/>
+          <p:cNvSpPr/>
+          <p:nvPr/>
+        </p:nvSpPr>
+        <p:spPr>
+          <a:xfrm>
+            <a:off x="457200" y="2075688"/>
+            <a:ext cx="7863840" cy="804672"/>
           </a:xfrm>
           <a:prstGeom prst="rect">
             <a:avLst/>
@@ -11962,7 +12740,7 @@
           </a:solidFill>
           <a:ln w="15875">
             <a:solidFill>
-              <a:srgbClr val="1F9D68"/>
+              <a:srgbClr val="D9488C"/>
             </a:solidFill>
             <a:prstDash val="solid"/>
           </a:ln>
@@ -11970,14 +12748,14 @@
       </p:sp>
       <p:sp>
         <p:nvSpPr>
-          <p:cNvPr id="21" name="Text 19"/>
-          <p:cNvSpPr txBox="1"/>
-          <p:nvPr/>
-        </p:nvSpPr>
-        <p:spPr>
-          <a:xfrm>
-            <a:off x="8641080" y="2130552"/>
-            <a:ext cx="3017520" cy="694944"/>
+          <p:cNvPr id="15" name="Text 13"/>
+          <p:cNvSpPr txBox="1"/>
+          <p:nvPr/>
+        </p:nvSpPr>
+        <p:spPr>
+          <a:xfrm>
+            <a:off x="621792" y="2130552"/>
+            <a:ext cx="1920240" cy="274320"/>
           </a:xfrm>
           <a:prstGeom prst="rect">
             <a:avLst/>
@@ -11993,167 +12771,93 @@
               <a:buNone/>
             </a:pPr>
             <a:r>
-              <a:rPr lang="en-US" sz="1150" b="1" dirty="0">
-                <a:solidFill>
-                  <a:srgbClr val="1F9D68"/>
+              <a:rPr lang="en-US" sz="1100" b="1" dirty="0">
+                <a:solidFill>
+                  <a:srgbClr val="D9488C"/>
                 </a:solidFill>
                 <a:latin typeface="Courier New" pitchFamily="34" charset="0"/>
                 <a:ea typeface="Courier New" pitchFamily="34" charset="-122"/>
                 <a:cs typeface="Courier New" pitchFamily="34" charset="-120"/>
               </a:rPr>
-              <a:t>&lt; 25 s while both move</a:t>
-            </a:r>
-            <a:endParaRPr lang="en-US" sz="1150" dirty="0"/>
-          </a:p>
-        </p:txBody>
-      </p:sp>
-      <p:sp>
-        <p:nvSpPr>
-          <p:cNvPr id="22" name="Shape 20"/>
-          <p:cNvSpPr/>
-          <p:nvPr/>
-        </p:nvSpPr>
-        <p:spPr>
-          <a:xfrm>
-            <a:off x="457200" y="3008376"/>
-            <a:ext cx="2103120" cy="804672"/>
-          </a:xfrm>
-          <a:prstGeom prst="rect">
-            <a:avLst/>
-          </a:prstGeom>
-          <a:solidFill>
-            <a:srgbClr val="16213D"/>
-          </a:solidFill>
-          <a:ln/>
-        </p:spPr>
-      </p:sp>
-      <p:sp>
-        <p:nvSpPr>
-          <p:cNvPr id="23" name="Text 21"/>
-          <p:cNvSpPr txBox="1"/>
-          <p:nvPr/>
-        </p:nvSpPr>
-        <p:spPr>
-          <a:xfrm>
-            <a:off x="457200" y="3081528"/>
-            <a:ext cx="2103120" cy="365760"/>
-          </a:xfrm>
-          <a:prstGeom prst="rect">
-            <a:avLst/>
-          </a:prstGeom>
-          <a:noFill/>
-          <a:ln/>
-        </p:spPr>
-        <p:txBody>
-          <a:bodyPr wrap="square" lIns="0" tIns="0" rIns="0" bIns="0" rtlCol="0" anchor="ctr"/>
-          <a:lstStyle/>
-          <a:p>
-            <a:pPr algn="ctr" indent="0" marL="0">
-              <a:buNone/>
-            </a:pPr>
-            <a:r>
-              <a:rPr lang="en-US" sz="1300" b="1" dirty="0">
-                <a:solidFill>
-                  <a:srgbClr val="E58E1A"/>
-                </a:solidFill>
-                <a:latin typeface="Courier New" pitchFamily="34" charset="0"/>
-                <a:ea typeface="Courier New" pitchFamily="34" charset="-122"/>
-                <a:cs typeface="Courier New" pitchFamily="34" charset="-120"/>
-              </a:rPr>
-              <a:t>RECONNECT</a:t>
-            </a:r>
-            <a:endParaRPr lang="en-US" sz="1300" dirty="0"/>
-          </a:p>
-        </p:txBody>
-      </p:sp>
-      <p:sp>
-        <p:nvSpPr>
-          <p:cNvPr id="24" name="Text 22"/>
-          <p:cNvSpPr txBox="1"/>
-          <p:nvPr/>
-        </p:nvSpPr>
-        <p:spPr>
-          <a:xfrm>
-            <a:off x="457200" y="3447288"/>
-            <a:ext cx="2103120" cy="274320"/>
-          </a:xfrm>
-          <a:prstGeom prst="rect">
-            <a:avLst/>
-          </a:prstGeom>
-          <a:noFill/>
-          <a:ln/>
-        </p:spPr>
-        <p:txBody>
-          <a:bodyPr wrap="square" lIns="0" tIns="0" rIns="0" bIns="0" rtlCol="0" anchor="ctr"/>
-          <a:lstStyle/>
-          <a:p>
-            <a:pPr algn="ctr" indent="0" marL="0">
-              <a:buNone/>
-            </a:pPr>
-            <a:r>
-              <a:rPr lang="en-US" sz="900" dirty="0">
-                <a:solidFill>
-                  <a:srgbClr val="C9D8F0"/>
+              <a:t>P1  STATIC RANGE</a:t>
+            </a:r>
+            <a:endParaRPr lang="en-US" sz="1100" dirty="0"/>
+          </a:p>
+        </p:txBody>
+      </p:sp>
+      <p:sp>
+        <p:nvSpPr>
+          <p:cNvPr id="16" name="Text 14"/>
+          <p:cNvSpPr txBox="1"/>
+          <p:nvPr/>
+        </p:nvSpPr>
+        <p:spPr>
+          <a:xfrm>
+            <a:off x="621792" y="2404872"/>
+            <a:ext cx="7543800" cy="457200"/>
+          </a:xfrm>
+          <a:prstGeom prst="rect">
+            <a:avLst/>
+          </a:prstGeom>
+          <a:noFill/>
+          <a:ln/>
+        </p:spPr>
+        <p:txBody>
+          <a:bodyPr wrap="square" lIns="0" tIns="0" rIns="0" bIns="0" rtlCol="0" anchor="ctr"/>
+          <a:lstStyle/>
+          <a:p>
+            <a:pPr indent="0" marL="0">
+              <a:buNone/>
+            </a:pPr>
+            <a:r>
+              <a:rPr lang="en-US" sz="1100" dirty="0">
+                <a:solidFill>
+                  <a:srgbClr val="222A3F"/>
                 </a:solidFill>
                 <a:latin typeface="Arial" pitchFamily="34" charset="0"/>
                 <a:ea typeface="Arial" pitchFamily="34" charset="-122"/>
                 <a:cs typeface="Arial" pitchFamily="34" charset="-120"/>
               </a:rPr>
-              <a:t>link resilience</a:t>
-            </a:r>
-            <a:endParaRPr lang="en-US" sz="900" dirty="0"/>
-          </a:p>
-        </p:txBody>
-      </p:sp>
-      <p:sp>
-        <p:nvSpPr>
-          <p:cNvPr id="25" name="Text 23"/>
-          <p:cNvSpPr txBox="1"/>
-          <p:nvPr/>
-        </p:nvSpPr>
-        <p:spPr>
-          <a:xfrm>
-            <a:off x="2743200" y="3063240"/>
-            <a:ext cx="5577840" cy="694944"/>
-          </a:xfrm>
-          <a:prstGeom prst="rect">
-            <a:avLst/>
-          </a:prstGeom>
-          <a:noFill/>
-          <a:ln/>
-        </p:spPr>
-        <p:txBody>
-          <a:bodyPr wrap="square" lIns="0" tIns="0" rIns="0" bIns="0" rtlCol="0" anchor="ctr"/>
-          <a:lstStyle/>
-          <a:p>
-            <a:pPr indent="0" marL="0">
-              <a:buNone/>
-            </a:pPr>
-            <a:r>
-              <a:rPr lang="en-US" sz="1200" dirty="0">
-                <a:solidFill>
-                  <a:srgbClr val="222A3F"/>
-                </a:solidFill>
-                <a:latin typeface="Arial" pitchFamily="34" charset="0"/>
-                <a:ea typeface="Arial" pitchFamily="34" charset="-122"/>
-                <a:cs typeface="Arial" pitchFamily="34" charset="-120"/>
-              </a:rPr>
-              <a:t>BLE self-heals after drop, no user action</a:t>
-            </a:r>
-            <a:endParaRPr lang="en-US" sz="1200" dirty="0"/>
-          </a:p>
-        </p:txBody>
-      </p:sp>
-      <p:sp>
-        <p:nvSpPr>
-          <p:cNvPr id="26" name="Shape 24"/>
+              <a:t>one radio fixed, one carried: log RSSI and SNR at marked distances until packets stop; plot onto sheet 05</a:t>
+            </a:r>
+            <a:endParaRPr lang="en-US" sz="1100" dirty="0"/>
+          </a:p>
+        </p:txBody>
+      </p:sp>
+      <p:sp>
+        <p:nvSpPr>
+          <p:cNvPr id="17" name="Shape 15"/>
           <p:cNvSpPr/>
           <p:nvPr/>
         </p:nvSpPr>
         <p:spPr>
           <a:xfrm>
-            <a:off x="8503920" y="3008376"/>
-            <a:ext cx="3246120" cy="804672"/>
+            <a:off x="914400" y="2880360"/>
+            <a:ext cx="0" cy="128016"/>
+          </a:xfrm>
+          <a:prstGeom prst="line">
+            <a:avLst/>
+          </a:prstGeom>
+          <a:noFill/>
+          <a:ln w="28575">
+            <a:solidFill>
+              <a:srgbClr val="D9488C"/>
+            </a:solidFill>
+            <a:prstDash val="solid"/>
+            <a:tailEnd type="triangle"/>
+          </a:ln>
+        </p:spPr>
+      </p:sp>
+      <p:sp>
+        <p:nvSpPr>
+          <p:cNvPr id="18" name="Shape 16"/>
+          <p:cNvSpPr/>
+          <p:nvPr/>
+        </p:nvSpPr>
+        <p:spPr>
+          <a:xfrm>
+            <a:off x="457200" y="3008376"/>
+            <a:ext cx="7863840" cy="804672"/>
           </a:xfrm>
           <a:prstGeom prst="rect">
             <a:avLst/>
@@ -12163,7 +12867,7 @@
           </a:solidFill>
           <a:ln w="15875">
             <a:solidFill>
-              <a:srgbClr val="1F9D68"/>
+              <a:srgbClr val="D9488C"/>
             </a:solidFill>
             <a:prstDash val="solid"/>
           </a:ln>
@@ -12171,14 +12875,14 @@
       </p:sp>
       <p:sp>
         <p:nvSpPr>
-          <p:cNvPr id="27" name="Text 25"/>
-          <p:cNvSpPr txBox="1"/>
-          <p:nvPr/>
-        </p:nvSpPr>
-        <p:spPr>
-          <a:xfrm>
-            <a:off x="8641080" y="3063240"/>
-            <a:ext cx="3017520" cy="694944"/>
+          <p:cNvPr id="19" name="Text 17"/>
+          <p:cNvSpPr txBox="1"/>
+          <p:nvPr/>
+        </p:nvSpPr>
+        <p:spPr>
+          <a:xfrm>
+            <a:off x="621792" y="3063240"/>
+            <a:ext cx="1920240" cy="274320"/>
           </a:xfrm>
           <a:prstGeom prst="rect">
             <a:avLst/>
@@ -12194,167 +12898,93 @@
               <a:buNone/>
             </a:pPr>
             <a:r>
-              <a:rPr lang="en-US" sz="1150" b="1" dirty="0">
-                <a:solidFill>
-                  <a:srgbClr val="1F9D68"/>
+              <a:rPr lang="en-US" sz="1100" b="1" dirty="0">
+                <a:solidFill>
+                  <a:srgbClr val="D9488C"/>
                 </a:solidFill>
                 <a:latin typeface="Courier New" pitchFamily="34" charset="0"/>
                 <a:ea typeface="Courier New" pitchFamily="34" charset="-122"/>
                 <a:cs typeface="Courier New" pitchFamily="34" charset="-120"/>
               </a:rPr>
-              <a:t>100% of drops, &lt; 30 s</a:t>
-            </a:r>
-            <a:endParaRPr lang="en-US" sz="1150" dirty="0"/>
-          </a:p>
-        </p:txBody>
-      </p:sp>
-      <p:sp>
-        <p:nvSpPr>
-          <p:cNvPr id="28" name="Shape 26"/>
-          <p:cNvSpPr/>
-          <p:nvPr/>
-        </p:nvSpPr>
-        <p:spPr>
-          <a:xfrm>
-            <a:off x="457200" y="3941064"/>
-            <a:ext cx="2103120" cy="804672"/>
-          </a:xfrm>
-          <a:prstGeom prst="rect">
-            <a:avLst/>
-          </a:prstGeom>
-          <a:solidFill>
-            <a:srgbClr val="16213D"/>
-          </a:solidFill>
-          <a:ln/>
-        </p:spPr>
-      </p:sp>
-      <p:sp>
-        <p:nvSpPr>
-          <p:cNvPr id="29" name="Text 27"/>
-          <p:cNvSpPr txBox="1"/>
-          <p:nvPr/>
-        </p:nvSpPr>
-        <p:spPr>
-          <a:xfrm>
-            <a:off x="457200" y="4014216"/>
-            <a:ext cx="2103120" cy="365760"/>
-          </a:xfrm>
-          <a:prstGeom prst="rect">
-            <a:avLst/>
-          </a:prstGeom>
-          <a:noFill/>
-          <a:ln/>
-        </p:spPr>
-        <p:txBody>
-          <a:bodyPr wrap="square" lIns="0" tIns="0" rIns="0" bIns="0" rtlCol="0" anchor="ctr"/>
-          <a:lstStyle/>
-          <a:p>
-            <a:pPr algn="ctr" indent="0" marL="0">
-              <a:buNone/>
-            </a:pPr>
-            <a:r>
-              <a:rPr lang="en-US" sz="1300" b="1" dirty="0">
-                <a:solidFill>
-                  <a:srgbClr val="E58E1A"/>
-                </a:solidFill>
-                <a:latin typeface="Courier New" pitchFamily="34" charset="0"/>
-                <a:ea typeface="Courier New" pitchFamily="34" charset="-122"/>
-                <a:cs typeface="Courier New" pitchFamily="34" charset="-120"/>
-              </a:rPr>
-              <a:t>DR ERROR</a:t>
-            </a:r>
-            <a:endParaRPr lang="en-US" sz="1300" dirty="0"/>
-          </a:p>
-        </p:txBody>
-      </p:sp>
-      <p:sp>
-        <p:nvSpPr>
-          <p:cNvPr id="30" name="Text 28"/>
-          <p:cNvSpPr txBox="1"/>
-          <p:nvPr/>
-        </p:nvSpPr>
-        <p:spPr>
-          <a:xfrm>
-            <a:off x="457200" y="4379976"/>
-            <a:ext cx="2103120" cy="274320"/>
-          </a:xfrm>
-          <a:prstGeom prst="rect">
-            <a:avLst/>
-          </a:prstGeom>
-          <a:noFill/>
-          <a:ln/>
-        </p:spPr>
-        <p:txBody>
-          <a:bodyPr wrap="square" lIns="0" tIns="0" rIns="0" bIns="0" rtlCol="0" anchor="ctr"/>
-          <a:lstStyle/>
-          <a:p>
-            <a:pPr algn="ctr" indent="0" marL="0">
-              <a:buNone/>
-            </a:pPr>
-            <a:r>
-              <a:rPr lang="en-US" sz="900" dirty="0">
-                <a:solidFill>
-                  <a:srgbClr val="C9D8F0"/>
+              <a:t>P2  TWO-VEHICLE DRIVE</a:t>
+            </a:r>
+            <a:endParaRPr lang="en-US" sz="1100" dirty="0"/>
+          </a:p>
+        </p:txBody>
+      </p:sp>
+      <p:sp>
+        <p:nvSpPr>
+          <p:cNvPr id="20" name="Text 18"/>
+          <p:cNvSpPr txBox="1"/>
+          <p:nvPr/>
+        </p:nvSpPr>
+        <p:spPr>
+          <a:xfrm>
+            <a:off x="621792" y="3337560"/>
+            <a:ext cx="7543800" cy="457200"/>
+          </a:xfrm>
+          <a:prstGeom prst="rect">
+            <a:avLst/>
+          </a:prstGeom>
+          <a:noFill/>
+          <a:ln/>
+        </p:spPr>
+        <p:txBody>
+          <a:bodyPr wrap="square" lIns="0" tIns="0" rIns="0" bIns="0" rtlCol="0" anchor="ctr"/>
+          <a:lstStyle/>
+          <a:p>
+            <a:pPr indent="0" marL="0">
+              <a:buNone/>
+            </a:pPr>
+            <a:r>
+              <a:rPr lang="en-US" sz="1100" dirty="0">
+                <a:solidFill>
+                  <a:srgbClr val="222A3F"/>
                 </a:solidFill>
                 <a:latin typeface="Arial" pitchFamily="34" charset="0"/>
                 <a:ea typeface="Arial" pitchFamily="34" charset="-122"/>
                 <a:cs typeface="Arial" pitchFamily="34" charset="-120"/>
               </a:rPr>
-              <a:t>projection honesty</a:t>
-            </a:r>
-            <a:endParaRPr lang="en-US" sz="900" dirty="0"/>
-          </a:p>
-        </p:txBody>
-      </p:sp>
-      <p:sp>
-        <p:nvSpPr>
-          <p:cNvPr id="31" name="Text 29"/>
-          <p:cNvSpPr txBox="1"/>
-          <p:nvPr/>
-        </p:nvSpPr>
-        <p:spPr>
-          <a:xfrm>
-            <a:off x="2743200" y="3995928"/>
-            <a:ext cx="5577840" cy="694944"/>
-          </a:xfrm>
-          <a:prstGeom prst="rect">
-            <a:avLst/>
-          </a:prstGeom>
-          <a:noFill/>
-          <a:ln/>
-        </p:spPr>
-        <p:txBody>
-          <a:bodyPr wrap="square" lIns="0" tIns="0" rIns="0" bIns="0" rtlCol="0" anchor="ctr"/>
-          <a:lstStyle/>
-          <a:p>
-            <a:pPr indent="0" marL="0">
-              <a:buNone/>
-            </a:pPr>
-            <a:r>
-              <a:rPr lang="en-US" sz="1200" dirty="0">
-                <a:solidFill>
-                  <a:srgbClr val="222A3F"/>
-                </a:solidFill>
-                <a:latin typeface="Arial" pitchFamily="34" charset="0"/>
-                <a:ea typeface="Arial" pitchFamily="34" charset="-122"/>
-                <a:cs typeface="Arial" pitchFamily="34" charset="-120"/>
-              </a:rPr>
-              <a:t>gap between projected and next real fix</a:t>
-            </a:r>
-            <a:endParaRPr lang="en-US" sz="1200" dirty="0"/>
-          </a:p>
-        </p:txBody>
-      </p:sp>
-      <p:sp>
-        <p:nvSpPr>
-          <p:cNvPr id="32" name="Shape 30"/>
+              <a:t>city loop then open road: PTR row live, ages under 15 s while moving, arrow tracks the real partner</a:t>
+            </a:r>
+            <a:endParaRPr lang="en-US" sz="1100" dirty="0"/>
+          </a:p>
+        </p:txBody>
+      </p:sp>
+      <p:sp>
+        <p:nvSpPr>
+          <p:cNvPr id="21" name="Shape 19"/>
           <p:cNvSpPr/>
           <p:nvPr/>
         </p:nvSpPr>
         <p:spPr>
           <a:xfrm>
-            <a:off x="8503920" y="3941064"/>
-            <a:ext cx="3246120" cy="804672"/>
+            <a:off x="914400" y="3813048"/>
+            <a:ext cx="0" cy="128016"/>
+          </a:xfrm>
+          <a:prstGeom prst="line">
+            <a:avLst/>
+          </a:prstGeom>
+          <a:noFill/>
+          <a:ln w="28575">
+            <a:solidFill>
+              <a:srgbClr val="D9488C"/>
+            </a:solidFill>
+            <a:prstDash val="solid"/>
+            <a:tailEnd type="triangle"/>
+          </a:ln>
+        </p:spPr>
+      </p:sp>
+      <p:sp>
+        <p:nvSpPr>
+          <p:cNvPr id="22" name="Shape 20"/>
+          <p:cNvSpPr/>
+          <p:nvPr/>
+        </p:nvSpPr>
+        <p:spPr>
+          <a:xfrm>
+            <a:off x="457200" y="3941064"/>
+            <a:ext cx="7863840" cy="804672"/>
           </a:xfrm>
           <a:prstGeom prst="rect">
             <a:avLst/>
@@ -12364,7 +12994,7 @@
           </a:solidFill>
           <a:ln w="15875">
             <a:solidFill>
-              <a:srgbClr val="1F9D68"/>
+              <a:srgbClr val="D9488C"/>
             </a:solidFill>
             <a:prstDash val="solid"/>
           </a:ln>
@@ -12372,14 +13002,14 @@
       </p:sp>
       <p:sp>
         <p:nvSpPr>
-          <p:cNvPr id="33" name="Text 31"/>
-          <p:cNvSpPr txBox="1"/>
-          <p:nvPr/>
-        </p:nvSpPr>
-        <p:spPr>
-          <a:xfrm>
-            <a:off x="8641080" y="3995928"/>
-            <a:ext cx="3017520" cy="694944"/>
+          <p:cNvPr id="23" name="Text 21"/>
+          <p:cNvSpPr txBox="1"/>
+          <p:nvPr/>
+        </p:nvSpPr>
+        <p:spPr>
+          <a:xfrm>
+            <a:off x="621792" y="3995928"/>
+            <a:ext cx="1920240" cy="274320"/>
           </a:xfrm>
           <a:prstGeom prst="rect">
             <a:avLst/>
@@ -12395,128 +13025,298 @@
               <a:buNone/>
             </a:pPr>
             <a:r>
-              <a:rPr lang="en-US" sz="1150" b="1" dirty="0">
-                <a:solidFill>
-                  <a:srgbClr val="1F9D68"/>
+              <a:rPr lang="en-US" sz="1100" b="1" dirty="0">
+                <a:solidFill>
+                  <a:srgbClr val="D9488C"/>
                 </a:solidFill>
                 <a:latin typeface="Courier New" pitchFamily="34" charset="0"/>
                 <a:ea typeface="Courier New" pitchFamily="34" charset="-122"/>
                 <a:cs typeface="Courier New" pitchFamily="34" charset="-120"/>
               </a:rPr>
-              <a:t>&lt; 30 m at highway speed</a:t>
-            </a:r>
-            <a:endParaRPr lang="en-US" sz="1150" dirty="0"/>
-          </a:p>
-        </p:txBody>
-      </p:sp>
-      <p:sp>
-        <p:nvSpPr>
-          <p:cNvPr id="34" name="Shape 32"/>
+              <a:t>P3  EDGE CASES</a:t>
+            </a:r>
+            <a:endParaRPr lang="en-US" sz="1100" dirty="0"/>
+          </a:p>
+        </p:txBody>
+      </p:sp>
+      <p:sp>
+        <p:nvSpPr>
+          <p:cNvPr id="24" name="Text 22"/>
+          <p:cNvSpPr txBox="1"/>
+          <p:nvPr/>
+        </p:nvSpPr>
+        <p:spPr>
+          <a:xfrm>
+            <a:off x="621792" y="4270248"/>
+            <a:ext cx="7543800" cy="457200"/>
+          </a:xfrm>
+          <a:prstGeom prst="rect">
+            <a:avLst/>
+          </a:prstGeom>
+          <a:noFill/>
+          <a:ln/>
+        </p:spPr>
+        <p:txBody>
+          <a:bodyPr wrap="square" lIns="0" tIns="0" rIns="0" bIns="0" rtlCol="0" anchor="ctr"/>
+          <a:lstStyle/>
+          <a:p>
+            <a:pPr indent="0" marL="0">
+              <a:buNone/>
+            </a:pPr>
+            <a:r>
+              <a:rPr lang="en-US" sz="1100" dirty="0">
+                <a:solidFill>
+                  <a:srgbClr val="222A3F"/>
+                </a:solidFill>
+                <a:latin typeface="Arial" pitchFamily="34" charset="0"/>
+                <a:ea typeface="Arial" pitchFamily="34" charset="-122"/>
+                <a:cs typeface="Arial" pitchFamily="34" charset="-120"/>
+              </a:rPr>
+              <a:t>canyon streets, garage exit, one vehicle parked with no sky: ghosts must age honestly, links must self-heal</a:t>
+            </a:r>
+            <a:endParaRPr lang="en-US" sz="1100" dirty="0"/>
+          </a:p>
+        </p:txBody>
+      </p:sp>
+      <p:sp>
+        <p:nvSpPr>
+          <p:cNvPr id="25" name="Shape 23"/>
           <p:cNvSpPr/>
           <p:nvPr/>
         </p:nvSpPr>
         <p:spPr>
           <a:xfrm>
-            <a:off x="457200" y="4873752"/>
-            <a:ext cx="2103120" cy="804672"/>
+            <a:off x="8549640" y="1143000"/>
+            <a:ext cx="3200400" cy="3657600"/>
           </a:xfrm>
           <a:prstGeom prst="rect">
             <a:avLst/>
           </a:prstGeom>
           <a:solidFill>
-            <a:srgbClr val="16213D"/>
+            <a:srgbClr val="FFFFFF"/>
           </a:solidFill>
-          <a:ln/>
-        </p:spPr>
-      </p:sp>
-      <p:sp>
-        <p:nvSpPr>
-          <p:cNvPr id="35" name="Text 33"/>
-          <p:cNvSpPr txBox="1"/>
-          <p:nvPr/>
-        </p:nvSpPr>
-        <p:spPr>
-          <a:xfrm>
-            <a:off x="457200" y="4946904"/>
-            <a:ext cx="2103120" cy="365760"/>
-          </a:xfrm>
-          <a:prstGeom prst="rect">
-            <a:avLst/>
-          </a:prstGeom>
-          <a:noFill/>
-          <a:ln/>
-        </p:spPr>
-        <p:txBody>
-          <a:bodyPr wrap="square" lIns="0" tIns="0" rIns="0" bIns="0" rtlCol="0" anchor="ctr"/>
-          <a:lstStyle/>
-          <a:p>
-            <a:pPr algn="ctr" indent="0" marL="0">
-              <a:buNone/>
-            </a:pPr>
-            <a:r>
-              <a:rPr lang="en-US" sz="1300" b="1" dirty="0">
-                <a:solidFill>
-                  <a:srgbClr val="E58E1A"/>
+          <a:ln w="15875">
+            <a:solidFill>
+              <a:srgbClr val="16213D"/>
+            </a:solidFill>
+            <a:prstDash val="solid"/>
+          </a:ln>
+        </p:spPr>
+      </p:sp>
+      <p:sp>
+        <p:nvSpPr>
+          <p:cNvPr id="26" name="Text 24"/>
+          <p:cNvSpPr txBox="1"/>
+          <p:nvPr/>
+        </p:nvSpPr>
+        <p:spPr>
+          <a:xfrm>
+            <a:off x="8732520" y="1298448"/>
+            <a:ext cx="2834640" cy="3383280"/>
+          </a:xfrm>
+          <a:prstGeom prst="rect">
+            <a:avLst/>
+          </a:prstGeom>
+          <a:noFill/>
+          <a:ln/>
+        </p:spPr>
+        <p:txBody>
+          <a:bodyPr wrap="square" lIns="0" tIns="0" rIns="0" bIns="0" rtlCol="0" anchor="ctr"/>
+          <a:lstStyle/>
+          <a:p>
+            <a:pPr indent="0" marL="0">
+              <a:spcAft>
+                <a:spcPts val="600"/>
+              </a:spcAft>
+              <a:buNone/>
+            </a:pPr>
+            <a:r>
+              <a:rPr lang="en-US" sz="1100" b="1" dirty="0">
+                <a:solidFill>
+                  <a:srgbClr val="16213D"/>
                 </a:solidFill>
                 <a:latin typeface="Courier New" pitchFamily="34" charset="0"/>
                 <a:ea typeface="Courier New" pitchFamily="34" charset="-122"/>
                 <a:cs typeface="Courier New" pitchFamily="34" charset="-120"/>
               </a:rPr>
-              <a:t>CHUTIL</a:t>
-            </a:r>
-            <a:endParaRPr lang="en-US" sz="1300" dirty="0"/>
-          </a:p>
-        </p:txBody>
-      </p:sp>
-      <p:sp>
-        <p:nvSpPr>
-          <p:cNvPr id="36" name="Text 34"/>
-          <p:cNvSpPr txBox="1"/>
-          <p:nvPr/>
-        </p:nvSpPr>
-        <p:spPr>
-          <a:xfrm>
-            <a:off x="457200" y="5312664"/>
-            <a:ext cx="2103120" cy="274320"/>
-          </a:xfrm>
-          <a:prstGeom prst="rect">
-            <a:avLst/>
-          </a:prstGeom>
-          <a:noFill/>
-          <a:ln/>
-        </p:spPr>
-        <p:txBody>
-          <a:bodyPr wrap="square" lIns="0" tIns="0" rIns="0" bIns="0" rtlCol="0" anchor="ctr"/>
-          <a:lstStyle/>
-          <a:p>
-            <a:pPr algn="ctr" indent="0" marL="0">
-              <a:buNone/>
-            </a:pPr>
-            <a:r>
-              <a:rPr lang="en-US" sz="900" dirty="0">
-                <a:solidFill>
-                  <a:srgbClr val="C9D8F0"/>
+              <a:t>LOGGED PER PACKET</a:t>
+            </a:r>
+            <a:endParaRPr lang="en-US" sz="1100" dirty="0"/>
+          </a:p>
+          <a:p>
+            <a:pPr indent="0" marL="0">
+              <a:spcAft>
+                <a:spcPts val="600"/>
+              </a:spcAft>
+              <a:buNone/>
+            </a:pPr>
+            <a:r>
+              <a:rPr lang="en-US" sz="1100" dirty="0">
+                <a:solidFill>
+                  <a:srgbClr val="222A3F"/>
+                </a:solidFill>
+                <a:latin typeface="Courier New" pitchFamily="34" charset="0"/>
+                <a:ea typeface="Courier New" pitchFamily="34" charset="-122"/>
+                <a:cs typeface="Courier New" pitchFamily="34" charset="-120"/>
+              </a:rPr>
+              <a:t>timestamp</a:t>
+            </a:r>
+            <a:endParaRPr lang="en-US" sz="1100" dirty="0"/>
+          </a:p>
+          <a:p>
+            <a:pPr indent="0" marL="0">
+              <a:spcAft>
+                <a:spcPts val="600"/>
+              </a:spcAft>
+              <a:buNone/>
+            </a:pPr>
+            <a:r>
+              <a:rPr lang="en-US" sz="1100" dirty="0">
+                <a:solidFill>
+                  <a:srgbClr val="222A3F"/>
+                </a:solidFill>
+                <a:latin typeface="Courier New" pitchFamily="34" charset="0"/>
+                <a:ea typeface="Courier New" pitchFamily="34" charset="-122"/>
+                <a:cs typeface="Courier New" pitchFamily="34" charset="-120"/>
+              </a:rPr>
+              <a:t>node id</a:t>
+            </a:r>
+            <a:endParaRPr lang="en-US" sz="1100" dirty="0"/>
+          </a:p>
+          <a:p>
+            <a:pPr indent="0" marL="0">
+              <a:spcAft>
+                <a:spcPts val="600"/>
+              </a:spcAft>
+              <a:buNone/>
+            </a:pPr>
+            <a:r>
+              <a:rPr lang="en-US" sz="1100" dirty="0">
+                <a:solidFill>
+                  <a:srgbClr val="222A3F"/>
+                </a:solidFill>
+                <a:latin typeface="Courier New" pitchFamily="34" charset="0"/>
+                <a:ea typeface="Courier New" pitchFamily="34" charset="-122"/>
+                <a:cs typeface="Courier New" pitchFamily="34" charset="-120"/>
+              </a:rPr>
+              <a:t>RSSI  [dBm]</a:t>
+            </a:r>
+            <a:endParaRPr lang="en-US" sz="1100" dirty="0"/>
+          </a:p>
+          <a:p>
+            <a:pPr indent="0" marL="0">
+              <a:spcAft>
+                <a:spcPts val="600"/>
+              </a:spcAft>
+              <a:buNone/>
+            </a:pPr>
+            <a:r>
+              <a:rPr lang="en-US" sz="1100" dirty="0">
+                <a:solidFill>
+                  <a:srgbClr val="222A3F"/>
+                </a:solidFill>
+                <a:latin typeface="Courier New" pitchFamily="34" charset="0"/>
+                <a:ea typeface="Courier New" pitchFamily="34" charset="-122"/>
+                <a:cs typeface="Courier New" pitchFamily="34" charset="-120"/>
+              </a:rPr>
+              <a:t>SNR   [dB]</a:t>
+            </a:r>
+            <a:endParaRPr lang="en-US" sz="1100" dirty="0"/>
+          </a:p>
+          <a:p>
+            <a:pPr indent="0" marL="0">
+              <a:spcAft>
+                <a:spcPts val="600"/>
+              </a:spcAft>
+              <a:buNone/>
+            </a:pPr>
+            <a:r>
+              <a:rPr lang="en-US" sz="1100" dirty="0">
+                <a:solidFill>
+                  <a:srgbClr val="222A3F"/>
+                </a:solidFill>
+                <a:latin typeface="Courier New" pitchFamily="34" charset="0"/>
+                <a:ea typeface="Courier New" pitchFamily="34" charset="-122"/>
+                <a:cs typeface="Courier New" pitchFamily="34" charset="-120"/>
+              </a:rPr>
+              <a:t>distance at receipt</a:t>
+            </a:r>
+            <a:endParaRPr lang="en-US" sz="1100" dirty="0"/>
+          </a:p>
+          <a:p>
+            <a:pPr indent="0" marL="0">
+              <a:spcAft>
+                <a:spcPts val="600"/>
+              </a:spcAft>
+              <a:buNone/>
+            </a:pPr>
+            <a:r>
+              <a:rPr lang="en-US" sz="1100" dirty="0">
+                <a:solidFill>
+                  <a:srgbClr val="222A3F"/>
+                </a:solidFill>
+                <a:latin typeface="Courier New" pitchFamily="34" charset="0"/>
+                <a:ea typeface="Courier New" pitchFamily="34" charset="-122"/>
+                <a:cs typeface="Courier New" pitchFamily="34" charset="-120"/>
+              </a:rPr>
+              <a:t>age when displayed</a:t>
+            </a:r>
+            <a:endParaRPr lang="en-US" sz="1100" dirty="0"/>
+          </a:p>
+          <a:p>
+            <a:pPr indent="0" marL="0">
+              <a:buNone/>
+            </a:pPr>
+            <a:r>
+              <a:rPr lang="en-US" sz="1050" dirty="0">
+                <a:solidFill>
+                  <a:srgbClr val="5E6B85"/>
                 </a:solidFill>
                 <a:latin typeface="Arial" pitchFamily="34" charset="0"/>
                 <a:ea typeface="Arial" pitchFamily="34" charset="-122"/>
                 <a:cs typeface="Arial" pitchFamily="34" charset="-120"/>
               </a:rPr>
-              <a:t>channel citizenship</a:t>
-            </a:r>
-            <a:endParaRPr lang="en-US" sz="900" dirty="0"/>
-          </a:p>
-        </p:txBody>
-      </p:sp>
-      <p:sp>
-        <p:nvSpPr>
-          <p:cNvPr id="37" name="Text 35"/>
-          <p:cNvSpPr txBox="1"/>
-          <p:nvPr/>
-        </p:nvSpPr>
-        <p:spPr>
-          <a:xfrm>
-            <a:off x="2743200" y="4928616"/>
-            <a:ext cx="5577840" cy="694944"/>
+              <a:t>Harness: serial capture on the display side; one dated log per test in testing/.</a:t>
+            </a:r>
+            <a:endParaRPr lang="en-US" sz="1100" dirty="0"/>
+          </a:p>
+        </p:txBody>
+      </p:sp>
+      <p:sp>
+        <p:nvSpPr>
+          <p:cNvPr id="27" name="Shape 25"/>
+          <p:cNvSpPr/>
+          <p:nvPr/>
+        </p:nvSpPr>
+        <p:spPr>
+          <a:xfrm>
+            <a:off x="457200" y="5120640"/>
+            <a:ext cx="11292840" cy="960120"/>
+          </a:xfrm>
+          <a:prstGeom prst="rect">
+            <a:avLst/>
+          </a:prstGeom>
+          <a:solidFill>
+            <a:srgbClr val="F2F5FA"/>
+          </a:solidFill>
+          <a:ln w="9525">
+            <a:solidFill>
+              <a:srgbClr val="9AA7BE"/>
+            </a:solidFill>
+            <a:prstDash val="solid"/>
+          </a:ln>
+        </p:spPr>
+      </p:sp>
+      <p:sp>
+        <p:nvSpPr>
+          <p:cNvPr id="28" name="Text 26"/>
+          <p:cNvSpPr txBox="1"/>
+          <p:nvPr/>
+        </p:nvSpPr>
+        <p:spPr>
+          <a:xfrm>
+            <a:off x="731520" y="5230368"/>
+            <a:ext cx="10744200" cy="731520"/>
           </a:xfrm>
           <a:prstGeom prst="rect">
             <a:avLst/>
@@ -12532,7 +13332,7 @@
               <a:buNone/>
             </a:pPr>
             <a:r>
-              <a:rPr lang="en-US" sz="1200" dirty="0">
+              <a:rPr lang="en-US" sz="1250" dirty="0">
                 <a:solidFill>
                   <a:srgbClr val="222A3F"/>
                 </a:solidFill>
@@ -12540,112 +13340,9 @@
                 <a:ea typeface="Arial" pitchFamily="34" charset="-122"/>
                 <a:cs typeface="Arial" pitchFamily="34" charset="-120"/>
               </a:rPr>
-              <a:t>utilization with both radios broadcasting</a:t>
-            </a:r>
-            <a:endParaRPr lang="en-US" sz="1200" dirty="0"/>
-          </a:p>
-        </p:txBody>
-      </p:sp>
-      <p:sp>
-        <p:nvSpPr>
-          <p:cNvPr id="38" name="Shape 36"/>
-          <p:cNvSpPr/>
-          <p:nvPr/>
-        </p:nvSpPr>
-        <p:spPr>
-          <a:xfrm>
-            <a:off x="8503920" y="4873752"/>
-            <a:ext cx="3246120" cy="804672"/>
-          </a:xfrm>
-          <a:prstGeom prst="rect">
-            <a:avLst/>
-          </a:prstGeom>
-          <a:solidFill>
-            <a:srgbClr val="F2F5FA"/>
-          </a:solidFill>
-          <a:ln w="15875">
-            <a:solidFill>
-              <a:srgbClr val="1F9D68"/>
-            </a:solidFill>
-            <a:prstDash val="solid"/>
-          </a:ln>
-        </p:spPr>
-      </p:sp>
-      <p:sp>
-        <p:nvSpPr>
-          <p:cNvPr id="39" name="Text 37"/>
-          <p:cNvSpPr txBox="1"/>
-          <p:nvPr/>
-        </p:nvSpPr>
-        <p:spPr>
-          <a:xfrm>
-            <a:off x="8641080" y="4928616"/>
-            <a:ext cx="3017520" cy="694944"/>
-          </a:xfrm>
-          <a:prstGeom prst="rect">
-            <a:avLst/>
-          </a:prstGeom>
-          <a:noFill/>
-          <a:ln/>
-        </p:spPr>
-        <p:txBody>
-          <a:bodyPr wrap="square" lIns="0" tIns="0" rIns="0" bIns="0" rtlCol="0" anchor="ctr"/>
-          <a:lstStyle/>
-          <a:p>
-            <a:pPr indent="0" marL="0">
-              <a:buNone/>
-            </a:pPr>
-            <a:r>
-              <a:rPr lang="en-US" sz="1150" b="1" dirty="0">
-                <a:solidFill>
-                  <a:srgbClr val="1F9D68"/>
-                </a:solidFill>
-                <a:latin typeface="Courier New" pitchFamily="34" charset="0"/>
-                <a:ea typeface="Courier New" pitchFamily="34" charset="-122"/>
-                <a:cs typeface="Courier New" pitchFamily="34" charset="-120"/>
-              </a:rPr>
-              <a:t>&lt; 10% steady state</a:t>
-            </a:r>
-            <a:endParaRPr lang="en-US" sz="1150" dirty="0"/>
-          </a:p>
-        </p:txBody>
-      </p:sp>
-      <p:sp>
-        <p:nvSpPr>
-          <p:cNvPr id="40" name="Text 38"/>
-          <p:cNvSpPr txBox="1"/>
-          <p:nvPr/>
-        </p:nvSpPr>
-        <p:spPr>
-          <a:xfrm>
-            <a:off x="457200" y="5870448"/>
-            <a:ext cx="11292840" cy="274320"/>
-          </a:xfrm>
-          <a:prstGeom prst="rect">
-            <a:avLst/>
-          </a:prstGeom>
-          <a:noFill/>
-          <a:ln/>
-        </p:spPr>
-        <p:txBody>
-          <a:bodyPr wrap="square" lIns="0" tIns="0" rIns="0" bIns="0" rtlCol="0" anchor="ctr"/>
-          <a:lstStyle/>
-          <a:p>
-            <a:pPr indent="0" marL="0">
-              <a:buNone/>
-            </a:pPr>
-            <a:r>
-              <a:rPr lang="en-US" sz="1000" b="1" dirty="0">
-                <a:solidFill>
-                  <a:srgbClr val="5E6B85"/>
-                </a:solidFill>
-                <a:latin typeface="Courier New" pitchFamily="34" charset="0"/>
-                <a:ea typeface="Courier New" pitchFamily="34" charset="-122"/>
-                <a:cs typeface="Courier New" pitchFamily="34" charset="-120"/>
-              </a:rPr>
-              <a:t>TARGETS SET BEFORE THE FIRST TWO-RADIO PACKET. NEXT REVIEW REPORTS EACH ROW, PASS OR FAIL.</a:t>
-            </a:r>
-            <a:endParaRPr lang="en-US" sz="1000" dirty="0"/>
+              <a:t>Every phase inherits its checks from the constraints ledger: the sky-view rule, the ignition-on rule, the one-client rule, the adapter rule. The ledger was the test plan all along.</a:t>
+            </a:r>
+            <a:endParaRPr lang="en-US" sz="1250" dirty="0"/>
           </a:p>
         </p:txBody>
       </p:sp>
@@ -12798,7 +13495,7 @@
                 <a:ea typeface="Courier New" pitchFamily="34" charset="-122"/>
                 <a:cs typeface="Courier New" pitchFamily="34" charset="-120"/>
               </a:rPr>
-              <a:t>STATUS AND NEXT STEPS</a:t>
+              <a:t>METRICS DECLARED</a:t>
             </a:r>
             <a:endParaRPr lang="en-US" sz="900" dirty="0"/>
           </a:p>
@@ -12837,7 +13534,7 @@
                 <a:ea typeface="Courier New" pitchFamily="34" charset="-122"/>
                 <a:cs typeface="Courier New" pitchFamily="34" charset="-120"/>
               </a:rPr>
-              <a:t>SHEET 09/10  REV D  2026-09-16</a:t>
+              <a:t>SHEET 09/11  REV D  2026-09-16</a:t>
             </a:r>
             <a:endParaRPr lang="en-US" sz="900" dirty="0"/>
           </a:p>
@@ -12845,7 +13542,71 @@
       </p:sp>
       <p:sp>
         <p:nvSpPr>
-          <p:cNvPr id="7" name="Text 5"/>
+          <p:cNvPr id="7" name="Shape 5"/>
+          <p:cNvSpPr/>
+          <p:nvPr/>
+        </p:nvSpPr>
+        <p:spPr>
+          <a:xfrm>
+            <a:off x="9646920" y="347472"/>
+            <a:ext cx="2148840" cy="420624"/>
+          </a:xfrm>
+          <a:prstGeom prst="rect">
+            <a:avLst/>
+          </a:prstGeom>
+          <a:solidFill>
+            <a:srgbClr val="FFFFFF"/>
+          </a:solidFill>
+          <a:ln w="19050">
+            <a:solidFill>
+              <a:srgbClr val="D9488C"/>
+            </a:solidFill>
+            <a:prstDash val="solid"/>
+          </a:ln>
+        </p:spPr>
+      </p:sp>
+      <p:sp>
+        <p:nvSpPr>
+          <p:cNvPr id="8" name="Text 6"/>
+          <p:cNvSpPr txBox="1"/>
+          <p:nvPr/>
+        </p:nvSpPr>
+        <p:spPr>
+          <a:xfrm>
+            <a:off x="9646920" y="402336"/>
+            <a:ext cx="2148840" cy="310896"/>
+          </a:xfrm>
+          <a:prstGeom prst="rect">
+            <a:avLst/>
+          </a:prstGeom>
+          <a:noFill/>
+          <a:ln/>
+        </p:spPr>
+        <p:txBody>
+          <a:bodyPr wrap="square" lIns="0" tIns="0" rIns="0" bIns="0" rtlCol="0" anchor="ctr"/>
+          <a:lstStyle/>
+          <a:p>
+            <a:pPr algn="ctr" indent="0" marL="0">
+              <a:buNone/>
+            </a:pPr>
+            <a:r>
+              <a:rPr lang="en-US" sz="1100" b="1" dirty="0">
+                <a:solidFill>
+                  <a:srgbClr val="D9488C"/>
+                </a:solidFill>
+                <a:latin typeface="Courier New" pitchFamily="34" charset="0"/>
+                <a:ea typeface="Courier New" pitchFamily="34" charset="-122"/>
+                <a:cs typeface="Courier New" pitchFamily="34" charset="-120"/>
+              </a:rPr>
+              <a:t>OWNER: CANNON</a:t>
+            </a:r>
+            <a:endParaRPr lang="en-US" sz="1100" dirty="0"/>
+          </a:p>
+        </p:txBody>
+      </p:sp>
+      <p:sp>
+        <p:nvSpPr>
+          <p:cNvPr id="9" name="Text 7"/>
           <p:cNvSpPr txBox="1"/>
           <p:nvPr/>
         </p:nvSpPr>
@@ -12876,7 +13637,7 @@
                 <a:ea typeface="Arial" pitchFamily="34" charset="-122"/>
                 <a:cs typeface="Arial" pitchFamily="34" charset="-120"/>
               </a:rPr>
-              <a:t>STATUS AND WHAT COMES NEXT</a:t>
+              <a:t>THE NUMBERS THAT WILL JUDGE THE SYSTEM</a:t>
             </a:r>
             <a:endParaRPr lang="en-US" sz="2300" dirty="0"/>
           </a:p>
@@ -12884,14 +13645,151 @@
       </p:sp>
       <p:sp>
         <p:nvSpPr>
-          <p:cNvPr id="8" name="Shape 6"/>
+          <p:cNvPr id="10" name="Shape 8"/>
           <p:cNvSpPr/>
           <p:nvPr/>
         </p:nvSpPr>
         <p:spPr>
           <a:xfrm>
-            <a:off x="457200" y="1097280"/>
-            <a:ext cx="2688336" cy="1371600"/>
+            <a:off x="457200" y="1143000"/>
+            <a:ext cx="2103120" cy="804672"/>
+          </a:xfrm>
+          <a:prstGeom prst="rect">
+            <a:avLst/>
+          </a:prstGeom>
+          <a:solidFill>
+            <a:srgbClr val="16213D"/>
+          </a:solidFill>
+          <a:ln/>
+        </p:spPr>
+      </p:sp>
+      <p:sp>
+        <p:nvSpPr>
+          <p:cNvPr id="11" name="Text 9"/>
+          <p:cNvSpPr txBox="1"/>
+          <p:nvPr/>
+        </p:nvSpPr>
+        <p:spPr>
+          <a:xfrm>
+            <a:off x="457200" y="1216152"/>
+            <a:ext cx="2103120" cy="365760"/>
+          </a:xfrm>
+          <a:prstGeom prst="rect">
+            <a:avLst/>
+          </a:prstGeom>
+          <a:noFill/>
+          <a:ln/>
+        </p:spPr>
+        <p:txBody>
+          <a:bodyPr wrap="square" lIns="0" tIns="0" rIns="0" bIns="0" rtlCol="0" anchor="ctr"/>
+          <a:lstStyle/>
+          <a:p>
+            <a:pPr algn="ctr" indent="0" marL="0">
+              <a:buNone/>
+            </a:pPr>
+            <a:r>
+              <a:rPr lang="en-US" sz="1300" b="1" dirty="0">
+                <a:solidFill>
+                  <a:srgbClr val="E58E1A"/>
+                </a:solidFill>
+                <a:latin typeface="Courier New" pitchFamily="34" charset="0"/>
+                <a:ea typeface="Courier New" pitchFamily="34" charset="-122"/>
+                <a:cs typeface="Courier New" pitchFamily="34" charset="-120"/>
+              </a:rPr>
+              <a:t>PDR</a:t>
+            </a:r>
+            <a:endParaRPr lang="en-US" sz="1300" dirty="0"/>
+          </a:p>
+        </p:txBody>
+      </p:sp>
+      <p:sp>
+        <p:nvSpPr>
+          <p:cNvPr id="12" name="Text 10"/>
+          <p:cNvSpPr txBox="1"/>
+          <p:nvPr/>
+        </p:nvSpPr>
+        <p:spPr>
+          <a:xfrm>
+            <a:off x="457200" y="1581912"/>
+            <a:ext cx="2103120" cy="274320"/>
+          </a:xfrm>
+          <a:prstGeom prst="rect">
+            <a:avLst/>
+          </a:prstGeom>
+          <a:noFill/>
+          <a:ln/>
+        </p:spPr>
+        <p:txBody>
+          <a:bodyPr wrap="square" lIns="0" tIns="0" rIns="0" bIns="0" rtlCol="0" anchor="ctr"/>
+          <a:lstStyle/>
+          <a:p>
+            <a:pPr algn="ctr" indent="0" marL="0">
+              <a:buNone/>
+            </a:pPr>
+            <a:r>
+              <a:rPr lang="en-US" sz="900" dirty="0">
+                <a:solidFill>
+                  <a:srgbClr val="C9D8F0"/>
+                </a:solidFill>
+                <a:latin typeface="Arial" pitchFamily="34" charset="0"/>
+                <a:ea typeface="Arial" pitchFamily="34" charset="-122"/>
+                <a:cs typeface="Arial" pitchFamily="34" charset="-120"/>
+              </a:rPr>
+              <a:t>packet delivery ratio</a:t>
+            </a:r>
+            <a:endParaRPr lang="en-US" sz="900" dirty="0"/>
+          </a:p>
+        </p:txBody>
+      </p:sp>
+      <p:sp>
+        <p:nvSpPr>
+          <p:cNvPr id="13" name="Text 11"/>
+          <p:cNvSpPr txBox="1"/>
+          <p:nvPr/>
+        </p:nvSpPr>
+        <p:spPr>
+          <a:xfrm>
+            <a:off x="2743200" y="1197864"/>
+            <a:ext cx="5577840" cy="694944"/>
+          </a:xfrm>
+          <a:prstGeom prst="rect">
+            <a:avLst/>
+          </a:prstGeom>
+          <a:noFill/>
+          <a:ln/>
+        </p:spPr>
+        <p:txBody>
+          <a:bodyPr wrap="square" lIns="0" tIns="0" rIns="0" bIns="0" rtlCol="0" anchor="ctr"/>
+          <a:lstStyle/>
+          <a:p>
+            <a:pPr indent="0" marL="0">
+              <a:buNone/>
+            </a:pPr>
+            <a:r>
+              <a:rPr lang="en-US" sz="1200" dirty="0">
+                <a:solidFill>
+                  <a:srgbClr val="222A3F"/>
+                </a:solidFill>
+                <a:latin typeface="Arial" pitchFamily="34" charset="0"/>
+                <a:ea typeface="Arial" pitchFamily="34" charset="-122"/>
+                <a:cs typeface="Arial" pitchFamily="34" charset="-120"/>
+              </a:rPr>
+              <a:t>received / expected broadcasts per interval</a:t>
+            </a:r>
+            <a:endParaRPr lang="en-US" sz="1200" dirty="0"/>
+          </a:p>
+        </p:txBody>
+      </p:sp>
+      <p:sp>
+        <p:nvSpPr>
+          <p:cNvPr id="14" name="Shape 12"/>
+          <p:cNvSpPr/>
+          <p:nvPr/>
+        </p:nvSpPr>
+        <p:spPr>
+          <a:xfrm>
+            <a:off x="8503920" y="1143000"/>
+            <a:ext cx="3246120" cy="804672"/>
           </a:xfrm>
           <a:prstGeom prst="rect">
             <a:avLst/>
@@ -12899,9 +13797,9 @@
           <a:solidFill>
             <a:srgbClr val="F2F5FA"/>
           </a:solidFill>
-          <a:ln w="9525">
+          <a:ln w="15875">
             <a:solidFill>
-              <a:srgbClr val="9AA7BE"/>
+              <a:srgbClr val="1F9D68"/>
             </a:solidFill>
             <a:prstDash val="solid"/>
           </a:ln>
@@ -12909,14 +13807,14 @@
       </p:sp>
       <p:sp>
         <p:nvSpPr>
-          <p:cNvPr id="9" name="Text 7"/>
-          <p:cNvSpPr txBox="1"/>
-          <p:nvPr/>
-        </p:nvSpPr>
-        <p:spPr>
-          <a:xfrm>
-            <a:off x="640080" y="1207008"/>
-            <a:ext cx="2377440" cy="548640"/>
+          <p:cNvPr id="15" name="Text 13"/>
+          <p:cNvSpPr txBox="1"/>
+          <p:nvPr/>
+        </p:nvSpPr>
+        <p:spPr>
+          <a:xfrm>
+            <a:off x="8641080" y="1197864"/>
+            <a:ext cx="3017520" cy="694944"/>
           </a:xfrm>
           <a:prstGeom prst="rect">
             <a:avLst/>
@@ -12932,30 +13830,128 @@
               <a:buNone/>
             </a:pPr>
             <a:r>
-              <a:rPr lang="en-US" sz="2700" b="1" dirty="0">
-                <a:solidFill>
-                  <a:srgbClr val="16213D"/>
+              <a:rPr lang="en-US" sz="1150" b="1" dirty="0">
+                <a:solidFill>
+                  <a:srgbClr val="1F9D68"/>
+                </a:solidFill>
+                <a:latin typeface="Courier New" pitchFamily="34" charset="0"/>
+                <a:ea typeface="Courier New" pitchFamily="34" charset="-122"/>
+                <a:cs typeface="Courier New" pitchFamily="34" charset="-120"/>
+              </a:rPr>
+              <a:t>&gt; 90% inside working range</a:t>
+            </a:r>
+            <a:endParaRPr lang="en-US" sz="1150" dirty="0"/>
+          </a:p>
+        </p:txBody>
+      </p:sp>
+      <p:sp>
+        <p:nvSpPr>
+          <p:cNvPr id="16" name="Shape 14"/>
+          <p:cNvSpPr/>
+          <p:nvPr/>
+        </p:nvSpPr>
+        <p:spPr>
+          <a:xfrm>
+            <a:off x="457200" y="2075688"/>
+            <a:ext cx="2103120" cy="804672"/>
+          </a:xfrm>
+          <a:prstGeom prst="rect">
+            <a:avLst/>
+          </a:prstGeom>
+          <a:solidFill>
+            <a:srgbClr val="16213D"/>
+          </a:solidFill>
+          <a:ln/>
+        </p:spPr>
+      </p:sp>
+      <p:sp>
+        <p:nvSpPr>
+          <p:cNvPr id="17" name="Text 15"/>
+          <p:cNvSpPr txBox="1"/>
+          <p:nvPr/>
+        </p:nvSpPr>
+        <p:spPr>
+          <a:xfrm>
+            <a:off x="457200" y="2148840"/>
+            <a:ext cx="2103120" cy="365760"/>
+          </a:xfrm>
+          <a:prstGeom prst="rect">
+            <a:avLst/>
+          </a:prstGeom>
+          <a:noFill/>
+          <a:ln/>
+        </p:spPr>
+        <p:txBody>
+          <a:bodyPr wrap="square" lIns="0" tIns="0" rIns="0" bIns="0" rtlCol="0" anchor="ctr"/>
+          <a:lstStyle/>
+          <a:p>
+            <a:pPr algn="ctr" indent="0" marL="0">
+              <a:buNone/>
+            </a:pPr>
+            <a:r>
+              <a:rPr lang="en-US" sz="1300" b="1" dirty="0">
+                <a:solidFill>
+                  <a:srgbClr val="E58E1A"/>
+                </a:solidFill>
+                <a:latin typeface="Courier New" pitchFamily="34" charset="0"/>
+                <a:ea typeface="Courier New" pitchFamily="34" charset="-122"/>
+                <a:cs typeface="Courier New" pitchFamily="34" charset="-120"/>
+              </a:rPr>
+              <a:t>AGE p95</a:t>
+            </a:r>
+            <a:endParaRPr lang="en-US" sz="1300" dirty="0"/>
+          </a:p>
+        </p:txBody>
+      </p:sp>
+      <p:sp>
+        <p:nvSpPr>
+          <p:cNvPr id="18" name="Text 16"/>
+          <p:cNvSpPr txBox="1"/>
+          <p:nvPr/>
+        </p:nvSpPr>
+        <p:spPr>
+          <a:xfrm>
+            <a:off x="457200" y="2514600"/>
+            <a:ext cx="2103120" cy="274320"/>
+          </a:xfrm>
+          <a:prstGeom prst="rect">
+            <a:avLst/>
+          </a:prstGeom>
+          <a:noFill/>
+          <a:ln/>
+        </p:spPr>
+        <p:txBody>
+          <a:bodyPr wrap="square" lIns="0" tIns="0" rIns="0" bIns="0" rtlCol="0" anchor="ctr"/>
+          <a:lstStyle/>
+          <a:p>
+            <a:pPr algn="ctr" indent="0" marL="0">
+              <a:buNone/>
+            </a:pPr>
+            <a:r>
+              <a:rPr lang="en-US" sz="900" dirty="0">
+                <a:solidFill>
+                  <a:srgbClr val="C9D8F0"/>
                 </a:solidFill>
                 <a:latin typeface="Arial" pitchFamily="34" charset="0"/>
                 <a:ea typeface="Arial" pitchFamily="34" charset="-122"/>
                 <a:cs typeface="Arial" pitchFamily="34" charset="-120"/>
               </a:rPr>
-              <a:t>42%</a:t>
-            </a:r>
-            <a:endParaRPr lang="en-US" sz="2700" dirty="0"/>
-          </a:p>
-        </p:txBody>
-      </p:sp>
-      <p:sp>
-        <p:nvSpPr>
-          <p:cNvPr id="10" name="Text 8"/>
-          <p:cNvSpPr txBox="1"/>
-          <p:nvPr/>
-        </p:nvSpPr>
-        <p:spPr>
-          <a:xfrm>
-            <a:off x="640080" y="1783080"/>
-            <a:ext cx="2377440" cy="594360"/>
+              <a:t>freshness</a:t>
+            </a:r>
+            <a:endParaRPr lang="en-US" sz="900" dirty="0"/>
+          </a:p>
+        </p:txBody>
+      </p:sp>
+      <p:sp>
+        <p:nvSpPr>
+          <p:cNvPr id="19" name="Text 17"/>
+          <p:cNvSpPr txBox="1"/>
+          <p:nvPr/>
+        </p:nvSpPr>
+        <p:spPr>
+          <a:xfrm>
+            <a:off x="2743200" y="2130552"/>
+            <a:ext cx="5577840" cy="694944"/>
           </a:xfrm>
           <a:prstGeom prst="rect">
             <a:avLst/>
@@ -12971,30 +13967,30 @@
               <a:buNone/>
             </a:pPr>
             <a:r>
-              <a:rPr lang="en-US" sz="1050" dirty="0">
-                <a:solidFill>
-                  <a:srgbClr val="5E6B85"/>
+              <a:rPr lang="en-US" sz="1200" dirty="0">
+                <a:solidFill>
+                  <a:srgbClr val="222A3F"/>
                 </a:solidFill>
                 <a:latin typeface="Arial" pitchFamily="34" charset="0"/>
                 <a:ea typeface="Arial" pitchFamily="34" charset="-122"/>
                 <a:cs typeface="Arial" pitchFamily="34" charset="-120"/>
               </a:rPr>
-              <a:t>of tasks complete against a 25% week-four target</a:t>
-            </a:r>
-            <a:endParaRPr lang="en-US" sz="1050" dirty="0"/>
-          </a:p>
-        </p:txBody>
-      </p:sp>
-      <p:sp>
-        <p:nvSpPr>
-          <p:cNvPr id="11" name="Shape 9"/>
+              <a:t>95th percentile of displayed partner age</a:t>
+            </a:r>
+            <a:endParaRPr lang="en-US" sz="1200" dirty="0"/>
+          </a:p>
+        </p:txBody>
+      </p:sp>
+      <p:sp>
+        <p:nvSpPr>
+          <p:cNvPr id="20" name="Shape 18"/>
           <p:cNvSpPr/>
           <p:nvPr/>
         </p:nvSpPr>
         <p:spPr>
           <a:xfrm>
-            <a:off x="3328416" y="1097280"/>
-            <a:ext cx="2688336" cy="1371600"/>
+            <a:off x="8503920" y="2075688"/>
+            <a:ext cx="3246120" cy="804672"/>
           </a:xfrm>
           <a:prstGeom prst="rect">
             <a:avLst/>
@@ -13002,9 +13998,9 @@
           <a:solidFill>
             <a:srgbClr val="F2F5FA"/>
           </a:solidFill>
-          <a:ln w="9525">
+          <a:ln w="15875">
             <a:solidFill>
-              <a:srgbClr val="9AA7BE"/>
+              <a:srgbClr val="1F9D68"/>
             </a:solidFill>
             <a:prstDash val="solid"/>
           </a:ln>
@@ -13012,14 +14008,14 @@
       </p:sp>
       <p:sp>
         <p:nvSpPr>
-          <p:cNvPr id="12" name="Text 10"/>
-          <p:cNvSpPr txBox="1"/>
-          <p:nvPr/>
-        </p:nvSpPr>
-        <p:spPr>
-          <a:xfrm>
-            <a:off x="3511296" y="1207008"/>
-            <a:ext cx="2377440" cy="548640"/>
+          <p:cNvPr id="21" name="Text 19"/>
+          <p:cNvSpPr txBox="1"/>
+          <p:nvPr/>
+        </p:nvSpPr>
+        <p:spPr>
+          <a:xfrm>
+            <a:off x="8641080" y="2130552"/>
+            <a:ext cx="3017520" cy="694944"/>
           </a:xfrm>
           <a:prstGeom prst="rect">
             <a:avLst/>
@@ -13035,30 +14031,128 @@
               <a:buNone/>
             </a:pPr>
             <a:r>
-              <a:rPr lang="en-US" sz="2700" b="1" dirty="0">
-                <a:solidFill>
-                  <a:srgbClr val="16213D"/>
+              <a:rPr lang="en-US" sz="1150" b="1" dirty="0">
+                <a:solidFill>
+                  <a:srgbClr val="1F9D68"/>
+                </a:solidFill>
+                <a:latin typeface="Courier New" pitchFamily="34" charset="0"/>
+                <a:ea typeface="Courier New" pitchFamily="34" charset="-122"/>
+                <a:cs typeface="Courier New" pitchFamily="34" charset="-120"/>
+              </a:rPr>
+              <a:t>&lt; 25 s while both move</a:t>
+            </a:r>
+            <a:endParaRPr lang="en-US" sz="1150" dirty="0"/>
+          </a:p>
+        </p:txBody>
+      </p:sp>
+      <p:sp>
+        <p:nvSpPr>
+          <p:cNvPr id="22" name="Shape 20"/>
+          <p:cNvSpPr/>
+          <p:nvPr/>
+        </p:nvSpPr>
+        <p:spPr>
+          <a:xfrm>
+            <a:off x="457200" y="3008376"/>
+            <a:ext cx="2103120" cy="804672"/>
+          </a:xfrm>
+          <a:prstGeom prst="rect">
+            <a:avLst/>
+          </a:prstGeom>
+          <a:solidFill>
+            <a:srgbClr val="16213D"/>
+          </a:solidFill>
+          <a:ln/>
+        </p:spPr>
+      </p:sp>
+      <p:sp>
+        <p:nvSpPr>
+          <p:cNvPr id="23" name="Text 21"/>
+          <p:cNvSpPr txBox="1"/>
+          <p:nvPr/>
+        </p:nvSpPr>
+        <p:spPr>
+          <a:xfrm>
+            <a:off x="457200" y="3081528"/>
+            <a:ext cx="2103120" cy="365760"/>
+          </a:xfrm>
+          <a:prstGeom prst="rect">
+            <a:avLst/>
+          </a:prstGeom>
+          <a:noFill/>
+          <a:ln/>
+        </p:spPr>
+        <p:txBody>
+          <a:bodyPr wrap="square" lIns="0" tIns="0" rIns="0" bIns="0" rtlCol="0" anchor="ctr"/>
+          <a:lstStyle/>
+          <a:p>
+            <a:pPr algn="ctr" indent="0" marL="0">
+              <a:buNone/>
+            </a:pPr>
+            <a:r>
+              <a:rPr lang="en-US" sz="1300" b="1" dirty="0">
+                <a:solidFill>
+                  <a:srgbClr val="E58E1A"/>
+                </a:solidFill>
+                <a:latin typeface="Courier New" pitchFamily="34" charset="0"/>
+                <a:ea typeface="Courier New" pitchFamily="34" charset="-122"/>
+                <a:cs typeface="Courier New" pitchFamily="34" charset="-120"/>
+              </a:rPr>
+              <a:t>RECONNECT</a:t>
+            </a:r>
+            <a:endParaRPr lang="en-US" sz="1300" dirty="0"/>
+          </a:p>
+        </p:txBody>
+      </p:sp>
+      <p:sp>
+        <p:nvSpPr>
+          <p:cNvPr id="24" name="Text 22"/>
+          <p:cNvSpPr txBox="1"/>
+          <p:nvPr/>
+        </p:nvSpPr>
+        <p:spPr>
+          <a:xfrm>
+            <a:off x="457200" y="3447288"/>
+            <a:ext cx="2103120" cy="274320"/>
+          </a:xfrm>
+          <a:prstGeom prst="rect">
+            <a:avLst/>
+          </a:prstGeom>
+          <a:noFill/>
+          <a:ln/>
+        </p:spPr>
+        <p:txBody>
+          <a:bodyPr wrap="square" lIns="0" tIns="0" rIns="0" bIns="0" rtlCol="0" anchor="ctr"/>
+          <a:lstStyle/>
+          <a:p>
+            <a:pPr algn="ctr" indent="0" marL="0">
+              <a:buNone/>
+            </a:pPr>
+            <a:r>
+              <a:rPr lang="en-US" sz="900" dirty="0">
+                <a:solidFill>
+                  <a:srgbClr val="C9D8F0"/>
                 </a:solidFill>
                 <a:latin typeface="Arial" pitchFamily="34" charset="0"/>
                 <a:ea typeface="Arial" pitchFamily="34" charset="-122"/>
                 <a:cs typeface="Arial" pitchFamily="34" charset="-120"/>
               </a:rPr>
-              <a:t>78 h</a:t>
-            </a:r>
-            <a:endParaRPr lang="en-US" sz="2700" dirty="0"/>
-          </a:p>
-        </p:txBody>
-      </p:sp>
-      <p:sp>
-        <p:nvSpPr>
-          <p:cNvPr id="13" name="Text 11"/>
-          <p:cNvSpPr txBox="1"/>
-          <p:nvPr/>
-        </p:nvSpPr>
-        <p:spPr>
-          <a:xfrm>
-            <a:off x="3511296" y="1783080"/>
-            <a:ext cx="2377440" cy="594360"/>
+              <a:t>link resilience</a:t>
+            </a:r>
+            <a:endParaRPr lang="en-US" sz="900" dirty="0"/>
+          </a:p>
+        </p:txBody>
+      </p:sp>
+      <p:sp>
+        <p:nvSpPr>
+          <p:cNvPr id="25" name="Text 23"/>
+          <p:cNvSpPr txBox="1"/>
+          <p:nvPr/>
+        </p:nvSpPr>
+        <p:spPr>
+          <a:xfrm>
+            <a:off x="2743200" y="3063240"/>
+            <a:ext cx="5577840" cy="694944"/>
           </a:xfrm>
           <a:prstGeom prst="rect">
             <a:avLst/>
@@ -13074,30 +14168,30 @@
               <a:buNone/>
             </a:pPr>
             <a:r>
-              <a:rPr lang="en-US" sz="1050" dirty="0">
-                <a:solidFill>
-                  <a:srgbClr val="5E6B85"/>
+              <a:rPr lang="en-US" sz="1200" dirty="0">
+                <a:solidFill>
+                  <a:srgbClr val="222A3F"/>
                 </a:solidFill>
                 <a:latin typeface="Arial" pitchFamily="34" charset="0"/>
                 <a:ea typeface="Arial" pitchFamily="34" charset="-122"/>
                 <a:cs typeface="Arial" pitchFamily="34" charset="-120"/>
               </a:rPr>
-              <a:t>logged through week three</a:t>
-            </a:r>
-            <a:endParaRPr lang="en-US" sz="1050" dirty="0"/>
-          </a:p>
-        </p:txBody>
-      </p:sp>
-      <p:sp>
-        <p:nvSpPr>
-          <p:cNvPr id="14" name="Shape 12"/>
+              <a:t>BLE self-heals after drop, no user action</a:t>
+            </a:r>
+            <a:endParaRPr lang="en-US" sz="1200" dirty="0"/>
+          </a:p>
+        </p:txBody>
+      </p:sp>
+      <p:sp>
+        <p:nvSpPr>
+          <p:cNvPr id="26" name="Shape 24"/>
           <p:cNvSpPr/>
           <p:nvPr/>
         </p:nvSpPr>
         <p:spPr>
           <a:xfrm>
-            <a:off x="6199632" y="1097280"/>
-            <a:ext cx="2688336" cy="1371600"/>
+            <a:off x="8503920" y="3008376"/>
+            <a:ext cx="3246120" cy="804672"/>
           </a:xfrm>
           <a:prstGeom prst="rect">
             <a:avLst/>
@@ -13105,9 +14199,9 @@
           <a:solidFill>
             <a:srgbClr val="F2F5FA"/>
           </a:solidFill>
-          <a:ln w="9525">
+          <a:ln w="15875">
             <a:solidFill>
-              <a:srgbClr val="9AA7BE"/>
+              <a:srgbClr val="1F9D68"/>
             </a:solidFill>
             <a:prstDash val="solid"/>
           </a:ln>
@@ -13115,14 +14209,14 @@
       </p:sp>
       <p:sp>
         <p:nvSpPr>
-          <p:cNvPr id="15" name="Text 13"/>
-          <p:cNvSpPr txBox="1"/>
-          <p:nvPr/>
-        </p:nvSpPr>
-        <p:spPr>
-          <a:xfrm>
-            <a:off x="6382512" y="1207008"/>
-            <a:ext cx="2377440" cy="548640"/>
+          <p:cNvPr id="27" name="Text 25"/>
+          <p:cNvSpPr txBox="1"/>
+          <p:nvPr/>
+        </p:nvSpPr>
+        <p:spPr>
+          <a:xfrm>
+            <a:off x="8641080" y="3063240"/>
+            <a:ext cx="3017520" cy="694944"/>
           </a:xfrm>
           <a:prstGeom prst="rect">
             <a:avLst/>
@@ -13138,30 +14232,128 @@
               <a:buNone/>
             </a:pPr>
             <a:r>
-              <a:rPr lang="en-US" sz="2700" b="1" dirty="0">
-                <a:solidFill>
-                  <a:srgbClr val="16213D"/>
+              <a:rPr lang="en-US" sz="1150" b="1" dirty="0">
+                <a:solidFill>
+                  <a:srgbClr val="1F9D68"/>
+                </a:solidFill>
+                <a:latin typeface="Courier New" pitchFamily="34" charset="0"/>
+                <a:ea typeface="Courier New" pitchFamily="34" charset="-122"/>
+                <a:cs typeface="Courier New" pitchFamily="34" charset="-120"/>
+              </a:rPr>
+              <a:t>100% of drops, &lt; 30 s</a:t>
+            </a:r>
+            <a:endParaRPr lang="en-US" sz="1150" dirty="0"/>
+          </a:p>
+        </p:txBody>
+      </p:sp>
+      <p:sp>
+        <p:nvSpPr>
+          <p:cNvPr id="28" name="Shape 26"/>
+          <p:cNvSpPr/>
+          <p:nvPr/>
+        </p:nvSpPr>
+        <p:spPr>
+          <a:xfrm>
+            <a:off x="457200" y="3941064"/>
+            <a:ext cx="2103120" cy="804672"/>
+          </a:xfrm>
+          <a:prstGeom prst="rect">
+            <a:avLst/>
+          </a:prstGeom>
+          <a:solidFill>
+            <a:srgbClr val="16213D"/>
+          </a:solidFill>
+          <a:ln/>
+        </p:spPr>
+      </p:sp>
+      <p:sp>
+        <p:nvSpPr>
+          <p:cNvPr id="29" name="Text 27"/>
+          <p:cNvSpPr txBox="1"/>
+          <p:nvPr/>
+        </p:nvSpPr>
+        <p:spPr>
+          <a:xfrm>
+            <a:off x="457200" y="4014216"/>
+            <a:ext cx="2103120" cy="365760"/>
+          </a:xfrm>
+          <a:prstGeom prst="rect">
+            <a:avLst/>
+          </a:prstGeom>
+          <a:noFill/>
+          <a:ln/>
+        </p:spPr>
+        <p:txBody>
+          <a:bodyPr wrap="square" lIns="0" tIns="0" rIns="0" bIns="0" rtlCol="0" anchor="ctr"/>
+          <a:lstStyle/>
+          <a:p>
+            <a:pPr algn="ctr" indent="0" marL="0">
+              <a:buNone/>
+            </a:pPr>
+            <a:r>
+              <a:rPr lang="en-US" sz="1300" b="1" dirty="0">
+                <a:solidFill>
+                  <a:srgbClr val="E58E1A"/>
+                </a:solidFill>
+                <a:latin typeface="Courier New" pitchFamily="34" charset="0"/>
+                <a:ea typeface="Courier New" pitchFamily="34" charset="-122"/>
+                <a:cs typeface="Courier New" pitchFamily="34" charset="-120"/>
+              </a:rPr>
+              <a:t>DR ERROR</a:t>
+            </a:r>
+            <a:endParaRPr lang="en-US" sz="1300" dirty="0"/>
+          </a:p>
+        </p:txBody>
+      </p:sp>
+      <p:sp>
+        <p:nvSpPr>
+          <p:cNvPr id="30" name="Text 28"/>
+          <p:cNvSpPr txBox="1"/>
+          <p:nvPr/>
+        </p:nvSpPr>
+        <p:spPr>
+          <a:xfrm>
+            <a:off x="457200" y="4379976"/>
+            <a:ext cx="2103120" cy="274320"/>
+          </a:xfrm>
+          <a:prstGeom prst="rect">
+            <a:avLst/>
+          </a:prstGeom>
+          <a:noFill/>
+          <a:ln/>
+        </p:spPr>
+        <p:txBody>
+          <a:bodyPr wrap="square" lIns="0" tIns="0" rIns="0" bIns="0" rtlCol="0" anchor="ctr"/>
+          <a:lstStyle/>
+          <a:p>
+            <a:pPr algn="ctr" indent="0" marL="0">
+              <a:buNone/>
+            </a:pPr>
+            <a:r>
+              <a:rPr lang="en-US" sz="900" dirty="0">
+                <a:solidFill>
+                  <a:srgbClr val="C9D8F0"/>
                 </a:solidFill>
                 <a:latin typeface="Arial" pitchFamily="34" charset="0"/>
                 <a:ea typeface="Arial" pitchFamily="34" charset="-122"/>
                 <a:cs typeface="Arial" pitchFamily="34" charset="-120"/>
               </a:rPr>
-              <a:t>4 + 1</a:t>
-            </a:r>
-            <a:endParaRPr lang="en-US" sz="2700" dirty="0"/>
-          </a:p>
-        </p:txBody>
-      </p:sp>
-      <p:sp>
-        <p:nvSpPr>
-          <p:cNvPr id="16" name="Text 14"/>
-          <p:cNvSpPr txBox="1"/>
-          <p:nvPr/>
-        </p:nvSpPr>
-        <p:spPr>
-          <a:xfrm>
-            <a:off x="6382512" y="1783080"/>
-            <a:ext cx="2377440" cy="594360"/>
+              <a:t>projection honesty</a:t>
+            </a:r>
+            <a:endParaRPr lang="en-US" sz="900" dirty="0"/>
+          </a:p>
+        </p:txBody>
+      </p:sp>
+      <p:sp>
+        <p:nvSpPr>
+          <p:cNvPr id="31" name="Text 29"/>
+          <p:cNvSpPr txBox="1"/>
+          <p:nvPr/>
+        </p:nvSpPr>
+        <p:spPr>
+          <a:xfrm>
+            <a:off x="2743200" y="3995928"/>
+            <a:ext cx="5577840" cy="694944"/>
           </a:xfrm>
           <a:prstGeom prst="rect">
             <a:avLst/>
@@ -13177,30 +14369,30 @@
               <a:buNone/>
             </a:pPr>
             <a:r>
-              <a:rPr lang="en-US" sz="1050" dirty="0">
-                <a:solidFill>
-                  <a:srgbClr val="5E6B85"/>
+              <a:rPr lang="en-US" sz="1200" dirty="0">
+                <a:solidFill>
+                  <a:srgbClr val="222A3F"/>
                 </a:solidFill>
                 <a:latin typeface="Arial" pitchFamily="34" charset="0"/>
                 <a:ea typeface="Arial" pitchFamily="34" charset="-122"/>
                 <a:cs typeface="Arial" pitchFamily="34" charset="-120"/>
               </a:rPr>
-              <a:t>layers proven + the layer this sheet set closes</a:t>
-            </a:r>
-            <a:endParaRPr lang="en-US" sz="1050" dirty="0"/>
-          </a:p>
-        </p:txBody>
-      </p:sp>
-      <p:sp>
-        <p:nvSpPr>
-          <p:cNvPr id="17" name="Shape 15"/>
+              <a:t>gap between projected and next real fix</a:t>
+            </a:r>
+            <a:endParaRPr lang="en-US" sz="1200" dirty="0"/>
+          </a:p>
+        </p:txBody>
+      </p:sp>
+      <p:sp>
+        <p:nvSpPr>
+          <p:cNvPr id="32" name="Shape 30"/>
           <p:cNvSpPr/>
           <p:nvPr/>
         </p:nvSpPr>
         <p:spPr>
           <a:xfrm>
-            <a:off x="9070848" y="1097280"/>
-            <a:ext cx="2688336" cy="1371600"/>
+            <a:off x="8503920" y="3941064"/>
+            <a:ext cx="3246120" cy="804672"/>
           </a:xfrm>
           <a:prstGeom prst="rect">
             <a:avLst/>
@@ -13208,9 +14400,9 @@
           <a:solidFill>
             <a:srgbClr val="F2F5FA"/>
           </a:solidFill>
-          <a:ln w="9525">
+          <a:ln w="15875">
             <a:solidFill>
-              <a:srgbClr val="9AA7BE"/>
+              <a:srgbClr val="1F9D68"/>
             </a:solidFill>
             <a:prstDash val="solid"/>
           </a:ln>
@@ -13218,14 +14410,14 @@
       </p:sp>
       <p:sp>
         <p:nvSpPr>
-          <p:cNvPr id="18" name="Text 16"/>
-          <p:cNvSpPr txBox="1"/>
-          <p:nvPr/>
-        </p:nvSpPr>
-        <p:spPr>
-          <a:xfrm>
-            <a:off x="9253728" y="1207008"/>
-            <a:ext cx="2377440" cy="548640"/>
+          <p:cNvPr id="33" name="Text 31"/>
+          <p:cNvSpPr txBox="1"/>
+          <p:nvPr/>
+        </p:nvSpPr>
+        <p:spPr>
+          <a:xfrm>
+            <a:off x="8641080" y="3995928"/>
+            <a:ext cx="3017520" cy="694944"/>
           </a:xfrm>
           <a:prstGeom prst="rect">
             <a:avLst/>
@@ -13241,30 +14433,128 @@
               <a:buNone/>
             </a:pPr>
             <a:r>
-              <a:rPr lang="en-US" sz="2700" b="1" dirty="0">
-                <a:solidFill>
-                  <a:srgbClr val="16213D"/>
+              <a:rPr lang="en-US" sz="1150" b="1" dirty="0">
+                <a:solidFill>
+                  <a:srgbClr val="1F9D68"/>
+                </a:solidFill>
+                <a:latin typeface="Courier New" pitchFamily="34" charset="0"/>
+                <a:ea typeface="Courier New" pitchFamily="34" charset="-122"/>
+                <a:cs typeface="Courier New" pitchFamily="34" charset="-120"/>
+              </a:rPr>
+              <a:t>&lt; 30 m at highway speed</a:t>
+            </a:r>
+            <a:endParaRPr lang="en-US" sz="1150" dirty="0"/>
+          </a:p>
+        </p:txBody>
+      </p:sp>
+      <p:sp>
+        <p:nvSpPr>
+          <p:cNvPr id="34" name="Shape 32"/>
+          <p:cNvSpPr/>
+          <p:nvPr/>
+        </p:nvSpPr>
+        <p:spPr>
+          <a:xfrm>
+            <a:off x="457200" y="4873752"/>
+            <a:ext cx="2103120" cy="804672"/>
+          </a:xfrm>
+          <a:prstGeom prst="rect">
+            <a:avLst/>
+          </a:prstGeom>
+          <a:solidFill>
+            <a:srgbClr val="16213D"/>
+          </a:solidFill>
+          <a:ln/>
+        </p:spPr>
+      </p:sp>
+      <p:sp>
+        <p:nvSpPr>
+          <p:cNvPr id="35" name="Text 33"/>
+          <p:cNvSpPr txBox="1"/>
+          <p:nvPr/>
+        </p:nvSpPr>
+        <p:spPr>
+          <a:xfrm>
+            <a:off x="457200" y="4946904"/>
+            <a:ext cx="2103120" cy="365760"/>
+          </a:xfrm>
+          <a:prstGeom prst="rect">
+            <a:avLst/>
+          </a:prstGeom>
+          <a:noFill/>
+          <a:ln/>
+        </p:spPr>
+        <p:txBody>
+          <a:bodyPr wrap="square" lIns="0" tIns="0" rIns="0" bIns="0" rtlCol="0" anchor="ctr"/>
+          <a:lstStyle/>
+          <a:p>
+            <a:pPr algn="ctr" indent="0" marL="0">
+              <a:buNone/>
+            </a:pPr>
+            <a:r>
+              <a:rPr lang="en-US" sz="1300" b="1" dirty="0">
+                <a:solidFill>
+                  <a:srgbClr val="E58E1A"/>
+                </a:solidFill>
+                <a:latin typeface="Courier New" pitchFamily="34" charset="0"/>
+                <a:ea typeface="Courier New" pitchFamily="34" charset="-122"/>
+                <a:cs typeface="Courier New" pitchFamily="34" charset="-120"/>
+              </a:rPr>
+              <a:t>CHUTIL</a:t>
+            </a:r>
+            <a:endParaRPr lang="en-US" sz="1300" dirty="0"/>
+          </a:p>
+        </p:txBody>
+      </p:sp>
+      <p:sp>
+        <p:nvSpPr>
+          <p:cNvPr id="36" name="Text 34"/>
+          <p:cNvSpPr txBox="1"/>
+          <p:nvPr/>
+        </p:nvSpPr>
+        <p:spPr>
+          <a:xfrm>
+            <a:off x="457200" y="5312664"/>
+            <a:ext cx="2103120" cy="274320"/>
+          </a:xfrm>
+          <a:prstGeom prst="rect">
+            <a:avLst/>
+          </a:prstGeom>
+          <a:noFill/>
+          <a:ln/>
+        </p:spPr>
+        <p:txBody>
+          <a:bodyPr wrap="square" lIns="0" tIns="0" rIns="0" bIns="0" rtlCol="0" anchor="ctr"/>
+          <a:lstStyle/>
+          <a:p>
+            <a:pPr algn="ctr" indent="0" marL="0">
+              <a:buNone/>
+            </a:pPr>
+            <a:r>
+              <a:rPr lang="en-US" sz="900" dirty="0">
+                <a:solidFill>
+                  <a:srgbClr val="C9D8F0"/>
                 </a:solidFill>
                 <a:latin typeface="Arial" pitchFamily="34" charset="0"/>
                 <a:ea typeface="Arial" pitchFamily="34" charset="-122"/>
                 <a:cs typeface="Arial" pitchFamily="34" charset="-120"/>
               </a:rPr>
-              <a:t>5</a:t>
-            </a:r>
-            <a:endParaRPr lang="en-US" sz="2700" dirty="0"/>
-          </a:p>
-        </p:txBody>
-      </p:sp>
-      <p:sp>
-        <p:nvSpPr>
-          <p:cNvPr id="19" name="Text 17"/>
-          <p:cNvSpPr txBox="1"/>
-          <p:nvPr/>
-        </p:nvSpPr>
-        <p:spPr>
-          <a:xfrm>
-            <a:off x="9253728" y="1783080"/>
-            <a:ext cx="2377440" cy="594360"/>
+              <a:t>channel citizenship</a:t>
+            </a:r>
+            <a:endParaRPr lang="en-US" sz="900" dirty="0"/>
+          </a:p>
+        </p:txBody>
+      </p:sp>
+      <p:sp>
+        <p:nvSpPr>
+          <p:cNvPr id="37" name="Text 35"/>
+          <p:cNvSpPr txBox="1"/>
+          <p:nvPr/>
+        </p:nvSpPr>
+        <p:spPr>
+          <a:xfrm>
+            <a:off x="2743200" y="4928616"/>
+            <a:ext cx="5577840" cy="694944"/>
           </a:xfrm>
           <a:prstGeom prst="rect">
             <a:avLst/>
@@ -13280,30 +14570,55 @@
               <a:buNone/>
             </a:pPr>
             <a:r>
-              <a:rPr lang="en-US" sz="1050" dirty="0">
-                <a:solidFill>
-                  <a:srgbClr val="5E6B85"/>
+              <a:rPr lang="en-US" sz="1200" dirty="0">
+                <a:solidFill>
+                  <a:srgbClr val="222A3F"/>
                 </a:solidFill>
                 <a:latin typeface="Arial" pitchFamily="34" charset="0"/>
                 <a:ea typeface="Arial" pitchFamily="34" charset="-122"/>
                 <a:cs typeface="Arial" pitchFamily="34" charset="-120"/>
               </a:rPr>
-              <a:t>metrics pre-declared, thresholds locked</a:t>
-            </a:r>
-            <a:endParaRPr lang="en-US" sz="1050" dirty="0"/>
-          </a:p>
-        </p:txBody>
-      </p:sp>
-      <p:sp>
-        <p:nvSpPr>
-          <p:cNvPr id="20" name="Text 18"/>
-          <p:cNvSpPr txBox="1"/>
-          <p:nvPr/>
-        </p:nvSpPr>
-        <p:spPr>
-          <a:xfrm>
-            <a:off x="457200" y="2788920"/>
-            <a:ext cx="5486400" cy="320040"/>
+              <a:t>utilization with both radios broadcasting</a:t>
+            </a:r>
+            <a:endParaRPr lang="en-US" sz="1200" dirty="0"/>
+          </a:p>
+        </p:txBody>
+      </p:sp>
+      <p:sp>
+        <p:nvSpPr>
+          <p:cNvPr id="38" name="Shape 36"/>
+          <p:cNvSpPr/>
+          <p:nvPr/>
+        </p:nvSpPr>
+        <p:spPr>
+          <a:xfrm>
+            <a:off x="8503920" y="4873752"/>
+            <a:ext cx="3246120" cy="804672"/>
+          </a:xfrm>
+          <a:prstGeom prst="rect">
+            <a:avLst/>
+          </a:prstGeom>
+          <a:solidFill>
+            <a:srgbClr val="F2F5FA"/>
+          </a:solidFill>
+          <a:ln w="15875">
+            <a:solidFill>
+              <a:srgbClr val="1F9D68"/>
+            </a:solidFill>
+            <a:prstDash val="solid"/>
+          </a:ln>
+        </p:spPr>
+      </p:sp>
+      <p:sp>
+        <p:nvSpPr>
+          <p:cNvPr id="39" name="Text 37"/>
+          <p:cNvSpPr txBox="1"/>
+          <p:nvPr/>
+        </p:nvSpPr>
+        <p:spPr>
+          <a:xfrm>
+            <a:off x="8641080" y="4928616"/>
+            <a:ext cx="3017520" cy="694944"/>
           </a:xfrm>
           <a:prstGeom prst="rect">
             <a:avLst/>
@@ -13319,133 +14634,30 @@
               <a:buNone/>
             </a:pPr>
             <a:r>
-              <a:rPr lang="en-US" sz="1300" b="1" spc="100" kern="0" dirty="0">
-                <a:solidFill>
-                  <a:srgbClr val="16213D"/>
-                </a:solidFill>
-                <a:latin typeface="Arial" pitchFamily="34" charset="0"/>
-                <a:ea typeface="Arial" pitchFamily="34" charset="-122"/>
-                <a:cs typeface="Arial" pitchFamily="34" charset="-120"/>
-              </a:rPr>
-              <a:t>THIS WEEK, IN ORDER</a:t>
-            </a:r>
-            <a:endParaRPr lang="en-US" sz="1300" dirty="0"/>
-          </a:p>
-        </p:txBody>
-      </p:sp>
-      <p:sp>
-        <p:nvSpPr>
-          <p:cNvPr id="21" name="Text 19"/>
-          <p:cNvSpPr txBox="1"/>
-          <p:nvPr/>
-        </p:nvSpPr>
-        <p:spPr>
-          <a:xfrm>
-            <a:off x="457200" y="3154680"/>
-            <a:ext cx="5760720" cy="2103120"/>
-          </a:xfrm>
-          <a:prstGeom prst="rect">
-            <a:avLst/>
-          </a:prstGeom>
-          <a:noFill/>
-          <a:ln/>
-        </p:spPr>
-        <p:txBody>
-          <a:bodyPr wrap="square" lIns="0" tIns="0" rIns="0" bIns="0" rtlCol="0" anchor="ctr"/>
-          <a:lstStyle/>
-          <a:p>
-            <a:pPr marL="342900" indent="-342900">
-              <a:spcAft>
-                <a:spcPts val="600"/>
-              </a:spcAft>
-              <a:buSzPct val="100000"/>
-              <a:buChar char="▪"/>
-            </a:pPr>
-            <a:r>
-              <a:rPr lang="en-US" sz="1250" dirty="0">
-                <a:solidFill>
-                  <a:srgbClr val="222A3F"/>
-                </a:solidFill>
-                <a:latin typeface="Arial" pitchFamily="34" charset="0"/>
-                <a:ea typeface="Arial" pitchFamily="34" charset="-122"/>
-                <a:cs typeface="Arial" pitchFamily="34" charset="-120"/>
-              </a:rPr>
-              <a:t>Partner selection lands in firmware (Deo), before the ambiguity it resolves arrives.</a:t>
-            </a:r>
-            <a:endParaRPr lang="en-US" sz="1250" dirty="0"/>
-          </a:p>
-          <a:p>
-            <a:pPr marL="342900" indent="-342900">
-              <a:spcAft>
-                <a:spcPts val="600"/>
-              </a:spcAft>
-              <a:buSzPct val="100000"/>
-              <a:buChar char="▪"/>
-            </a:pPr>
-            <a:r>
-              <a:rPr lang="en-US" sz="1250" dirty="0">
-                <a:solidFill>
-                  <a:srgbClr val="222A3F"/>
-                </a:solidFill>
-                <a:latin typeface="Arial" pitchFamily="34" charset="0"/>
-                <a:ea typeface="Arial" pitchFamily="34" charset="-122"/>
-                <a:cs typeface="Arial" pitchFamily="34" charset="-120"/>
-              </a:rPr>
-              <a:t>Radio two provisioned by the recipe; acceptance criteria 1 to 4 checked off (Victor).</a:t>
-            </a:r>
-            <a:endParaRPr lang="en-US" sz="1250" dirty="0"/>
-          </a:p>
-          <a:p>
-            <a:pPr marL="342900" indent="-342900">
-              <a:spcAft>
-                <a:spcPts val="600"/>
-              </a:spcAft>
-              <a:buSzPct val="100000"/>
-              <a:buChar char="▪"/>
-            </a:pPr>
-            <a:r>
-              <a:rPr lang="en-US" sz="1250" dirty="0">
-                <a:solidFill>
-                  <a:srgbClr val="222A3F"/>
-                </a:solidFill>
-                <a:latin typeface="Arial" pitchFamily="34" charset="0"/>
-                <a:ea typeface="Arial" pitchFamily="34" charset="-122"/>
-                <a:cs typeface="Arial" pitchFamily="34" charset="-120"/>
-              </a:rPr>
-              <a:t>Bench soak, then the static range walk with the logging harness live (Cannon).</a:t>
-            </a:r>
-            <a:endParaRPr lang="en-US" sz="1250" dirty="0"/>
-          </a:p>
-          <a:p>
-            <a:pPr marL="342900" indent="-342900">
-              <a:buSzPct val="100000"/>
-              <a:buChar char="▪"/>
-            </a:pPr>
-            <a:r>
-              <a:rPr lang="en-US" sz="1250" dirty="0">
-                <a:solidFill>
-                  <a:srgbClr val="222A3F"/>
-                </a:solidFill>
-                <a:latin typeface="Arial" pitchFamily="34" charset="0"/>
-                <a:ea typeface="Arial" pitchFamily="34" charset="-122"/>
-                <a:cs typeface="Arial" pitchFamily="34" charset="-120"/>
-              </a:rPr>
-              <a:t>Partner-selection screen and night readability on the display (Josiah).</a:t>
-            </a:r>
-            <a:endParaRPr lang="en-US" sz="1250" dirty="0"/>
-          </a:p>
-        </p:txBody>
-      </p:sp>
-      <p:sp>
-        <p:nvSpPr>
-          <p:cNvPr id="22" name="Text 20"/>
-          <p:cNvSpPr txBox="1"/>
-          <p:nvPr/>
-        </p:nvSpPr>
-        <p:spPr>
-          <a:xfrm>
-            <a:off x="6537960" y="2788920"/>
-            <a:ext cx="4572000" cy="320040"/>
+              <a:rPr lang="en-US" sz="1150" b="1" dirty="0">
+                <a:solidFill>
+                  <a:srgbClr val="1F9D68"/>
+                </a:solidFill>
+                <a:latin typeface="Courier New" pitchFamily="34" charset="0"/>
+                <a:ea typeface="Courier New" pitchFamily="34" charset="-122"/>
+                <a:cs typeface="Courier New" pitchFamily="34" charset="-120"/>
+              </a:rPr>
+              <a:t>&lt; 10% steady state</a:t>
+            </a:r>
+            <a:endParaRPr lang="en-US" sz="1150" dirty="0"/>
+          </a:p>
+        </p:txBody>
+      </p:sp>
+      <p:sp>
+        <p:nvSpPr>
+          <p:cNvPr id="40" name="Text 38"/>
+          <p:cNvSpPr txBox="1"/>
+          <p:nvPr/>
+        </p:nvSpPr>
+        <p:spPr>
+          <a:xfrm>
+            <a:off x="457200" y="5870448"/>
+            <a:ext cx="11292840" cy="274320"/>
           </a:xfrm>
           <a:prstGeom prst="rect">
             <a:avLst/>
@@ -13461,179 +14673,17 @@
               <a:buNone/>
             </a:pPr>
             <a:r>
-              <a:rPr lang="en-US" sz="1300" b="1" spc="100" kern="0" dirty="0">
-                <a:solidFill>
-                  <a:srgbClr val="16213D"/>
-                </a:solidFill>
-                <a:latin typeface="Arial" pitchFamily="34" charset="0"/>
-                <a:ea typeface="Arial" pitchFamily="34" charset="-122"/>
-                <a:cs typeface="Arial" pitchFamily="34" charset="-120"/>
-              </a:rPr>
-              <a:t>NEXT REVIEW REPORTS</a:t>
-            </a:r>
-            <a:endParaRPr lang="en-US" sz="1300" dirty="0"/>
-          </a:p>
-        </p:txBody>
-      </p:sp>
-      <p:sp>
-        <p:nvSpPr>
-          <p:cNvPr id="23" name="Text 21"/>
-          <p:cNvSpPr txBox="1"/>
-          <p:nvPr/>
-        </p:nvSpPr>
-        <p:spPr>
-          <a:xfrm>
-            <a:off x="6537960" y="3154680"/>
-            <a:ext cx="5120640" cy="2103120"/>
-          </a:xfrm>
-          <a:prstGeom prst="rect">
-            <a:avLst/>
-          </a:prstGeom>
-          <a:noFill/>
-          <a:ln/>
-        </p:spPr>
-        <p:txBody>
-          <a:bodyPr wrap="square" lIns="0" tIns="0" rIns="0" bIns="0" rtlCol="0" anchor="ctr"/>
-          <a:lstStyle/>
-          <a:p>
-            <a:pPr marL="342900" indent="-342900">
-              <a:spcAft>
-                <a:spcPts val="600"/>
-              </a:spcAft>
-              <a:buSzPct val="100000"/>
-              <a:buChar char="▪"/>
-            </a:pPr>
-            <a:r>
-              <a:rPr lang="en-US" sz="1250" dirty="0">
-                <a:solidFill>
-                  <a:srgbClr val="222A3F"/>
-                </a:solidFill>
-                <a:latin typeface="Arial" pitchFamily="34" charset="0"/>
-                <a:ea typeface="Arial" pitchFamily="34" charset="-122"/>
-                <a:cs typeface="Arial" pitchFamily="34" charset="-120"/>
-              </a:rPr>
-              <a:t>The before/after of the PTR row: “no partner heard yet” to live coordinates.</a:t>
-            </a:r>
-            <a:endParaRPr lang="en-US" sz="1250" dirty="0"/>
-          </a:p>
-          <a:p>
-            <a:pPr marL="342900" indent="-342900">
-              <a:spcAft>
-                <a:spcPts val="600"/>
-              </a:spcAft>
-              <a:buSzPct val="100000"/>
-              <a:buChar char="▪"/>
-            </a:pPr>
-            <a:r>
-              <a:rPr lang="en-US" sz="1250" dirty="0">
-                <a:solidFill>
-                  <a:srgbClr val="222A3F"/>
-                </a:solidFill>
-                <a:latin typeface="Arial" pitchFamily="34" charset="0"/>
-                <a:ea typeface="Arial" pitchFamily="34" charset="-122"/>
-                <a:cs typeface="Arial" pitchFamily="34" charset="-120"/>
-              </a:rPr>
-              <a:t>Field RSSI points overlaid on sheet 05's predicted curve.</a:t>
-            </a:r>
-            <a:endParaRPr lang="en-US" sz="1250" dirty="0"/>
-          </a:p>
-          <a:p>
-            <a:pPr marL="342900" indent="-342900">
-              <a:spcAft>
-                <a:spcPts val="600"/>
-              </a:spcAft>
-              <a:buSzPct val="100000"/>
-              <a:buChar char="▪"/>
-            </a:pPr>
-            <a:r>
-              <a:rPr lang="en-US" sz="1250" dirty="0">
-                <a:solidFill>
-                  <a:srgbClr val="222A3F"/>
-                </a:solidFill>
-                <a:latin typeface="Arial" pitchFamily="34" charset="0"/>
-                <a:ea typeface="Arial" pitchFamily="34" charset="-122"/>
-                <a:cs typeface="Arial" pitchFamily="34" charset="-120"/>
-              </a:rPr>
-              <a:t>The five metrics from sheet 08, each marked pass or fail.</a:t>
-            </a:r>
-            <a:endParaRPr lang="en-US" sz="1250" dirty="0"/>
-          </a:p>
-          <a:p>
-            <a:pPr marL="342900" indent="-342900">
-              <a:buSzPct val="100000"/>
-              <a:buChar char="▪"/>
-            </a:pPr>
-            <a:r>
-              <a:rPr lang="en-US" sz="1250" dirty="0">
-                <a:solidFill>
-                  <a:srgbClr val="222A3F"/>
-                </a:solidFill>
-                <a:latin typeface="Arial" pitchFamily="34" charset="0"/>
-                <a:ea typeface="Arial" pitchFamily="34" charset="-122"/>
-                <a:cs typeface="Arial" pitchFamily="34" charset="-120"/>
-              </a:rPr>
-              <a:t>Then the first two-vehicle drive test.</a:t>
-            </a:r>
-            <a:endParaRPr lang="en-US" sz="1250" dirty="0"/>
-          </a:p>
-        </p:txBody>
-      </p:sp>
-      <p:sp>
-        <p:nvSpPr>
-          <p:cNvPr id="24" name="Shape 22"/>
-          <p:cNvSpPr/>
-          <p:nvPr/>
-        </p:nvSpPr>
-        <p:spPr>
-          <a:xfrm>
-            <a:off x="457200" y="5440680"/>
-            <a:ext cx="11292840" cy="685800"/>
-          </a:xfrm>
-          <a:prstGeom prst="rect">
-            <a:avLst/>
-          </a:prstGeom>
-          <a:solidFill>
-            <a:srgbClr val="16213D"/>
-          </a:solidFill>
-          <a:ln/>
-        </p:spPr>
-      </p:sp>
-      <p:sp>
-        <p:nvSpPr>
-          <p:cNvPr id="25" name="Text 23"/>
-          <p:cNvSpPr txBox="1"/>
-          <p:nvPr/>
-        </p:nvSpPr>
-        <p:spPr>
-          <a:xfrm>
-            <a:off x="731520" y="5532120"/>
-            <a:ext cx="10744200" cy="502920"/>
-          </a:xfrm>
-          <a:prstGeom prst="rect">
-            <a:avLst/>
-          </a:prstGeom>
-          <a:noFill/>
-          <a:ln/>
-        </p:spPr>
-        <p:txBody>
-          <a:bodyPr wrap="square" lIns="0" tIns="0" rIns="0" bIns="0" rtlCol="0" anchor="ctr"/>
-          <a:lstStyle/>
-          <a:p>
-            <a:pPr indent="0" marL="0">
-              <a:buNone/>
-            </a:pPr>
-            <a:r>
-              <a:rPr lang="en-US" sz="1250" dirty="0">
-                <a:solidFill>
-                  <a:srgbClr val="FFFFFF"/>
-                </a:solidFill>
-                <a:latin typeface="Arial" pitchFamily="34" charset="0"/>
-                <a:ea typeface="Arial" pitchFamily="34" charset="-122"/>
-                <a:cs typeface="Arial" pitchFamily="34" charset="-120"/>
-              </a:rPr>
-              <a:t>Last week we showed a working machine. This week we published the exam it must pass. Next week it takes the exam.</a:t>
-            </a:r>
-            <a:endParaRPr lang="en-US" sz="1250" dirty="0"/>
+              <a:rPr lang="en-US" sz="1000" b="1" dirty="0">
+                <a:solidFill>
+                  <a:srgbClr val="5E6B85"/>
+                </a:solidFill>
+                <a:latin typeface="Courier New" pitchFamily="34" charset="0"/>
+                <a:ea typeface="Courier New" pitchFamily="34" charset="-122"/>
+                <a:cs typeface="Courier New" pitchFamily="34" charset="-120"/>
+              </a:rPr>
+              <a:t>TARGETS SET BEFORE THE FIRST TWO-RADIO PACKET. NEXT REVIEW REPORTS EACH ROW, PASS OR FAIL.</a:t>
+            </a:r>
+            <a:endParaRPr lang="en-US" sz="1000" dirty="0"/>
           </a:p>
         </p:txBody>
       </p:sp>

--- a/docs/presentations/Group9_Presentation4_Week4.pptx
+++ b/docs/presentations/Group9_Presentation4_Week4.pptx
@@ -4480,7 +4480,7 @@
                 <a:ea typeface="Arial" pitchFamily="34" charset="-122"/>
                 <a:cs typeface="Arial" pitchFamily="34" charset="-120"/>
               </a:rPr>
-              <a:t>78 of 768 logged</a:t>
+              <a:t>98 of 768 logged</a:t>
             </a:r>
             <a:endParaRPr lang="en-US" sz="1050" dirty="0"/>
           </a:p>

--- a/docs/presentations/Group9_Presentation4_Week4.pptx
+++ b/docs/presentations/Group9_Presentation4_Week4.pptx
@@ -4480,7 +4480,7 @@
                 <a:ea typeface="Arial" pitchFamily="34" charset="-122"/>
                 <a:cs typeface="Arial" pitchFamily="34" charset="-120"/>
               </a:rPr>
-              <a:t>98 of 768 logged</a:t>
+              <a:t>122 of 768 logged</a:t>
             </a:r>
             <a:endParaRPr lang="en-US" sz="1050" dirty="0"/>
           </a:p>

--- a/docs/presentations/Group9_Presentation4_Week4.pptx
+++ b/docs/presentations/Group9_Presentation4_Week4.pptx
@@ -4379,7 +4379,7 @@
                 <a:ea typeface="Arial" pitchFamily="34" charset="-122"/>
                 <a:cs typeface="Arial" pitchFamily="34" charset="-120"/>
               </a:rPr>
-              <a:t>42% vs 25% target, ahead</a:t>
+              <a:t>48% vs 25% target, ahead</a:t>
             </a:r>
             <a:endParaRPr lang="en-US" sz="1050" dirty="0"/>
           </a:p>
@@ -4878,7 +4878,7 @@
                 <a:ea typeface="Arial" pitchFamily="34" charset="-122"/>
                 <a:cs typeface="Arial" pitchFamily="34" charset="-120"/>
               </a:rPr>
-              <a:t>42%</a:t>
+              <a:t>48%</a:t>
             </a:r>
             <a:endParaRPr lang="en-US" sz="2700" dirty="0"/>
           </a:p>
